--- a/Photosynthesis.pptx
+++ b/Photosynthesis.pptx
@@ -3089,7 +3089,7 @@
     <p:bg>
       <p:bgPr>
         <a:solidFill>
-          <a:srgbClr val="1B5E20"/>
+          <a:srgbClr val="1B4332"/>
         </a:solidFill>
         <a:effectLst/>
       </p:bgPr>
@@ -3109,14 +3109,14 @@
         </p:nvSpPr>
         <p:spPr>
           <a:xfrm>
-            <a:off x="0" y="2560320"/>
-            <a:ext cx="12191695" cy="1645920"/>
+            <a:off x="0" y="0"/>
+            <a:ext cx="12191695" cy="73152"/>
           </a:xfrm>
           <a:prstGeom prst="rect">
             <a:avLst/>
           </a:prstGeom>
           <a:solidFill>
-            <a:srgbClr val="2E7D32"/>
+            <a:srgbClr val="52B788"/>
           </a:solidFill>
           <a:ln>
             <a:noFill/>
@@ -3146,326 +3146,20 @@
       </p:sp>
       <p:sp>
         <p:nvSpPr>
-          <p:cNvPr id="3" name="TextBox 2"/>
-          <p:cNvSpPr txBox="1"/>
-          <p:nvPr/>
-        </p:nvSpPr>
-        <p:spPr>
-          <a:xfrm>
-            <a:off x="914400" y="914400"/>
-            <a:ext cx="10332720" cy="1097280"/>
-          </a:xfrm>
-          <a:prstGeom prst="rect">
-            <a:avLst/>
-          </a:prstGeom>
-          <a:noFill/>
-        </p:spPr>
-        <p:txBody>
-          <a:bodyPr wrap="square"/>
-          <a:lstStyle/>
-          <a:p>
-            <a:pPr algn="ctr">
-              <a:defRPr sz="5200" b="1">
-                <a:solidFill>
-                  <a:srgbClr val="FFFFFF"/>
-                </a:solidFill>
-                <a:latin typeface="Calibri Light"/>
-              </a:defRPr>
-            </a:pPr>
-            <a:r>
-              <a:t>Photosynthesis</a:t>
-            </a:r>
-          </a:p>
-        </p:txBody>
-      </p:sp>
-      <p:sp>
-        <p:nvSpPr>
-          <p:cNvPr id="4" name="TextBox 3"/>
-          <p:cNvSpPr txBox="1"/>
-          <p:nvPr/>
-        </p:nvSpPr>
-        <p:spPr>
-          <a:xfrm>
-            <a:off x="914400" y="1920240"/>
-            <a:ext cx="10332720" cy="731520"/>
-          </a:xfrm>
-          <a:prstGeom prst="rect">
-            <a:avLst/>
-          </a:prstGeom>
-          <a:noFill/>
-        </p:spPr>
-        <p:txBody>
-          <a:bodyPr wrap="square"/>
-          <a:lstStyle/>
-          <a:p>
-            <a:pPr algn="ctr">
-              <a:defRPr sz="2800" b="0">
-                <a:solidFill>
-                  <a:srgbClr val="CDDC39"/>
-                </a:solidFill>
-                <a:latin typeface="Calibri Light"/>
-              </a:defRPr>
-            </a:pPr>
-            <a:r>
-              <a:t>How Plants Make Their Own Food</a:t>
-            </a:r>
-          </a:p>
-        </p:txBody>
-      </p:sp>
-      <p:sp>
-        <p:nvSpPr>
-          <p:cNvPr id="5" name="TextBox 4"/>
-          <p:cNvSpPr txBox="1"/>
-          <p:nvPr/>
-        </p:nvSpPr>
-        <p:spPr>
-          <a:xfrm>
-            <a:off x="1828800" y="2880360"/>
-            <a:ext cx="8503920" cy="320040"/>
-          </a:xfrm>
-          <a:prstGeom prst="rect">
-            <a:avLst/>
-          </a:prstGeom>
-          <a:noFill/>
-        </p:spPr>
-        <p:txBody>
-          <a:bodyPr wrap="square"/>
-          <a:lstStyle/>
-          <a:p>
-            <a:pPr algn="ctr">
-              <a:defRPr sz="1100" b="1">
-                <a:solidFill>
-                  <a:srgbClr val="FFFFFF"/>
-                </a:solidFill>
-                <a:latin typeface="Calibri"/>
-              </a:defRPr>
-            </a:pPr>
-            <a:r>
-              <a:t>PRESENTED BY</a:t>
-            </a:r>
-          </a:p>
-        </p:txBody>
-      </p:sp>
-      <p:sp>
-        <p:nvSpPr>
-          <p:cNvPr id="6" name="TextBox 5"/>
-          <p:cNvSpPr txBox="1"/>
-          <p:nvPr/>
-        </p:nvSpPr>
-        <p:spPr>
-          <a:xfrm>
-            <a:off x="1828800" y="3200400"/>
-            <a:ext cx="8503920" cy="274320"/>
-          </a:xfrm>
-          <a:prstGeom prst="rect">
-            <a:avLst/>
-          </a:prstGeom>
-          <a:noFill/>
-        </p:spPr>
-        <p:txBody>
-          <a:bodyPr wrap="square"/>
-          <a:lstStyle/>
-          <a:p>
-            <a:pPr algn="ctr">
-              <a:defRPr sz="1600" b="0">
-                <a:solidFill>
-                  <a:srgbClr val="FFFFFF"/>
-                </a:solidFill>
-                <a:latin typeface="Calibri"/>
-              </a:defRPr>
-            </a:pPr>
-            <a:r>
-              <a:t>Dr. Sarah Chen</a:t>
-            </a:r>
-          </a:p>
-        </p:txBody>
-      </p:sp>
-      <p:sp>
-        <p:nvSpPr>
-          <p:cNvPr id="7" name="TextBox 6"/>
-          <p:cNvSpPr txBox="1"/>
-          <p:nvPr/>
-        </p:nvSpPr>
-        <p:spPr>
-          <a:xfrm>
-            <a:off x="1828800" y="3493008"/>
-            <a:ext cx="8503920" cy="274320"/>
-          </a:xfrm>
-          <a:prstGeom prst="rect">
-            <a:avLst/>
-          </a:prstGeom>
-          <a:noFill/>
-        </p:spPr>
-        <p:txBody>
-          <a:bodyPr wrap="square"/>
-          <a:lstStyle/>
-          <a:p>
-            <a:pPr algn="ctr">
-              <a:defRPr sz="1600" b="0">
-                <a:solidFill>
-                  <a:srgbClr val="FFFFFF"/>
-                </a:solidFill>
-                <a:latin typeface="Calibri"/>
-              </a:defRPr>
-            </a:pPr>
-            <a:r>
-              <a:t>Prof. Marcus Williams</a:t>
-            </a:r>
-          </a:p>
-        </p:txBody>
-      </p:sp>
-      <p:sp>
-        <p:nvSpPr>
-          <p:cNvPr id="8" name="TextBox 7"/>
-          <p:cNvSpPr txBox="1"/>
-          <p:nvPr/>
-        </p:nvSpPr>
-        <p:spPr>
-          <a:xfrm>
-            <a:off x="1828800" y="3785616"/>
-            <a:ext cx="8503920" cy="274320"/>
-          </a:xfrm>
-          <a:prstGeom prst="rect">
-            <a:avLst/>
-          </a:prstGeom>
-          <a:noFill/>
-        </p:spPr>
-        <p:txBody>
-          <a:bodyPr wrap="square"/>
-          <a:lstStyle/>
-          <a:p>
-            <a:pPr algn="ctr">
-              <a:defRPr sz="1600" b="0">
-                <a:solidFill>
-                  <a:srgbClr val="FFFFFF"/>
-                </a:solidFill>
-                <a:latin typeface="Calibri"/>
-              </a:defRPr>
-            </a:pPr>
-            <a:r>
-              <a:t>Dr. Aisha Patel</a:t>
-            </a:r>
-          </a:p>
-        </p:txBody>
-      </p:sp>
-      <p:sp>
-        <p:nvSpPr>
-          <p:cNvPr id="9" name="TextBox 8"/>
-          <p:cNvSpPr txBox="1"/>
-          <p:nvPr/>
-        </p:nvSpPr>
-        <p:spPr>
-          <a:xfrm>
-            <a:off x="1828800" y="4078224"/>
-            <a:ext cx="8503920" cy="274320"/>
-          </a:xfrm>
-          <a:prstGeom prst="rect">
-            <a:avLst/>
-          </a:prstGeom>
-          <a:noFill/>
-        </p:spPr>
-        <p:txBody>
-          <a:bodyPr wrap="square"/>
-          <a:lstStyle/>
-          <a:p>
-            <a:pPr algn="ctr">
-              <a:defRPr sz="1600" b="0">
-                <a:solidFill>
-                  <a:srgbClr val="FFFFFF"/>
-                </a:solidFill>
-                <a:latin typeface="Calibri"/>
-              </a:defRPr>
-            </a:pPr>
-            <a:r>
-              <a:t>Dr. James Rodriguez</a:t>
-            </a:r>
-          </a:p>
-        </p:txBody>
-      </p:sp>
-      <p:sp>
-        <p:nvSpPr>
-          <p:cNvPr id="10" name="TextBox 9"/>
-          <p:cNvSpPr txBox="1"/>
-          <p:nvPr/>
-        </p:nvSpPr>
-        <p:spPr>
-          <a:xfrm>
-            <a:off x="1828800" y="4370832"/>
-            <a:ext cx="8503920" cy="274320"/>
-          </a:xfrm>
-          <a:prstGeom prst="rect">
-            <a:avLst/>
-          </a:prstGeom>
-          <a:noFill/>
-        </p:spPr>
-        <p:txBody>
-          <a:bodyPr wrap="square"/>
-          <a:lstStyle/>
-          <a:p>
-            <a:pPr algn="ctr">
-              <a:defRPr sz="1600" b="0">
-                <a:solidFill>
-                  <a:srgbClr val="FFFFFF"/>
-                </a:solidFill>
-                <a:latin typeface="Calibri"/>
-              </a:defRPr>
-            </a:pPr>
-            <a:r>
-              <a:t>Prof. Emily Nakamura</a:t>
-            </a:r>
-          </a:p>
-        </p:txBody>
-      </p:sp>
-      <p:sp>
-        <p:nvSpPr>
-          <p:cNvPr id="11" name="TextBox 10"/>
-          <p:cNvSpPr txBox="1"/>
-          <p:nvPr/>
-        </p:nvSpPr>
-        <p:spPr>
-          <a:xfrm>
-            <a:off x="914400" y="5669280"/>
-            <a:ext cx="10332720" cy="365760"/>
-          </a:xfrm>
-          <a:prstGeom prst="rect">
-            <a:avLst/>
-          </a:prstGeom>
-          <a:noFill/>
-        </p:spPr>
-        <p:txBody>
-          <a:bodyPr wrap="square"/>
-          <a:lstStyle/>
-          <a:p>
-            <a:pPr algn="ctr">
-              <a:defRPr sz="1100" b="0">
-                <a:solidFill>
-                  <a:srgbClr val="A5D6A7"/>
-                </a:solidFill>
-                <a:latin typeface="Calibri"/>
-              </a:defRPr>
-            </a:pPr>
-            <a:r>
-              <a:t>Department of Biological Sciences  |  June 2026</a:t>
-            </a:r>
-          </a:p>
-        </p:txBody>
-      </p:sp>
-      <p:sp>
-        <p:nvSpPr>
-          <p:cNvPr id="12" name="Rectangle 11"/>
+          <p:cNvPr id="3" name="Oval 2"/>
           <p:cNvSpPr/>
           <p:nvPr/>
         </p:nvSpPr>
         <p:spPr>
           <a:xfrm>
-            <a:off x="0" y="6355080"/>
-            <a:ext cx="12191695" cy="502920"/>
-          </a:xfrm>
-          <a:prstGeom prst="rect">
+            <a:off x="457200" y="1828800"/>
+            <a:ext cx="640080" cy="640080"/>
+          </a:xfrm>
+          <a:prstGeom prst="ellipse">
             <a:avLst/>
           </a:prstGeom>
           <a:solidFill>
-            <a:srgbClr val="1B5E20"/>
+            <a:srgbClr val="40916C"/>
           </a:solidFill>
           <a:ln>
             <a:noFill/>
@@ -3495,14 +3189,186 @@
       </p:sp>
       <p:sp>
         <p:nvSpPr>
-          <p:cNvPr id="13" name="TextBox 12"/>
+          <p:cNvPr id="4" name="Oval 3"/>
+          <p:cNvSpPr/>
+          <p:nvPr/>
+        </p:nvSpPr>
+        <p:spPr>
+          <a:xfrm>
+            <a:off x="2834640" y="1828800"/>
+            <a:ext cx="640080" cy="640080"/>
+          </a:xfrm>
+          <a:prstGeom prst="ellipse">
+            <a:avLst/>
+          </a:prstGeom>
+          <a:solidFill>
+            <a:srgbClr val="40916C"/>
+          </a:solidFill>
+          <a:ln>
+            <a:noFill/>
+          </a:ln>
+        </p:spPr>
+        <p:style>
+          <a:lnRef idx="1">
+            <a:schemeClr val="accent1"/>
+          </a:lnRef>
+          <a:fillRef idx="3">
+            <a:schemeClr val="accent1"/>
+          </a:fillRef>
+          <a:effectRef idx="2">
+            <a:schemeClr val="accent1"/>
+          </a:effectRef>
+          <a:fontRef idx="minor">
+            <a:schemeClr val="lt1"/>
+          </a:fontRef>
+        </p:style>
+        <p:txBody>
+          <a:bodyPr rtlCol="0" anchor="ctr"/>
+          <a:lstStyle/>
+          <a:p>
+            <a:pPr algn="ctr"/>
+          </a:p>
+        </p:txBody>
+      </p:sp>
+      <p:sp>
+        <p:nvSpPr>
+          <p:cNvPr id="5" name="Oval 4"/>
+          <p:cNvSpPr/>
+          <p:nvPr/>
+        </p:nvSpPr>
+        <p:spPr>
+          <a:xfrm>
+            <a:off x="5212080" y="1828800"/>
+            <a:ext cx="640080" cy="640080"/>
+          </a:xfrm>
+          <a:prstGeom prst="ellipse">
+            <a:avLst/>
+          </a:prstGeom>
+          <a:solidFill>
+            <a:srgbClr val="40916C"/>
+          </a:solidFill>
+          <a:ln>
+            <a:noFill/>
+          </a:ln>
+        </p:spPr>
+        <p:style>
+          <a:lnRef idx="1">
+            <a:schemeClr val="accent1"/>
+          </a:lnRef>
+          <a:fillRef idx="3">
+            <a:schemeClr val="accent1"/>
+          </a:fillRef>
+          <a:effectRef idx="2">
+            <a:schemeClr val="accent1"/>
+          </a:effectRef>
+          <a:fontRef idx="minor">
+            <a:schemeClr val="lt1"/>
+          </a:fontRef>
+        </p:style>
+        <p:txBody>
+          <a:bodyPr rtlCol="0" anchor="ctr"/>
+          <a:lstStyle/>
+          <a:p>
+            <a:pPr algn="ctr"/>
+          </a:p>
+        </p:txBody>
+      </p:sp>
+      <p:sp>
+        <p:nvSpPr>
+          <p:cNvPr id="6" name="Oval 5"/>
+          <p:cNvSpPr/>
+          <p:nvPr/>
+        </p:nvSpPr>
+        <p:spPr>
+          <a:xfrm>
+            <a:off x="7589520" y="1828800"/>
+            <a:ext cx="640080" cy="640080"/>
+          </a:xfrm>
+          <a:prstGeom prst="ellipse">
+            <a:avLst/>
+          </a:prstGeom>
+          <a:solidFill>
+            <a:srgbClr val="40916C"/>
+          </a:solidFill>
+          <a:ln>
+            <a:noFill/>
+          </a:ln>
+        </p:spPr>
+        <p:style>
+          <a:lnRef idx="1">
+            <a:schemeClr val="accent1"/>
+          </a:lnRef>
+          <a:fillRef idx="3">
+            <a:schemeClr val="accent1"/>
+          </a:fillRef>
+          <a:effectRef idx="2">
+            <a:schemeClr val="accent1"/>
+          </a:effectRef>
+          <a:fontRef idx="minor">
+            <a:schemeClr val="lt1"/>
+          </a:fontRef>
+        </p:style>
+        <p:txBody>
+          <a:bodyPr rtlCol="0" anchor="ctr"/>
+          <a:lstStyle/>
+          <a:p>
+            <a:pPr algn="ctr"/>
+          </a:p>
+        </p:txBody>
+      </p:sp>
+      <p:sp>
+        <p:nvSpPr>
+          <p:cNvPr id="7" name="Oval 6"/>
+          <p:cNvSpPr/>
+          <p:nvPr/>
+        </p:nvSpPr>
+        <p:spPr>
+          <a:xfrm>
+            <a:off x="9966960" y="1828800"/>
+            <a:ext cx="640080" cy="640080"/>
+          </a:xfrm>
+          <a:prstGeom prst="ellipse">
+            <a:avLst/>
+          </a:prstGeom>
+          <a:solidFill>
+            <a:srgbClr val="40916C"/>
+          </a:solidFill>
+          <a:ln>
+            <a:noFill/>
+          </a:ln>
+        </p:spPr>
+        <p:style>
+          <a:lnRef idx="1">
+            <a:schemeClr val="accent1"/>
+          </a:lnRef>
+          <a:fillRef idx="3">
+            <a:schemeClr val="accent1"/>
+          </a:fillRef>
+          <a:effectRef idx="2">
+            <a:schemeClr val="accent1"/>
+          </a:effectRef>
+          <a:fontRef idx="minor">
+            <a:schemeClr val="lt1"/>
+          </a:fontRef>
+        </p:style>
+        <p:txBody>
+          <a:bodyPr rtlCol="0" anchor="ctr"/>
+          <a:lstStyle/>
+          <a:p>
+            <a:pPr algn="ctr"/>
+          </a:p>
+        </p:txBody>
+      </p:sp>
+      <p:sp>
+        <p:nvSpPr>
+          <p:cNvPr id="8" name="TextBox 7"/>
           <p:cNvSpPr txBox="1"/>
           <p:nvPr/>
         </p:nvSpPr>
         <p:spPr>
           <a:xfrm>
-            <a:off x="457200" y="6419088"/>
-            <a:ext cx="4572000" cy="365760"/>
+            <a:off x="1371600" y="2651760"/>
+            <a:ext cx="9418320" cy="1371600"/>
           </a:xfrm>
           <a:prstGeom prst="rect">
             <a:avLst/>
@@ -3510,54 +3376,228 @@
           <a:noFill/>
         </p:spPr>
         <p:txBody>
-          <a:bodyPr wrap="square"/>
-          <a:lstStyle/>
-          <a:p>
-            <a:pPr algn="l">
-              <a:defRPr sz="900" b="0">
+          <a:bodyPr wrap="square">
+            <a:spAutoFit/>
+          </a:bodyPr>
+          <a:lstStyle/>
+          <a:p>
+            <a:pPr algn="ctr">
+              <a:lnSpc>
+                <a:spcPct val="115000"/>
+              </a:lnSpc>
+              <a:defRPr sz="5400" b="0">
                 <a:solidFill>
                   <a:srgbClr val="FFFFFF"/>
                 </a:solidFill>
+                <a:latin typeface="Calibri Light"/>
+              </a:defRPr>
+            </a:pPr>
+            <a:r>
+              <a:t>How Plants Eat Sunshine</a:t>
+            </a:r>
+          </a:p>
+        </p:txBody>
+      </p:sp>
+      <p:sp>
+        <p:nvSpPr>
+          <p:cNvPr id="9" name="TextBox 8"/>
+          <p:cNvSpPr txBox="1"/>
+          <p:nvPr/>
+        </p:nvSpPr>
+        <p:spPr>
+          <a:xfrm>
+            <a:off x="1371600" y="3337560"/>
+            <a:ext cx="9418320" cy="914400"/>
+          </a:xfrm>
+          <a:prstGeom prst="rect">
+            <a:avLst/>
+          </a:prstGeom>
+          <a:noFill/>
+        </p:spPr>
+        <p:txBody>
+          <a:bodyPr wrap="square">
+            <a:spAutoFit/>
+          </a:bodyPr>
+          <a:lstStyle/>
+          <a:p>
+            <a:pPr algn="ctr">
+              <a:lnSpc>
+                <a:spcPct val="115000"/>
+              </a:lnSpc>
+              <a:defRPr sz="4800" b="0">
+                <a:solidFill>
+                  <a:srgbClr val="F0D060"/>
+                </a:solidFill>
+                <a:latin typeface="Calibri Light"/>
+              </a:defRPr>
+            </a:pPr>
+            <a:r>
+              <a:t>The Magic of Photosynthesis</a:t>
+            </a:r>
+          </a:p>
+        </p:txBody>
+      </p:sp>
+      <p:sp>
+        <p:nvSpPr>
+          <p:cNvPr id="10" name="Rectangle 9"/>
+          <p:cNvSpPr/>
+          <p:nvPr/>
+        </p:nvSpPr>
+        <p:spPr>
+          <a:xfrm>
+            <a:off x="4114800" y="4160520"/>
+            <a:ext cx="3931920" cy="27432"/>
+          </a:xfrm>
+          <a:prstGeom prst="rect">
+            <a:avLst/>
+          </a:prstGeom>
+          <a:solidFill>
+            <a:srgbClr val="52B788"/>
+          </a:solidFill>
+          <a:ln>
+            <a:noFill/>
+          </a:ln>
+        </p:spPr>
+        <p:style>
+          <a:lnRef idx="1">
+            <a:schemeClr val="accent1"/>
+          </a:lnRef>
+          <a:fillRef idx="3">
+            <a:schemeClr val="accent1"/>
+          </a:fillRef>
+          <a:effectRef idx="2">
+            <a:schemeClr val="accent1"/>
+          </a:effectRef>
+          <a:fontRef idx="minor">
+            <a:schemeClr val="lt1"/>
+          </a:fontRef>
+        </p:style>
+        <p:txBody>
+          <a:bodyPr rtlCol="0" anchor="ctr"/>
+          <a:lstStyle/>
+          <a:p>
+            <a:pPr algn="ctr"/>
+          </a:p>
+        </p:txBody>
+      </p:sp>
+      <p:sp>
+        <p:nvSpPr>
+          <p:cNvPr id="11" name="TextBox 10"/>
+          <p:cNvSpPr txBox="1"/>
+          <p:nvPr/>
+        </p:nvSpPr>
+        <p:spPr>
+          <a:xfrm>
+            <a:off x="1371600" y="4434840"/>
+            <a:ext cx="9418320" cy="640080"/>
+          </a:xfrm>
+          <a:prstGeom prst="rect">
+            <a:avLst/>
+          </a:prstGeom>
+          <a:noFill/>
+        </p:spPr>
+        <p:txBody>
+          <a:bodyPr wrap="square">
+            <a:spAutoFit/>
+          </a:bodyPr>
+          <a:lstStyle/>
+          <a:p>
+            <a:pPr algn="ctr">
+              <a:lnSpc>
+                <a:spcPct val="115000"/>
+              </a:lnSpc>
+              <a:defRPr sz="2600" b="0">
+                <a:solidFill>
+                  <a:srgbClr val="6B9080"/>
+                </a:solidFill>
+                <a:latin typeface="Calibri Light"/>
+              </a:defRPr>
+            </a:pPr>
+            <a:r>
+              <a:t>Or: Why You Owe Every Breath to a Leaf</a:t>
+            </a:r>
+          </a:p>
+        </p:txBody>
+      </p:sp>
+      <p:sp>
+        <p:nvSpPr>
+          <p:cNvPr id="12" name="TextBox 11"/>
+          <p:cNvSpPr txBox="1"/>
+          <p:nvPr/>
+        </p:nvSpPr>
+        <p:spPr>
+          <a:xfrm>
+            <a:off x="1371600" y="5349240"/>
+            <a:ext cx="9418320" cy="457200"/>
+          </a:xfrm>
+          <a:prstGeom prst="rect">
+            <a:avLst/>
+          </a:prstGeom>
+          <a:noFill/>
+        </p:spPr>
+        <p:txBody>
+          <a:bodyPr wrap="square">
+            <a:spAutoFit/>
+          </a:bodyPr>
+          <a:lstStyle/>
+          <a:p>
+            <a:pPr algn="ctr">
+              <a:lnSpc>
+                <a:spcPct val="115000"/>
+              </a:lnSpc>
+              <a:defRPr sz="1800" b="0">
+                <a:solidFill>
+                  <a:srgbClr val="6B9080"/>
+                </a:solidFill>
                 <a:latin typeface="Calibri"/>
               </a:defRPr>
             </a:pPr>
             <a:r>
-              <a:t>Photosynthesis: How Plants Make Their Own Food  |  </a:t>
-            </a:r>
-          </a:p>
-        </p:txBody>
-      </p:sp>
-      <p:sp>
-        <p:nvSpPr>
-          <p:cNvPr id="14" name="TextBox 13"/>
-          <p:cNvSpPr txBox="1"/>
-          <p:nvPr/>
-        </p:nvSpPr>
-        <p:spPr>
-          <a:xfrm>
-            <a:off x="11155680" y="6419088"/>
-            <a:ext cx="731520" cy="365760"/>
-          </a:xfrm>
-          <a:prstGeom prst="rect">
-            <a:avLst/>
-          </a:prstGeom>
-          <a:noFill/>
-        </p:spPr>
-        <p:txBody>
-          <a:bodyPr wrap="square"/>
-          <a:lstStyle/>
-          <a:p>
-            <a:pPr algn="r">
-              <a:defRPr sz="900" b="1">
-                <a:solidFill>
-                  <a:srgbClr val="FFFFFF"/>
-                </a:solidFill>
-                <a:latin typeface="Calibri"/>
-              </a:defRPr>
-            </a:pPr>
-            <a:r>
-              <a:t>1</a:t>
-            </a:r>
+              <a:t>Levy  •  Member 2  •  Member 3  •  Member 4  •  Member 5</a:t>
+            </a:r>
+          </a:p>
+        </p:txBody>
+      </p:sp>
+      <p:sp>
+        <p:nvSpPr>
+          <p:cNvPr id="13" name="Rectangle 12"/>
+          <p:cNvSpPr/>
+          <p:nvPr/>
+        </p:nvSpPr>
+        <p:spPr>
+          <a:xfrm>
+            <a:off x="0" y="6784848"/>
+            <a:ext cx="12191695" cy="73152"/>
+          </a:xfrm>
+          <a:prstGeom prst="rect">
+            <a:avLst/>
+          </a:prstGeom>
+          <a:solidFill>
+            <a:srgbClr val="52B788"/>
+          </a:solidFill>
+          <a:ln>
+            <a:noFill/>
+          </a:ln>
+        </p:spPr>
+        <p:style>
+          <a:lnRef idx="1">
+            <a:schemeClr val="accent1"/>
+          </a:lnRef>
+          <a:fillRef idx="3">
+            <a:schemeClr val="accent1"/>
+          </a:fillRef>
+          <a:effectRef idx="2">
+            <a:schemeClr val="accent1"/>
+          </a:effectRef>
+          <a:fontRef idx="minor">
+            <a:schemeClr val="lt1"/>
+          </a:fontRef>
+        </p:style>
+        <p:txBody>
+          <a:bodyPr rtlCol="0" anchor="ctr"/>
+          <a:lstStyle/>
+          <a:p>
+            <a:pPr algn="ctr"/>
           </a:p>
         </p:txBody>
       </p:sp>
@@ -3575,7 +3615,7 @@
     <p:bg>
       <p:bgPr>
         <a:solidFill>
-          <a:srgbClr val="FFFFFF"/>
+          <a:srgbClr val="F0F7F4"/>
         </a:solidFill>
         <a:effectLst/>
       </p:bgPr>
@@ -3596,13 +3636,13 @@
         <p:spPr>
           <a:xfrm>
             <a:off x="0" y="0"/>
-            <a:ext cx="12191695" cy="1051560"/>
+            <a:ext cx="12191695" cy="54864"/>
           </a:xfrm>
           <a:prstGeom prst="rect">
             <a:avLst/>
           </a:prstGeom>
           <a:solidFill>
-            <a:srgbClr val="1B5E20"/>
+            <a:srgbClr val="1B4332"/>
           </a:solidFill>
           <a:ln>
             <a:noFill/>
@@ -3638,8 +3678,8 @@
         </p:nvSpPr>
         <p:spPr>
           <a:xfrm>
-            <a:off x="731520" y="228600"/>
-            <a:ext cx="10515600" cy="640080"/>
+            <a:off x="731520" y="457200"/>
+            <a:ext cx="4572000" cy="731520"/>
           </a:xfrm>
           <a:prstGeom prst="rect">
             <a:avLst/>
@@ -3647,43 +3687,87 @@
           <a:noFill/>
         </p:spPr>
         <p:txBody>
-          <a:bodyPr wrap="square"/>
+          <a:bodyPr wrap="square">
+            <a:spAutoFit/>
+          </a:bodyPr>
+          <a:lstStyle/>
+          <a:p>
+            <a:pPr>
+              <a:lnSpc>
+                <a:spcPct val="100000"/>
+              </a:lnSpc>
+              <a:defRPr sz="1300" b="1">
+                <a:solidFill>
+                  <a:srgbClr val="2D6A4F"/>
+                </a:solidFill>
+                <a:latin typeface="Calibri"/>
+              </a:defRPr>
+            </a:pPr>
+            <a:r>
+              <a:t>01  ·  WHAT IS PHOTOSYNTHESIS?</a:t>
+            </a:r>
+          </a:p>
+        </p:txBody>
+      </p:sp>
+      <p:sp>
+        <p:nvSpPr>
+          <p:cNvPr id="4" name="TextBox 3"/>
+          <p:cNvSpPr txBox="1"/>
+          <p:nvPr/>
+        </p:nvSpPr>
+        <p:spPr>
+          <a:xfrm>
+            <a:off x="731520" y="914400"/>
+            <a:ext cx="10698480" cy="640080"/>
+          </a:xfrm>
+          <a:prstGeom prst="rect">
+            <a:avLst/>
+          </a:prstGeom>
+          <a:noFill/>
+        </p:spPr>
+        <p:txBody>
+          <a:bodyPr wrap="square">
+            <a:spAutoFit/>
+          </a:bodyPr>
           <a:lstStyle/>
           <a:p>
             <a:pPr algn="l">
-              <a:defRPr sz="3600" b="1">
-                <a:solidFill>
-                  <a:srgbClr val="FFFFFF"/>
+              <a:lnSpc>
+                <a:spcPct val="115000"/>
+              </a:lnSpc>
+              <a:defRPr sz="3600" b="0">
+                <a:solidFill>
+                  <a:srgbClr val="1B4332"/>
                 </a:solidFill>
                 <a:latin typeface="Calibri Light"/>
               </a:defRPr>
             </a:pPr>
             <a:r>
-              <a:t>What is Photosynthesis?</a:t>
-            </a:r>
-          </a:p>
-        </p:txBody>
-      </p:sp>
-      <p:sp>
-        <p:nvSpPr>
-          <p:cNvPr id="4" name="Rectangle 3"/>
+              <a:t>Plants Turn Sunlight into Food</a:t>
+            </a:r>
+          </a:p>
+        </p:txBody>
+      </p:sp>
+      <p:sp>
+        <p:nvSpPr>
+          <p:cNvPr id="5" name="Rounded Rectangle 4"/>
           <p:cNvSpPr/>
           <p:nvPr/>
         </p:nvSpPr>
         <p:spPr>
           <a:xfrm>
-            <a:off x="548640" y="1371600"/>
-            <a:ext cx="5303520" cy="2194560"/>
-          </a:xfrm>
-          <a:prstGeom prst="rect">
+            <a:off x="731520" y="1691640"/>
+            <a:ext cx="6858000" cy="1143000"/>
+          </a:xfrm>
+          <a:prstGeom prst="roundRect">
             <a:avLst/>
           </a:prstGeom>
           <a:solidFill>
-            <a:srgbClr val="E8F5E9"/>
+            <a:srgbClr val="E0EEE8"/>
           </a:solidFill>
-          <a:ln w="12700">
+          <a:ln w="19050">
             <a:solidFill>
-              <a:srgbClr val="4CAF50"/>
+              <a:srgbClr val="2D6A4F"/>
             </a:solidFill>
           </a:ln>
         </p:spPr>
@@ -3711,14 +3795,14 @@
       </p:sp>
       <p:sp>
         <p:nvSpPr>
-          <p:cNvPr id="5" name="TextBox 4"/>
+          <p:cNvPr id="6" name="TextBox 5"/>
           <p:cNvSpPr txBox="1"/>
           <p:nvPr/>
         </p:nvSpPr>
         <p:spPr>
           <a:xfrm>
-            <a:off x="822960" y="1508760"/>
-            <a:ext cx="4754880" cy="1920240"/>
+            <a:off x="1005840" y="1783080"/>
+            <a:ext cx="6400800" cy="1005840"/>
           </a:xfrm>
           <a:prstGeom prst="rect">
             <a:avLst/>
@@ -3726,39 +3810,96 @@
           <a:noFill/>
         </p:spPr>
         <p:txBody>
-          <a:bodyPr wrap="square"/>
+          <a:bodyPr wrap="square">
+            <a:spAutoFit/>
+          </a:bodyPr>
+          <a:lstStyle/>
+          <a:p>
+            <a:pPr>
+              <a:defRPr sz="1400" b="1">
+                <a:solidFill>
+                  <a:srgbClr val="2D6A4F"/>
+                </a:solidFill>
+                <a:latin typeface="Calibri"/>
+              </a:defRPr>
+            </a:pPr>
+            <a:r>
+              <a:t>The Simplest Definition</a:t>
+            </a:r>
+          </a:p>
+          <a:p>
+            <a:pPr>
+              <a:spcBef>
+                <a:spcPts val="400"/>
+              </a:spcBef>
+              <a:defRPr sz="2000" b="0">
+                <a:solidFill>
+                  <a:srgbClr val="0D2818"/>
+                </a:solidFill>
+                <a:latin typeface="Calibri"/>
+              </a:defRPr>
+            </a:pPr>
+            <a:r>
+              <a:t>Sunlight  +  Water  +  CO₂    ⟶    Glucose  +  Oxygen</a:t>
+            </a:r>
+          </a:p>
+        </p:txBody>
+      </p:sp>
+      <p:sp>
+        <p:nvSpPr>
+          <p:cNvPr id="7" name="TextBox 6"/>
+          <p:cNvSpPr txBox="1"/>
+          <p:nvPr/>
+        </p:nvSpPr>
+        <p:spPr>
+          <a:xfrm>
+            <a:off x="731520" y="2926080"/>
+            <a:ext cx="6858000" cy="457200"/>
+          </a:xfrm>
+          <a:prstGeom prst="rect">
+            <a:avLst/>
+          </a:prstGeom>
+          <a:noFill/>
+        </p:spPr>
+        <p:txBody>
+          <a:bodyPr wrap="square">
+            <a:spAutoFit/>
+          </a:bodyPr>
           <a:lstStyle/>
           <a:p>
             <a:pPr algn="l">
+              <a:lnSpc>
+                <a:spcPct val="115000"/>
+              </a:lnSpc>
               <a:defRPr sz="1600" b="0">
                 <a:solidFill>
-                  <a:srgbClr val="333333"/>
+                  <a:srgbClr val="0D2818"/>
                 </a:solidFill>
                 <a:latin typeface="Calibri"/>
               </a:defRPr>
             </a:pPr>
             <a:r>
-              <a:t>Photosynthesis is the biochemical process by which green plants, algae, and some bacteria convert light energy into chemical energy stored in glucose. Using sunlight, water, and carbon dioxide, plants produce glucose and release oxygen as a by-product.</a:t>
-            </a:r>
-          </a:p>
-        </p:txBody>
-      </p:sp>
-      <p:sp>
-        <p:nvSpPr>
-          <p:cNvPr id="6" name="Rectangle 5"/>
+              <a:t>6 CO₂  +  6 H₂O  +  Light Energy    ⟶    C₆H₁₂O₆  +  6 O₂</a:t>
+            </a:r>
+          </a:p>
+        </p:txBody>
+      </p:sp>
+      <p:sp>
+        <p:nvSpPr>
+          <p:cNvPr id="8" name="Rounded Rectangle 7"/>
           <p:cNvSpPr/>
           <p:nvPr/>
         </p:nvSpPr>
         <p:spPr>
           <a:xfrm>
-            <a:off x="6217920" y="1371600"/>
-            <a:ext cx="5303520" cy="2194560"/>
-          </a:xfrm>
-          <a:prstGeom prst="rect">
+            <a:off x="8046720" y="1691640"/>
+            <a:ext cx="3383280" cy="1783080"/>
+          </a:xfrm>
+          <a:prstGeom prst="roundRect">
             <a:avLst/>
           </a:prstGeom>
           <a:solidFill>
-            <a:srgbClr val="1B5E20"/>
+            <a:srgbClr val="1B4332"/>
           </a:solidFill>
           <a:ln>
             <a:noFill/>
@@ -3788,14 +3929,14 @@
       </p:sp>
       <p:sp>
         <p:nvSpPr>
-          <p:cNvPr id="7" name="TextBox 6"/>
+          <p:cNvPr id="9" name="TextBox 8"/>
           <p:cNvSpPr txBox="1"/>
           <p:nvPr/>
         </p:nvSpPr>
         <p:spPr>
           <a:xfrm>
-            <a:off x="6492240" y="1508760"/>
-            <a:ext cx="4754880" cy="365760"/>
+            <a:off x="8229600" y="1783080"/>
+            <a:ext cx="3017520" cy="1600200"/>
           </a:xfrm>
           <a:prstGeom prst="rect">
             <a:avLst/>
@@ -3803,33 +3944,54 @@
           <a:noFill/>
         </p:spPr>
         <p:txBody>
-          <a:bodyPr wrap="square"/>
-          <a:lstStyle/>
-          <a:p>
-            <a:pPr algn="ctr">
-              <a:defRPr sz="1200" b="1">
-                <a:solidFill>
-                  <a:srgbClr val="CDDC39"/>
+          <a:bodyPr wrap="square">
+            <a:spAutoFit/>
+          </a:bodyPr>
+          <a:lstStyle/>
+          <a:p>
+            <a:pPr>
+              <a:defRPr sz="1400" b="1">
+                <a:solidFill>
+                  <a:srgbClr val="F0D060"/>
                 </a:solidFill>
                 <a:latin typeface="Calibri"/>
               </a:defRPr>
             </a:pPr>
             <a:r>
-              <a:t>THE CHEMICAL EQUATION</a:t>
-            </a:r>
-          </a:p>
-        </p:txBody>
-      </p:sp>
-      <p:sp>
-        <p:nvSpPr>
-          <p:cNvPr id="8" name="TextBox 7"/>
+              <a:t>💡  Fun Fact</a:t>
+            </a:r>
+          </a:p>
+          <a:p>
+            <a:pPr>
+              <a:lnSpc>
+                <a:spcPct val="130000"/>
+              </a:lnSpc>
+              <a:spcBef>
+                <a:spcPts val="800"/>
+              </a:spcBef>
+              <a:defRPr sz="1400">
+                <a:solidFill>
+                  <a:srgbClr val="FFFFFF"/>
+                </a:solidFill>
+                <a:latin typeface="Calibri Light"/>
+              </a:defRPr>
+            </a:pPr>
+            <a:r>
+              <a:t>Every oxygen molecule you breathe was once split from a water molecule by a plant.</a:t>
+            </a:r>
+          </a:p>
+        </p:txBody>
+      </p:sp>
+      <p:sp>
+        <p:nvSpPr>
+          <p:cNvPr id="10" name="TextBox 9"/>
           <p:cNvSpPr txBox="1"/>
           <p:nvPr/>
         </p:nvSpPr>
         <p:spPr>
           <a:xfrm>
-            <a:off x="6492240" y="2011680"/>
-            <a:ext cx="4754880" cy="1371600"/>
+            <a:off x="731520" y="3657600"/>
+            <a:ext cx="6400800" cy="457200"/>
           </a:xfrm>
           <a:prstGeom prst="rect">
             <a:avLst/>
@@ -3837,52 +3999,86 @@
           <a:noFill/>
         </p:spPr>
         <p:txBody>
-          <a:bodyPr wrap="square"/>
-          <a:lstStyle/>
-          <a:p>
-            <a:pPr algn="ctr">
-              <a:defRPr sz="1800" b="1">
-                <a:solidFill>
-                  <a:srgbClr val="FFFFFF"/>
+          <a:bodyPr wrap="square">
+            <a:spAutoFit/>
+          </a:bodyPr>
+          <a:lstStyle/>
+          <a:p>
+            <a:pPr algn="l">
+              <a:lnSpc>
+                <a:spcPct val="115000"/>
+              </a:lnSpc>
+              <a:defRPr sz="1600" b="1">
+                <a:solidFill>
+                  <a:srgbClr val="2D6A4F"/>
                 </a:solidFill>
                 <a:latin typeface="Calibri"/>
               </a:defRPr>
             </a:pPr>
             <a:r>
-              <a:t>6 CO₂  +  6 H₂O  +  Light Energy</a:t>
-            </a:r>
-            <a:br/>
-            <a:r>
-              <a:t>           ═══════════════►</a:t>
-            </a:r>
-            <a:br/>
-            <a:r>
-              <a:t>C₆H₁₂O₆  +  6 O₂</a:t>
-            </a:r>
-          </a:p>
-        </p:txBody>
-      </p:sp>
-      <p:sp>
-        <p:nvSpPr>
-          <p:cNvPr id="9" name="Rectangle 8"/>
+              <a:t>Where It Happens</a:t>
+            </a:r>
+          </a:p>
+        </p:txBody>
+      </p:sp>
+      <p:sp>
+        <p:nvSpPr>
+          <p:cNvPr id="11" name="TextBox 10"/>
+          <p:cNvSpPr txBox="1"/>
+          <p:nvPr/>
+        </p:nvSpPr>
+        <p:spPr>
+          <a:xfrm>
+            <a:off x="731520" y="3977639"/>
+            <a:ext cx="6400800" cy="640080"/>
+          </a:xfrm>
+          <a:prstGeom prst="rect">
+            <a:avLst/>
+          </a:prstGeom>
+          <a:noFill/>
+        </p:spPr>
+        <p:txBody>
+          <a:bodyPr wrap="square">
+            <a:spAutoFit/>
+          </a:bodyPr>
+          <a:lstStyle/>
+          <a:p>
+            <a:pPr algn="l">
+              <a:lnSpc>
+                <a:spcPct val="115000"/>
+              </a:lnSpc>
+              <a:defRPr sz="1600" b="0">
+                <a:solidFill>
+                  <a:srgbClr val="1B4332"/>
+                </a:solidFill>
+                <a:latin typeface="Calibri Light"/>
+              </a:defRPr>
+            </a:pPr>
+            <a:r>
+              <a:t>Inside chloroplasts — tiny green solar panels in leaf cells</a:t>
+            </a:r>
+          </a:p>
+        </p:txBody>
+      </p:sp>
+      <p:sp>
+        <p:nvSpPr>
+          <p:cNvPr id="12" name="Rounded Rectangle 11"/>
           <p:cNvSpPr/>
           <p:nvPr/>
         </p:nvSpPr>
         <p:spPr>
           <a:xfrm>
-            <a:off x="548640" y="3886200"/>
-            <a:ext cx="2651760" cy="1554480"/>
-          </a:xfrm>
-          <a:prstGeom prst="rect">
+            <a:off x="731520" y="4846320"/>
+            <a:ext cx="1920240" cy="502920"/>
+          </a:xfrm>
+          <a:prstGeom prst="roundRect">
             <a:avLst/>
           </a:prstGeom>
           <a:solidFill>
-            <a:srgbClr val="E8F5E9"/>
+            <a:srgbClr val="1B4332"/>
           </a:solidFill>
-          <a:ln w="19050">
-            <a:solidFill>
-              <a:srgbClr val="4CAF50"/>
-            </a:solidFill>
+          <a:ln>
+            <a:noFill/>
           </a:ln>
         </p:spPr>
         <p:style>
@@ -3909,14 +4105,14 @@
       </p:sp>
       <p:sp>
         <p:nvSpPr>
-          <p:cNvPr id="10" name="TextBox 9"/>
+          <p:cNvPr id="13" name="TextBox 12"/>
           <p:cNvSpPr txBox="1"/>
           <p:nvPr/>
         </p:nvSpPr>
         <p:spPr>
           <a:xfrm>
-            <a:off x="685800" y="4023360"/>
-            <a:ext cx="2377440" cy="457200"/>
+            <a:off x="868680" y="4892040"/>
+            <a:ext cx="1737360" cy="411480"/>
           </a:xfrm>
           <a:prstGeom prst="rect">
             <a:avLst/>
@@ -3924,82 +4120,47 @@
           <a:noFill/>
         </p:spPr>
         <p:txBody>
-          <a:bodyPr wrap="square"/>
+          <a:bodyPr wrap="square">
+            <a:spAutoFit/>
+          </a:bodyPr>
           <a:lstStyle/>
           <a:p>
             <a:pPr algn="ctr">
-              <a:defRPr sz="1200" b="1">
-                <a:solidFill>
-                  <a:srgbClr val="1B5E20"/>
+              <a:lnSpc>
+                <a:spcPct val="115000"/>
+              </a:lnSpc>
+              <a:defRPr sz="1300" b="1">
+                <a:solidFill>
+                  <a:srgbClr val="F0D060"/>
                 </a:solidFill>
                 <a:latin typeface="Calibri"/>
               </a:defRPr>
             </a:pPr>
             <a:r>
-              <a:t>📗  Autotrophic</a:t>
-            </a:r>
-          </a:p>
-        </p:txBody>
-      </p:sp>
-      <p:sp>
-        <p:nvSpPr>
-          <p:cNvPr id="11" name="TextBox 10"/>
-          <p:cNvSpPr txBox="1"/>
-          <p:nvPr/>
-        </p:nvSpPr>
-        <p:spPr>
-          <a:xfrm>
-            <a:off x="685800" y="4434840"/>
-            <a:ext cx="2377440" cy="822960"/>
-          </a:xfrm>
-          <a:prstGeom prst="rect">
-            <a:avLst/>
-          </a:prstGeom>
-          <a:noFill/>
-        </p:spPr>
-        <p:txBody>
-          <a:bodyPr wrap="square"/>
-          <a:lstStyle/>
-          <a:p>
-            <a:pPr algn="ctr">
-              <a:defRPr sz="1100" b="0">
-                <a:solidFill>
-                  <a:srgbClr val="757575"/>
-                </a:solidFill>
-                <a:latin typeface="Calibri"/>
-              </a:defRPr>
-            </a:pPr>
-            <a:r>
-              <a:t>Plants produce</a:t>
-            </a:r>
-            <a:br/>
-            <a:r>
-              <a:t>their own food</a:t>
-            </a:r>
-          </a:p>
-        </p:txBody>
-      </p:sp>
-      <p:sp>
-        <p:nvSpPr>
-          <p:cNvPr id="12" name="Rectangle 11"/>
+              <a:t>☀  SUNLIGHT</a:t>
+            </a:r>
+          </a:p>
+        </p:txBody>
+      </p:sp>
+      <p:sp>
+        <p:nvSpPr>
+          <p:cNvPr id="14" name="Rounded Rectangle 13"/>
           <p:cNvSpPr/>
           <p:nvPr/>
         </p:nvSpPr>
         <p:spPr>
           <a:xfrm>
-            <a:off x="3429000" y="3886200"/>
-            <a:ext cx="2651760" cy="1554480"/>
-          </a:xfrm>
-          <a:prstGeom prst="rect">
+            <a:off x="3017520" y="4846320"/>
+            <a:ext cx="1920240" cy="502920"/>
+          </a:xfrm>
+          <a:prstGeom prst="roundRect">
             <a:avLst/>
           </a:prstGeom>
           <a:solidFill>
-            <a:srgbClr val="E8F5E9"/>
+            <a:srgbClr val="1B4332"/>
           </a:solidFill>
-          <a:ln w="19050">
-            <a:solidFill>
-              <a:srgbClr val="4CAF50"/>
-            </a:solidFill>
+          <a:ln>
+            <a:noFill/>
           </a:ln>
         </p:spPr>
         <p:style>
@@ -4026,14 +4187,14 @@
       </p:sp>
       <p:sp>
         <p:nvSpPr>
-          <p:cNvPr id="13" name="TextBox 12"/>
+          <p:cNvPr id="15" name="TextBox 14"/>
           <p:cNvSpPr txBox="1"/>
           <p:nvPr/>
         </p:nvSpPr>
         <p:spPr>
           <a:xfrm>
-            <a:off x="3566160" y="4023360"/>
-            <a:ext cx="2377440" cy="457200"/>
+            <a:off x="3154680" y="4892040"/>
+            <a:ext cx="1737360" cy="411480"/>
           </a:xfrm>
           <a:prstGeom prst="rect">
             <a:avLst/>
@@ -4041,82 +4202,47 @@
           <a:noFill/>
         </p:spPr>
         <p:txBody>
-          <a:bodyPr wrap="square"/>
+          <a:bodyPr wrap="square">
+            <a:spAutoFit/>
+          </a:bodyPr>
           <a:lstStyle/>
           <a:p>
             <a:pPr algn="ctr">
-              <a:defRPr sz="1200" b="1">
-                <a:solidFill>
-                  <a:srgbClr val="1B5E20"/>
+              <a:lnSpc>
+                <a:spcPct val="115000"/>
+              </a:lnSpc>
+              <a:defRPr sz="1300" b="1">
+                <a:solidFill>
+                  <a:srgbClr val="74BFE1"/>
                 </a:solidFill>
                 <a:latin typeface="Calibri"/>
               </a:defRPr>
             </a:pPr>
             <a:r>
-              <a:t>🌱  Chloroplasts</a:t>
-            </a:r>
-          </a:p>
-        </p:txBody>
-      </p:sp>
-      <p:sp>
-        <p:nvSpPr>
-          <p:cNvPr id="14" name="TextBox 13"/>
-          <p:cNvSpPr txBox="1"/>
-          <p:nvPr/>
-        </p:nvSpPr>
-        <p:spPr>
-          <a:xfrm>
-            <a:off x="3566160" y="4434840"/>
-            <a:ext cx="2377440" cy="822960"/>
-          </a:xfrm>
-          <a:prstGeom prst="rect">
-            <a:avLst/>
-          </a:prstGeom>
-          <a:noFill/>
-        </p:spPr>
-        <p:txBody>
-          <a:bodyPr wrap="square"/>
-          <a:lstStyle/>
-          <a:p>
-            <a:pPr algn="ctr">
-              <a:defRPr sz="1100" b="0">
-                <a:solidFill>
-                  <a:srgbClr val="757575"/>
-                </a:solidFill>
-                <a:latin typeface="Calibri"/>
-              </a:defRPr>
-            </a:pPr>
-            <a:r>
-              <a:t>Organelles where</a:t>
-            </a:r>
-            <a:br/>
-            <a:r>
-              <a:t>photosynthesis occurs</a:t>
-            </a:r>
-          </a:p>
-        </p:txBody>
-      </p:sp>
-      <p:sp>
-        <p:nvSpPr>
-          <p:cNvPr id="15" name="Rectangle 14"/>
+              <a:t>💧  WATER</a:t>
+            </a:r>
+          </a:p>
+        </p:txBody>
+      </p:sp>
+      <p:sp>
+        <p:nvSpPr>
+          <p:cNvPr id="16" name="Rounded Rectangle 15"/>
           <p:cNvSpPr/>
           <p:nvPr/>
         </p:nvSpPr>
         <p:spPr>
           <a:xfrm>
-            <a:off x="6309359" y="3886200"/>
-            <a:ext cx="2651760" cy="1554480"/>
-          </a:xfrm>
-          <a:prstGeom prst="rect">
+            <a:off x="5303520" y="4846320"/>
+            <a:ext cx="1920240" cy="502920"/>
+          </a:xfrm>
+          <a:prstGeom prst="roundRect">
             <a:avLst/>
           </a:prstGeom>
           <a:solidFill>
-            <a:srgbClr val="E8F5E9"/>
+            <a:srgbClr val="1B4332"/>
           </a:solidFill>
-          <a:ln w="19050">
-            <a:solidFill>
-              <a:srgbClr val="4CAF50"/>
-            </a:solidFill>
+          <a:ln>
+            <a:noFill/>
           </a:ln>
         </p:spPr>
         <p:style>
@@ -4143,48 +4269,14 @@
       </p:sp>
       <p:sp>
         <p:nvSpPr>
-          <p:cNvPr id="16" name="TextBox 15"/>
-          <p:cNvSpPr txBox="1"/>
-          <p:nvPr/>
-        </p:nvSpPr>
-        <p:spPr>
-          <a:xfrm>
-            <a:off x="6446519" y="4023360"/>
-            <a:ext cx="2377440" cy="457200"/>
-          </a:xfrm>
-          <a:prstGeom prst="rect">
-            <a:avLst/>
-          </a:prstGeom>
-          <a:noFill/>
-        </p:spPr>
-        <p:txBody>
-          <a:bodyPr wrap="square"/>
-          <a:lstStyle/>
-          <a:p>
-            <a:pPr algn="ctr">
-              <a:defRPr sz="1200" b="1">
-                <a:solidFill>
-                  <a:srgbClr val="1B5E20"/>
-                </a:solidFill>
-                <a:latin typeface="Calibri"/>
-              </a:defRPr>
-            </a:pPr>
-            <a:r>
-              <a:t>☀️  Endergonic</a:t>
-            </a:r>
-          </a:p>
-        </p:txBody>
-      </p:sp>
-      <p:sp>
-        <p:nvSpPr>
           <p:cNvPr id="17" name="TextBox 16"/>
           <p:cNvSpPr txBox="1"/>
           <p:nvPr/>
         </p:nvSpPr>
         <p:spPr>
           <a:xfrm>
-            <a:off x="6446519" y="4434840"/>
-            <a:ext cx="2377440" cy="822960"/>
+            <a:off x="5440680" y="4892040"/>
+            <a:ext cx="1737360" cy="411480"/>
           </a:xfrm>
           <a:prstGeom prst="rect">
             <a:avLst/>
@@ -4192,48 +4284,47 @@
           <a:noFill/>
         </p:spPr>
         <p:txBody>
-          <a:bodyPr wrap="square"/>
+          <a:bodyPr wrap="square">
+            <a:spAutoFit/>
+          </a:bodyPr>
           <a:lstStyle/>
           <a:p>
             <a:pPr algn="ctr">
-              <a:defRPr sz="1100" b="0">
-                <a:solidFill>
-                  <a:srgbClr val="757575"/>
+              <a:lnSpc>
+                <a:spcPct val="115000"/>
+              </a:lnSpc>
+              <a:defRPr sz="1300" b="1">
+                <a:solidFill>
+                  <a:srgbClr val="B0BEC5"/>
                 </a:solidFill>
                 <a:latin typeface="Calibri"/>
               </a:defRPr>
             </a:pPr>
             <a:r>
-              <a:t>Requires energy</a:t>
-            </a:r>
-            <a:br/>
-            <a:r>
-              <a:t>input (sunlight)</a:t>
-            </a:r>
-          </a:p>
-        </p:txBody>
-      </p:sp>
-      <p:sp>
-        <p:nvSpPr>
-          <p:cNvPr id="18" name="Rectangle 17"/>
+              <a:t>🌬  CO₂</a:t>
+            </a:r>
+          </a:p>
+        </p:txBody>
+      </p:sp>
+      <p:sp>
+        <p:nvSpPr>
+          <p:cNvPr id="18" name="Right Arrow 17"/>
           <p:cNvSpPr/>
           <p:nvPr/>
         </p:nvSpPr>
         <p:spPr>
           <a:xfrm>
-            <a:off x="9189719" y="3886200"/>
-            <a:ext cx="2651760" cy="1554480"/>
-          </a:xfrm>
-          <a:prstGeom prst="rect">
+            <a:off x="6858000" y="4892040"/>
+            <a:ext cx="548640" cy="411480"/>
+          </a:xfrm>
+          <a:prstGeom prst="rightArrow">
             <a:avLst/>
           </a:prstGeom>
           <a:solidFill>
-            <a:srgbClr val="E8F5E9"/>
+            <a:srgbClr val="52B788"/>
           </a:solidFill>
-          <a:ln w="19050">
-            <a:solidFill>
-              <a:srgbClr val="4CAF50"/>
-            </a:solidFill>
+          <a:ln>
+            <a:noFill/>
           </a:ln>
         </p:spPr>
         <p:style>
@@ -4260,92 +4351,20 @@
       </p:sp>
       <p:sp>
         <p:nvSpPr>
-          <p:cNvPr id="19" name="TextBox 18"/>
-          <p:cNvSpPr txBox="1"/>
-          <p:nvPr/>
-        </p:nvSpPr>
-        <p:spPr>
-          <a:xfrm>
-            <a:off x="9326879" y="4023360"/>
-            <a:ext cx="2377440" cy="457200"/>
-          </a:xfrm>
-          <a:prstGeom prst="rect">
-            <a:avLst/>
-          </a:prstGeom>
-          <a:noFill/>
-        </p:spPr>
-        <p:txBody>
-          <a:bodyPr wrap="square"/>
-          <a:lstStyle/>
-          <a:p>
-            <a:pPr algn="ctr">
-              <a:defRPr sz="1200" b="1">
-                <a:solidFill>
-                  <a:srgbClr val="1B5E20"/>
-                </a:solidFill>
-                <a:latin typeface="Calibri"/>
-              </a:defRPr>
-            </a:pPr>
-            <a:r>
-              <a:t>💨  Gas Exchange</a:t>
-            </a:r>
-          </a:p>
-        </p:txBody>
-      </p:sp>
-      <p:sp>
-        <p:nvSpPr>
-          <p:cNvPr id="20" name="TextBox 19"/>
-          <p:cNvSpPr txBox="1"/>
-          <p:nvPr/>
-        </p:nvSpPr>
-        <p:spPr>
-          <a:xfrm>
-            <a:off x="9326879" y="4434840"/>
-            <a:ext cx="2377440" cy="822960"/>
-          </a:xfrm>
-          <a:prstGeom prst="rect">
-            <a:avLst/>
-          </a:prstGeom>
-          <a:noFill/>
-        </p:spPr>
-        <p:txBody>
-          <a:bodyPr wrap="square"/>
-          <a:lstStyle/>
-          <a:p>
-            <a:pPr algn="ctr">
-              <a:defRPr sz="1100" b="0">
-                <a:solidFill>
-                  <a:srgbClr val="757575"/>
-                </a:solidFill>
-                <a:latin typeface="Calibri"/>
-              </a:defRPr>
-            </a:pPr>
-            <a:r>
-              <a:t>CO₂ in, O₂ out</a:t>
-            </a:r>
-            <a:br/>
-            <a:r>
-              <a:t>via stomata</a:t>
-            </a:r>
-          </a:p>
-        </p:txBody>
-      </p:sp>
-      <p:sp>
-        <p:nvSpPr>
-          <p:cNvPr id="21" name="Rectangle 20"/>
+          <p:cNvPr id="19" name="Rounded Rectangle 18"/>
           <p:cNvSpPr/>
           <p:nvPr/>
         </p:nvSpPr>
         <p:spPr>
           <a:xfrm>
-            <a:off x="548640" y="5669280"/>
-            <a:ext cx="11064240" cy="502920"/>
-          </a:xfrm>
-          <a:prstGeom prst="rect">
+            <a:off x="7772400" y="4846320"/>
+            <a:ext cx="1737360" cy="502920"/>
+          </a:xfrm>
+          <a:prstGeom prst="roundRect">
             <a:avLst/>
           </a:prstGeom>
           <a:solidFill>
-            <a:srgbClr val="1B5E20"/>
+            <a:srgbClr val="1B4332"/>
           </a:solidFill>
           <a:ln>
             <a:noFill/>
@@ -4375,14 +4394,14 @@
       </p:sp>
       <p:sp>
         <p:nvSpPr>
-          <p:cNvPr id="22" name="TextBox 21"/>
+          <p:cNvPr id="20" name="TextBox 19"/>
           <p:cNvSpPr txBox="1"/>
           <p:nvPr/>
         </p:nvSpPr>
         <p:spPr>
           <a:xfrm>
-            <a:off x="822960" y="5742432"/>
-            <a:ext cx="10515600" cy="365760"/>
+            <a:off x="7863840" y="4892040"/>
+            <a:ext cx="1554480" cy="411480"/>
           </a:xfrm>
           <a:prstGeom prst="rect">
             <a:avLst/>
@@ -4390,39 +4409,44 @@
           <a:noFill/>
         </p:spPr>
         <p:txBody>
-          <a:bodyPr wrap="square"/>
+          <a:bodyPr wrap="square">
+            <a:spAutoFit/>
+          </a:bodyPr>
           <a:lstStyle/>
           <a:p>
             <a:pPr algn="ctr">
-              <a:defRPr sz="1200" b="0">
-                <a:solidFill>
-                  <a:srgbClr val="FFFFFF"/>
+              <a:lnSpc>
+                <a:spcPct val="115000"/>
+              </a:lnSpc>
+              <a:defRPr sz="1300" b="1">
+                <a:solidFill>
+                  <a:srgbClr val="F0D060"/>
                 </a:solidFill>
                 <a:latin typeface="Calibri"/>
               </a:defRPr>
             </a:pPr>
             <a:r>
-              <a:t>💡  Fun Fact:  Photosynthesis produces ~170 billion tonnes of biomass annually — the foundation of nearly all food chains on Earth!</a:t>
-            </a:r>
-          </a:p>
-        </p:txBody>
-      </p:sp>
-      <p:sp>
-        <p:nvSpPr>
-          <p:cNvPr id="23" name="Rectangle 22"/>
+              <a:t>🍬  GLUCOSE (Food)</a:t>
+            </a:r>
+          </a:p>
+        </p:txBody>
+      </p:sp>
+      <p:sp>
+        <p:nvSpPr>
+          <p:cNvPr id="21" name="Rounded Rectangle 20"/>
           <p:cNvSpPr/>
           <p:nvPr/>
         </p:nvSpPr>
         <p:spPr>
           <a:xfrm>
-            <a:off x="0" y="6355080"/>
-            <a:ext cx="12191695" cy="502920"/>
-          </a:xfrm>
-          <a:prstGeom prst="rect">
+            <a:off x="9784080" y="4846320"/>
+            <a:ext cx="1737360" cy="502920"/>
+          </a:xfrm>
+          <a:prstGeom prst="roundRect">
             <a:avLst/>
           </a:prstGeom>
           <a:solidFill>
-            <a:srgbClr val="1B5E20"/>
+            <a:srgbClr val="1B4332"/>
           </a:solidFill>
           <a:ln>
             <a:noFill/>
@@ -4452,14 +4476,14 @@
       </p:sp>
       <p:sp>
         <p:nvSpPr>
-          <p:cNvPr id="24" name="TextBox 23"/>
+          <p:cNvPr id="22" name="TextBox 21"/>
           <p:cNvSpPr txBox="1"/>
           <p:nvPr/>
         </p:nvSpPr>
         <p:spPr>
           <a:xfrm>
-            <a:off x="457200" y="6419088"/>
-            <a:ext cx="4572000" cy="365760"/>
+            <a:off x="9875520" y="4892040"/>
+            <a:ext cx="1554480" cy="411480"/>
           </a:xfrm>
           <a:prstGeom prst="rect">
             <a:avLst/>
@@ -4467,54 +4491,68 @@
           <a:noFill/>
         </p:spPr>
         <p:txBody>
-          <a:bodyPr wrap="square"/>
-          <a:lstStyle/>
-          <a:p>
-            <a:pPr algn="l">
-              <a:defRPr sz="900" b="0">
-                <a:solidFill>
-                  <a:srgbClr val="FFFFFF"/>
+          <a:bodyPr wrap="square">
+            <a:spAutoFit/>
+          </a:bodyPr>
+          <a:lstStyle/>
+          <a:p>
+            <a:pPr algn="ctr">
+              <a:lnSpc>
+                <a:spcPct val="115000"/>
+              </a:lnSpc>
+              <a:defRPr sz="1300" b="1">
+                <a:solidFill>
+                  <a:srgbClr val="74BFE1"/>
                 </a:solidFill>
                 <a:latin typeface="Calibri"/>
               </a:defRPr>
             </a:pPr>
             <a:r>
-              <a:t>Photosynthesis: How Plants Make Their Own Food  |  Dr. Sarah Chen</a:t>
-            </a:r>
-          </a:p>
-        </p:txBody>
-      </p:sp>
-      <p:sp>
-        <p:nvSpPr>
-          <p:cNvPr id="25" name="TextBox 24"/>
-          <p:cNvSpPr txBox="1"/>
-          <p:nvPr/>
-        </p:nvSpPr>
-        <p:spPr>
-          <a:xfrm>
-            <a:off x="11155680" y="6419088"/>
-            <a:ext cx="731520" cy="365760"/>
-          </a:xfrm>
-          <a:prstGeom prst="rect">
-            <a:avLst/>
-          </a:prstGeom>
-          <a:noFill/>
-        </p:spPr>
-        <p:txBody>
-          <a:bodyPr wrap="square"/>
-          <a:lstStyle/>
-          <a:p>
-            <a:pPr algn="r">
-              <a:defRPr sz="900" b="1">
-                <a:solidFill>
-                  <a:srgbClr val="FFFFFF"/>
-                </a:solidFill>
-                <a:latin typeface="Calibri"/>
-              </a:defRPr>
-            </a:pPr>
-            <a:r>
-              <a:t>2</a:t>
-            </a:r>
+              <a:t>🫧  OXYGEN</a:t>
+            </a:r>
+          </a:p>
+        </p:txBody>
+      </p:sp>
+      <p:sp>
+        <p:nvSpPr>
+          <p:cNvPr id="23" name="Rectangle 22"/>
+          <p:cNvSpPr/>
+          <p:nvPr/>
+        </p:nvSpPr>
+        <p:spPr>
+          <a:xfrm>
+            <a:off x="0" y="6803136"/>
+            <a:ext cx="12191695" cy="54864"/>
+          </a:xfrm>
+          <a:prstGeom prst="rect">
+            <a:avLst/>
+          </a:prstGeom>
+          <a:solidFill>
+            <a:srgbClr val="1B4332"/>
+          </a:solidFill>
+          <a:ln>
+            <a:noFill/>
+          </a:ln>
+        </p:spPr>
+        <p:style>
+          <a:lnRef idx="1">
+            <a:schemeClr val="accent1"/>
+          </a:lnRef>
+          <a:fillRef idx="3">
+            <a:schemeClr val="accent1"/>
+          </a:fillRef>
+          <a:effectRef idx="2">
+            <a:schemeClr val="accent1"/>
+          </a:effectRef>
+          <a:fontRef idx="minor">
+            <a:schemeClr val="lt1"/>
+          </a:fontRef>
+        </p:style>
+        <p:txBody>
+          <a:bodyPr rtlCol="0" anchor="ctr"/>
+          <a:lstStyle/>
+          <a:p>
+            <a:pPr algn="ctr"/>
           </a:p>
         </p:txBody>
       </p:sp>
@@ -4532,7 +4570,7 @@
     <p:bg>
       <p:bgPr>
         <a:solidFill>
-          <a:srgbClr val="FFFFFF"/>
+          <a:srgbClr val="F0F7F4"/>
         </a:solidFill>
         <a:effectLst/>
       </p:bgPr>
@@ -4553,13 +4591,13 @@
         <p:spPr>
           <a:xfrm>
             <a:off x="0" y="0"/>
-            <a:ext cx="12191695" cy="1051560"/>
+            <a:ext cx="12191695" cy="54864"/>
           </a:xfrm>
           <a:prstGeom prst="rect">
             <a:avLst/>
           </a:prstGeom>
           <a:solidFill>
-            <a:srgbClr val="1B5E20"/>
+            <a:srgbClr val="1B4332"/>
           </a:solidFill>
           <a:ln>
             <a:noFill/>
@@ -4595,8 +4633,8 @@
         </p:nvSpPr>
         <p:spPr>
           <a:xfrm>
-            <a:off x="731520" y="228600"/>
-            <a:ext cx="10515600" cy="640080"/>
+            <a:off x="731520" y="457200"/>
+            <a:ext cx="4572000" cy="457200"/>
           </a:xfrm>
           <a:prstGeom prst="rect">
             <a:avLst/>
@@ -4604,43 +4642,126 @@
           <a:noFill/>
         </p:spPr>
         <p:txBody>
-          <a:bodyPr wrap="square"/>
+          <a:bodyPr wrap="square">
+            <a:spAutoFit/>
+          </a:bodyPr>
           <a:lstStyle/>
           <a:p>
             <a:pPr algn="l">
-              <a:defRPr sz="3600" b="1">
-                <a:solidFill>
-                  <a:srgbClr val="FFFFFF"/>
+              <a:lnSpc>
+                <a:spcPct val="115000"/>
+              </a:lnSpc>
+              <a:defRPr sz="1300" b="1">
+                <a:solidFill>
+                  <a:srgbClr val="2D6A4F"/>
+                </a:solidFill>
+                <a:latin typeface="Calibri"/>
+              </a:defRPr>
+            </a:pPr>
+            <a:r>
+              <a:t>02  ·  THE LIGHT REACTIONS</a:t>
+            </a:r>
+          </a:p>
+        </p:txBody>
+      </p:sp>
+      <p:sp>
+        <p:nvSpPr>
+          <p:cNvPr id="4" name="TextBox 3"/>
+          <p:cNvSpPr txBox="1"/>
+          <p:nvPr/>
+        </p:nvSpPr>
+        <p:spPr>
+          <a:xfrm>
+            <a:off x="731520" y="914400"/>
+            <a:ext cx="10698480" cy="640080"/>
+          </a:xfrm>
+          <a:prstGeom prst="rect">
+            <a:avLst/>
+          </a:prstGeom>
+          <a:noFill/>
+        </p:spPr>
+        <p:txBody>
+          <a:bodyPr wrap="square">
+            <a:spAutoFit/>
+          </a:bodyPr>
+          <a:lstStyle/>
+          <a:p>
+            <a:pPr algn="l">
+              <a:lnSpc>
+                <a:spcPct val="115000"/>
+              </a:lnSpc>
+              <a:defRPr sz="3600" b="0">
+                <a:solidFill>
+                  <a:srgbClr val="1B4332"/>
                 </a:solidFill>
                 <a:latin typeface="Calibri Light"/>
               </a:defRPr>
             </a:pPr>
             <a:r>
-              <a:t>The Ingredients of Photosynthesis</a:t>
-            </a:r>
-          </a:p>
-        </p:txBody>
-      </p:sp>
-      <p:sp>
-        <p:nvSpPr>
-          <p:cNvPr id="4" name="Rectangle 3"/>
+              <a:t>Catching Energy — Phase 1</a:t>
+            </a:r>
+          </a:p>
+        </p:txBody>
+      </p:sp>
+      <p:sp>
+        <p:nvSpPr>
+          <p:cNvPr id="5" name="TextBox 4"/>
+          <p:cNvSpPr txBox="1"/>
+          <p:nvPr/>
+        </p:nvSpPr>
+        <p:spPr>
+          <a:xfrm>
+            <a:off x="731520" y="1417320"/>
+            <a:ext cx="10698480" cy="457200"/>
+          </a:xfrm>
+          <a:prstGeom prst="rect">
+            <a:avLst/>
+          </a:prstGeom>
+          <a:noFill/>
+        </p:spPr>
+        <p:txBody>
+          <a:bodyPr wrap="square">
+            <a:spAutoFit/>
+          </a:bodyPr>
+          <a:lstStyle/>
+          <a:p>
+            <a:pPr algn="l">
+              <a:lnSpc>
+                <a:spcPct val="115000"/>
+              </a:lnSpc>
+              <a:defRPr sz="1600" b="0">
+                <a:solidFill>
+                  <a:srgbClr val="1B4332"/>
+                </a:solidFill>
+                <a:latin typeface="Calibri Light"/>
+              </a:defRPr>
+            </a:pPr>
+            <a:r>
+              <a:t>Happens in the thylakoid membranes — the "pancake stacks" inside chloroplasts</a:t>
+            </a:r>
+          </a:p>
+        </p:txBody>
+      </p:sp>
+      <p:sp>
+        <p:nvSpPr>
+          <p:cNvPr id="6" name="Oval 5"/>
           <p:cNvSpPr/>
           <p:nvPr/>
         </p:nvSpPr>
         <p:spPr>
           <a:xfrm>
-            <a:off x="365760" y="1325880"/>
-            <a:ext cx="2697480" cy="3200400"/>
-          </a:xfrm>
-          <a:prstGeom prst="rect">
+            <a:off x="1097280" y="2377440"/>
+            <a:ext cx="1097280" cy="1097280"/>
+          </a:xfrm>
+          <a:prstGeom prst="ellipse">
             <a:avLst/>
           </a:prstGeom>
           <a:solidFill>
-            <a:srgbClr val="E8F5E9"/>
+            <a:srgbClr val="F0D060"/>
           </a:solidFill>
-          <a:ln w="19050">
+          <a:ln w="25400">
             <a:solidFill>
-              <a:srgbClr val="4CAF50"/>
+              <a:srgbClr val="E0A820"/>
             </a:solidFill>
           </a:ln>
         </p:spPr>
@@ -4668,20 +4789,59 @@
       </p:sp>
       <p:sp>
         <p:nvSpPr>
-          <p:cNvPr id="5" name="Rectangle 4"/>
+          <p:cNvPr id="7" name="TextBox 6"/>
+          <p:cNvSpPr txBox="1"/>
+          <p:nvPr/>
+        </p:nvSpPr>
+        <p:spPr>
+          <a:xfrm>
+            <a:off x="1097280" y="3566160"/>
+            <a:ext cx="1097280" cy="365760"/>
+          </a:xfrm>
+          <a:prstGeom prst="rect">
+            <a:avLst/>
+          </a:prstGeom>
+          <a:noFill/>
+        </p:spPr>
+        <p:txBody>
+          <a:bodyPr wrap="square">
+            <a:spAutoFit/>
+          </a:bodyPr>
+          <a:lstStyle/>
+          <a:p>
+            <a:pPr algn="ctr">
+              <a:lnSpc>
+                <a:spcPct val="115000"/>
+              </a:lnSpc>
+              <a:defRPr sz="1100" b="1">
+                <a:solidFill>
+                  <a:srgbClr val="0D2818"/>
+                </a:solidFill>
+                <a:latin typeface="Calibri"/>
+              </a:defRPr>
+            </a:pPr>
+            <a:r>
+              <a:t>Light Energy</a:t>
+            </a:r>
+          </a:p>
+        </p:txBody>
+      </p:sp>
+      <p:sp>
+        <p:nvSpPr>
+          <p:cNvPr id="8" name="Right Arrow 7"/>
           <p:cNvSpPr/>
           <p:nvPr/>
         </p:nvSpPr>
         <p:spPr>
           <a:xfrm>
-            <a:off x="365760" y="1325880"/>
-            <a:ext cx="2697480" cy="594360"/>
-          </a:xfrm>
-          <a:prstGeom prst="rect">
+            <a:off x="2377440" y="2743200"/>
+            <a:ext cx="502920" cy="320040"/>
+          </a:xfrm>
+          <a:prstGeom prst="rightArrow">
             <a:avLst/>
           </a:prstGeom>
           <a:solidFill>
-            <a:srgbClr val="4CAF50"/>
+            <a:srgbClr val="52B788"/>
           </a:solidFill>
           <a:ln>
             <a:noFill/>
@@ -4711,105 +4871,23 @@
       </p:sp>
       <p:sp>
         <p:nvSpPr>
-          <p:cNvPr id="6" name="TextBox 5"/>
-          <p:cNvSpPr txBox="1"/>
-          <p:nvPr/>
-        </p:nvSpPr>
-        <p:spPr>
-          <a:xfrm>
-            <a:off x="457200" y="1417320"/>
-            <a:ext cx="2514600" cy="457200"/>
-          </a:xfrm>
-          <a:prstGeom prst="rect">
-            <a:avLst/>
-          </a:prstGeom>
-          <a:noFill/>
-        </p:spPr>
-        <p:txBody>
-          <a:bodyPr wrap="square"/>
-          <a:lstStyle/>
-          <a:p>
-            <a:pPr algn="ctr">
-              <a:defRPr sz="1500" b="1">
-                <a:solidFill>
-                  <a:srgbClr val="FFFFFF"/>
-                </a:solidFill>
-                <a:latin typeface="Calibri"/>
-              </a:defRPr>
-            </a:pPr>
-            <a:r>
-              <a:t>☀️  Sunlight</a:t>
-            </a:r>
-          </a:p>
-        </p:txBody>
-      </p:sp>
-      <p:sp>
-        <p:nvSpPr>
-          <p:cNvPr id="7" name="TextBox 6"/>
-          <p:cNvSpPr txBox="1"/>
-          <p:nvPr/>
-        </p:nvSpPr>
-        <p:spPr>
-          <a:xfrm>
-            <a:off x="548640" y="2103120"/>
-            <a:ext cx="2331720" cy="2194560"/>
-          </a:xfrm>
-          <a:prstGeom prst="rect">
-            <a:avLst/>
-          </a:prstGeom>
-          <a:noFill/>
-        </p:spPr>
-        <p:txBody>
-          <a:bodyPr wrap="square"/>
-          <a:lstStyle/>
-          <a:p>
-            <a:pPr algn="l">
-              <a:defRPr sz="1200" b="0">
-                <a:solidFill>
-                  <a:srgbClr val="333333"/>
-                </a:solidFill>
-                <a:latin typeface="Calibri"/>
-              </a:defRPr>
-            </a:pPr>
-            <a:r>
-              <a:t>• Primary energy source</a:t>
-            </a:r>
-            <a:br/>
-            <a:r>
-              <a:t>• Visible spectrum (400-700 nm)</a:t>
-            </a:r>
-            <a:br/>
-            <a:r>
-              <a:t>• Absorbed by chlorophyll pigments</a:t>
-            </a:r>
-            <a:br/>
-            <a:r>
-              <a:t>• Powers light-dependent reactions</a:t>
-            </a:r>
-          </a:p>
-        </p:txBody>
-      </p:sp>
-      <p:sp>
-        <p:nvSpPr>
-          <p:cNvPr id="8" name="Rectangle 7"/>
+          <p:cNvPr id="9" name="Rounded Rectangle 8"/>
           <p:cNvSpPr/>
           <p:nvPr/>
         </p:nvSpPr>
         <p:spPr>
           <a:xfrm>
-            <a:off x="3291840" y="1325880"/>
-            <a:ext cx="2697480" cy="3200400"/>
-          </a:xfrm>
-          <a:prstGeom prst="rect">
+            <a:off x="3108960" y="2103120"/>
+            <a:ext cx="2560320" cy="1645920"/>
+          </a:xfrm>
+          <a:prstGeom prst="roundRect">
             <a:avLst/>
           </a:prstGeom>
           <a:solidFill>
-            <a:srgbClr val="E8F5E9"/>
+            <a:srgbClr val="1B4332"/>
           </a:solidFill>
-          <a:ln w="19050">
-            <a:solidFill>
-              <a:srgbClr val="4CAF50"/>
-            </a:solidFill>
+          <a:ln>
+            <a:noFill/>
           </a:ln>
         </p:spPr>
         <p:style>
@@ -4836,20 +4914,106 @@
       </p:sp>
       <p:sp>
         <p:nvSpPr>
-          <p:cNvPr id="9" name="Rectangle 8"/>
+          <p:cNvPr id="10" name="TextBox 9"/>
+          <p:cNvSpPr txBox="1"/>
+          <p:nvPr/>
+        </p:nvSpPr>
+        <p:spPr>
+          <a:xfrm>
+            <a:off x="3246120" y="2194560"/>
+            <a:ext cx="2286000" cy="411480"/>
+          </a:xfrm>
+          <a:prstGeom prst="rect">
+            <a:avLst/>
+          </a:prstGeom>
+          <a:noFill/>
+        </p:spPr>
+        <p:txBody>
+          <a:bodyPr wrap="square">
+            <a:spAutoFit/>
+          </a:bodyPr>
+          <a:lstStyle/>
+          <a:p>
+            <a:pPr algn="ctr">
+              <a:lnSpc>
+                <a:spcPct val="115000"/>
+              </a:lnSpc>
+              <a:defRPr sz="1500" b="1">
+                <a:solidFill>
+                  <a:srgbClr val="F0D060"/>
+                </a:solidFill>
+                <a:latin typeface="Calibri"/>
+              </a:defRPr>
+            </a:pPr>
+            <a:r>
+              <a:t>CHLOROPHYLL</a:t>
+            </a:r>
+          </a:p>
+        </p:txBody>
+      </p:sp>
+      <p:sp>
+        <p:nvSpPr>
+          <p:cNvPr id="11" name="TextBox 10"/>
+          <p:cNvSpPr txBox="1"/>
+          <p:nvPr/>
+        </p:nvSpPr>
+        <p:spPr>
+          <a:xfrm>
+            <a:off x="3246120" y="2560320"/>
+            <a:ext cx="2286000" cy="822960"/>
+          </a:xfrm>
+          <a:prstGeom prst="rect">
+            <a:avLst/>
+          </a:prstGeom>
+          <a:noFill/>
+        </p:spPr>
+        <p:txBody>
+          <a:bodyPr wrap="square">
+            <a:spAutoFit/>
+          </a:bodyPr>
+          <a:lstStyle/>
+          <a:p>
+            <a:pPr algn="ctr">
+              <a:lnSpc>
+                <a:spcPct val="115000"/>
+              </a:lnSpc>
+              <a:defRPr sz="1200" b="0">
+                <a:solidFill>
+                  <a:srgbClr val="FFFFFF"/>
+                </a:solidFill>
+                <a:latin typeface="Calibri Light"/>
+              </a:defRPr>
+            </a:pPr>
+            <a:r>
+              <a:t>Captures light</a:t>
+            </a:r>
+            <a:br/>
+            <a:r>
+              <a:t>Splits H₂O molecules</a:t>
+            </a:r>
+            <a:br/>
+            <a:r>
+              <a:t>Releases O₂</a:t>
+            </a:r>
+          </a:p>
+        </p:txBody>
+      </p:sp>
+      <p:sp>
+        <p:nvSpPr>
+          <p:cNvPr id="12" name="Right Arrow 11"/>
           <p:cNvSpPr/>
           <p:nvPr/>
         </p:nvSpPr>
         <p:spPr>
           <a:xfrm>
-            <a:off x="3291840" y="1325880"/>
-            <a:ext cx="2697480" cy="594360"/>
-          </a:xfrm>
-          <a:prstGeom prst="rect">
+            <a:off x="5943600" y="2743200"/>
+            <a:ext cx="502920" cy="320040"/>
+          </a:xfrm>
+          <a:prstGeom prst="rightArrow">
             <a:avLst/>
           </a:prstGeom>
           <a:solidFill>
-            <a:srgbClr val="4CAF50"/>
+            <a:srgbClr val="52B788"/>
           </a:solidFill>
           <a:ln>
             <a:noFill/>
@@ -4879,105 +5043,23 @@
       </p:sp>
       <p:sp>
         <p:nvSpPr>
-          <p:cNvPr id="10" name="TextBox 9"/>
-          <p:cNvSpPr txBox="1"/>
-          <p:nvPr/>
-        </p:nvSpPr>
-        <p:spPr>
-          <a:xfrm>
-            <a:off x="3383280" y="1417320"/>
-            <a:ext cx="2514600" cy="457200"/>
-          </a:xfrm>
-          <a:prstGeom prst="rect">
-            <a:avLst/>
-          </a:prstGeom>
-          <a:noFill/>
-        </p:spPr>
-        <p:txBody>
-          <a:bodyPr wrap="square"/>
-          <a:lstStyle/>
-          <a:p>
-            <a:pPr algn="ctr">
-              <a:defRPr sz="1500" b="1">
-                <a:solidFill>
-                  <a:srgbClr val="FFFFFF"/>
-                </a:solidFill>
-                <a:latin typeface="Calibri"/>
-              </a:defRPr>
-            </a:pPr>
-            <a:r>
-              <a:t>💧  Water (H₂O)</a:t>
-            </a:r>
-          </a:p>
-        </p:txBody>
-      </p:sp>
-      <p:sp>
-        <p:nvSpPr>
-          <p:cNvPr id="11" name="TextBox 10"/>
-          <p:cNvSpPr txBox="1"/>
-          <p:nvPr/>
-        </p:nvSpPr>
-        <p:spPr>
-          <a:xfrm>
-            <a:off x="3474720" y="2103120"/>
-            <a:ext cx="2331720" cy="2194560"/>
-          </a:xfrm>
-          <a:prstGeom prst="rect">
-            <a:avLst/>
-          </a:prstGeom>
-          <a:noFill/>
-        </p:spPr>
-        <p:txBody>
-          <a:bodyPr wrap="square"/>
-          <a:lstStyle/>
-          <a:p>
-            <a:pPr algn="l">
-              <a:defRPr sz="1200" b="0">
-                <a:solidFill>
-                  <a:srgbClr val="333333"/>
-                </a:solidFill>
-                <a:latin typeface="Calibri"/>
-              </a:defRPr>
-            </a:pPr>
-            <a:r>
-              <a:t>• Absorbed by roots from soil</a:t>
-            </a:r>
-            <a:br/>
-            <a:r>
-              <a:t>• Transported via xylem vessels</a:t>
-            </a:r>
-            <a:br/>
-            <a:r>
-              <a:t>• Split during photolysis</a:t>
-            </a:r>
-            <a:br/>
-            <a:r>
-              <a:t>• Provides electrons &amp; H⁺ ions</a:t>
-            </a:r>
-          </a:p>
-        </p:txBody>
-      </p:sp>
-      <p:sp>
-        <p:nvSpPr>
-          <p:cNvPr id="12" name="Rectangle 11"/>
+          <p:cNvPr id="13" name="Rounded Rectangle 12"/>
           <p:cNvSpPr/>
           <p:nvPr/>
         </p:nvSpPr>
         <p:spPr>
           <a:xfrm>
-            <a:off x="6217920" y="1325880"/>
-            <a:ext cx="2697480" cy="3200400"/>
-          </a:xfrm>
-          <a:prstGeom prst="rect">
+            <a:off x="6720840" y="1965960"/>
+            <a:ext cx="1371600" cy="822960"/>
+          </a:xfrm>
+          <a:prstGeom prst="roundRect">
             <a:avLst/>
           </a:prstGeom>
           <a:solidFill>
-            <a:srgbClr val="E8F5E9"/>
+            <a:srgbClr val="1B4332"/>
           </a:solidFill>
-          <a:ln w="19050">
-            <a:solidFill>
-              <a:srgbClr val="4CAF50"/>
-            </a:solidFill>
+          <a:ln>
+            <a:noFill/>
           </a:ln>
         </p:spPr>
         <p:style>
@@ -5004,20 +5086,102 @@
       </p:sp>
       <p:sp>
         <p:nvSpPr>
-          <p:cNvPr id="13" name="Rectangle 12"/>
+          <p:cNvPr id="14" name="TextBox 13"/>
+          <p:cNvSpPr txBox="1"/>
+          <p:nvPr/>
+        </p:nvSpPr>
+        <p:spPr>
+          <a:xfrm>
+            <a:off x="6812280" y="2011680"/>
+            <a:ext cx="1188720" cy="274320"/>
+          </a:xfrm>
+          <a:prstGeom prst="rect">
+            <a:avLst/>
+          </a:prstGeom>
+          <a:noFill/>
+        </p:spPr>
+        <p:txBody>
+          <a:bodyPr wrap="square">
+            <a:spAutoFit/>
+          </a:bodyPr>
+          <a:lstStyle/>
+          <a:p>
+            <a:pPr algn="ctr">
+              <a:lnSpc>
+                <a:spcPct val="115000"/>
+              </a:lnSpc>
+              <a:defRPr sz="1400" b="1">
+                <a:solidFill>
+                  <a:srgbClr val="F0D060"/>
+                </a:solidFill>
+                <a:latin typeface="Calibri"/>
+              </a:defRPr>
+            </a:pPr>
+            <a:r>
+              <a:t>ATP</a:t>
+            </a:r>
+          </a:p>
+        </p:txBody>
+      </p:sp>
+      <p:sp>
+        <p:nvSpPr>
+          <p:cNvPr id="15" name="TextBox 14"/>
+          <p:cNvSpPr txBox="1"/>
+          <p:nvPr/>
+        </p:nvSpPr>
+        <p:spPr>
+          <a:xfrm>
+            <a:off x="6812280" y="2240280"/>
+            <a:ext cx="1188720" cy="457200"/>
+          </a:xfrm>
+          <a:prstGeom prst="rect">
+            <a:avLst/>
+          </a:prstGeom>
+          <a:noFill/>
+        </p:spPr>
+        <p:txBody>
+          <a:bodyPr wrap="square">
+            <a:spAutoFit/>
+          </a:bodyPr>
+          <a:lstStyle/>
+          <a:p>
+            <a:pPr algn="ctr">
+              <a:lnSpc>
+                <a:spcPct val="115000"/>
+              </a:lnSpc>
+              <a:defRPr sz="1000" b="0">
+                <a:solidFill>
+                  <a:srgbClr val="FFFFFF"/>
+                </a:solidFill>
+                <a:latin typeface="Calibri Light"/>
+              </a:defRPr>
+            </a:pPr>
+            <a:r>
+              <a:t>Energy</a:t>
+            </a:r>
+            <a:br/>
+            <a:r>
+              <a:t>Currency</a:t>
+            </a:r>
+          </a:p>
+        </p:txBody>
+      </p:sp>
+      <p:sp>
+        <p:nvSpPr>
+          <p:cNvPr id="16" name="Rounded Rectangle 15"/>
           <p:cNvSpPr/>
           <p:nvPr/>
         </p:nvSpPr>
         <p:spPr>
           <a:xfrm>
-            <a:off x="6217920" y="1325880"/>
-            <a:ext cx="2697480" cy="594360"/>
-          </a:xfrm>
-          <a:prstGeom prst="rect">
+            <a:off x="6720840" y="2926080"/>
+            <a:ext cx="1371600" cy="822960"/>
+          </a:xfrm>
+          <a:prstGeom prst="roundRect">
             <a:avLst/>
           </a:prstGeom>
           <a:solidFill>
-            <a:srgbClr val="4CAF50"/>
+            <a:srgbClr val="1B4332"/>
           </a:solidFill>
           <a:ln>
             <a:noFill/>
@@ -5047,14 +5211,14 @@
       </p:sp>
       <p:sp>
         <p:nvSpPr>
-          <p:cNvPr id="14" name="TextBox 13"/>
+          <p:cNvPr id="17" name="TextBox 16"/>
           <p:cNvSpPr txBox="1"/>
           <p:nvPr/>
         </p:nvSpPr>
         <p:spPr>
           <a:xfrm>
-            <a:off x="6309359" y="1417320"/>
-            <a:ext cx="2514600" cy="457200"/>
+            <a:off x="6812280" y="2971800"/>
+            <a:ext cx="1188720" cy="274320"/>
           </a:xfrm>
           <a:prstGeom prst="rect">
             <a:avLst/>
@@ -5062,90 +5226,90 @@
           <a:noFill/>
         </p:spPr>
         <p:txBody>
-          <a:bodyPr wrap="square"/>
+          <a:bodyPr wrap="square">
+            <a:spAutoFit/>
+          </a:bodyPr>
           <a:lstStyle/>
           <a:p>
             <a:pPr algn="ctr">
-              <a:defRPr sz="1500" b="1">
+              <a:lnSpc>
+                <a:spcPct val="115000"/>
+              </a:lnSpc>
+              <a:defRPr sz="1400" b="1">
+                <a:solidFill>
+                  <a:srgbClr val="95D5B2"/>
+                </a:solidFill>
+                <a:latin typeface="Calibri"/>
+              </a:defRPr>
+            </a:pPr>
+            <a:r>
+              <a:t>NADPH</a:t>
+            </a:r>
+          </a:p>
+        </p:txBody>
+      </p:sp>
+      <p:sp>
+        <p:nvSpPr>
+          <p:cNvPr id="18" name="TextBox 17"/>
+          <p:cNvSpPr txBox="1"/>
+          <p:nvPr/>
+        </p:nvSpPr>
+        <p:spPr>
+          <a:xfrm>
+            <a:off x="6812280" y="3200400"/>
+            <a:ext cx="1188720" cy="457200"/>
+          </a:xfrm>
+          <a:prstGeom prst="rect">
+            <a:avLst/>
+          </a:prstGeom>
+          <a:noFill/>
+        </p:spPr>
+        <p:txBody>
+          <a:bodyPr wrap="square">
+            <a:spAutoFit/>
+          </a:bodyPr>
+          <a:lstStyle/>
+          <a:p>
+            <a:pPr algn="ctr">
+              <a:lnSpc>
+                <a:spcPct val="115000"/>
+              </a:lnSpc>
+              <a:defRPr sz="1000" b="0">
                 <a:solidFill>
                   <a:srgbClr val="FFFFFF"/>
                 </a:solidFill>
-                <a:latin typeface="Calibri"/>
+                <a:latin typeface="Calibri Light"/>
               </a:defRPr>
             </a:pPr>
             <a:r>
-              <a:t>🫧  Carbon Dioxide (CO₂)</a:t>
-            </a:r>
-          </a:p>
-        </p:txBody>
-      </p:sp>
-      <p:sp>
-        <p:nvSpPr>
-          <p:cNvPr id="15" name="TextBox 14"/>
-          <p:cNvSpPr txBox="1"/>
-          <p:nvPr/>
-        </p:nvSpPr>
-        <p:spPr>
-          <a:xfrm>
-            <a:off x="6400800" y="2103120"/>
-            <a:ext cx="2331720" cy="2194560"/>
-          </a:xfrm>
-          <a:prstGeom prst="rect">
-            <a:avLst/>
-          </a:prstGeom>
-          <a:noFill/>
-        </p:spPr>
-        <p:txBody>
-          <a:bodyPr wrap="square"/>
-          <a:lstStyle/>
-          <a:p>
-            <a:pPr algn="l">
-              <a:defRPr sz="1200" b="0">
-                <a:solidFill>
-                  <a:srgbClr val="333333"/>
-                </a:solidFill>
-                <a:latin typeface="Calibri"/>
-              </a:defRPr>
-            </a:pPr>
-            <a:r>
-              <a:t>• Enters through stomata</a:t>
+              <a:t>Electron</a:t>
             </a:r>
             <a:br/>
             <a:r>
-              <a:t>• Diffuses into leaf mesophyll</a:t>
-            </a:r>
-            <a:br/>
-            <a:r>
-              <a:t>• Fixed in the Calvin cycle</a:t>
-            </a:r>
-            <a:br/>
-            <a:r>
-              <a:t>• Provides carbon backbone</a:t>
-            </a:r>
-          </a:p>
-        </p:txBody>
-      </p:sp>
-      <p:sp>
-        <p:nvSpPr>
-          <p:cNvPr id="16" name="Rectangle 15"/>
+              <a:t>Carrier</a:t>
+            </a:r>
+          </a:p>
+        </p:txBody>
+      </p:sp>
+      <p:sp>
+        <p:nvSpPr>
+          <p:cNvPr id="19" name="Rounded Rectangle 18"/>
           <p:cNvSpPr/>
           <p:nvPr/>
         </p:nvSpPr>
         <p:spPr>
           <a:xfrm>
-            <a:off x="9144000" y="1325880"/>
-            <a:ext cx="2697480" cy="3200400"/>
-          </a:xfrm>
-          <a:prstGeom prst="rect">
+            <a:off x="6720840" y="3886200"/>
+            <a:ext cx="1371600" cy="822960"/>
+          </a:xfrm>
+          <a:prstGeom prst="roundRect">
             <a:avLst/>
           </a:prstGeom>
           <a:solidFill>
-            <a:srgbClr val="E8F5E9"/>
+            <a:srgbClr val="40916C"/>
           </a:solidFill>
-          <a:ln w="19050">
-            <a:solidFill>
-              <a:srgbClr val="4CAF50"/>
-            </a:solidFill>
+          <a:ln>
+            <a:noFill/>
           </a:ln>
         </p:spPr>
         <p:style>
@@ -5172,20 +5336,102 @@
       </p:sp>
       <p:sp>
         <p:nvSpPr>
-          <p:cNvPr id="17" name="Rectangle 16"/>
+          <p:cNvPr id="20" name="TextBox 19"/>
+          <p:cNvSpPr txBox="1"/>
+          <p:nvPr/>
+        </p:nvSpPr>
+        <p:spPr>
+          <a:xfrm>
+            <a:off x="6812280" y="3931920"/>
+            <a:ext cx="1188720" cy="274320"/>
+          </a:xfrm>
+          <a:prstGeom prst="rect">
+            <a:avLst/>
+          </a:prstGeom>
+          <a:noFill/>
+        </p:spPr>
+        <p:txBody>
+          <a:bodyPr wrap="square">
+            <a:spAutoFit/>
+          </a:bodyPr>
+          <a:lstStyle/>
+          <a:p>
+            <a:pPr algn="ctr">
+              <a:lnSpc>
+                <a:spcPct val="115000"/>
+              </a:lnSpc>
+              <a:defRPr sz="1400" b="1">
+                <a:solidFill>
+                  <a:srgbClr val="74BFE1"/>
+                </a:solidFill>
+                <a:latin typeface="Calibri"/>
+              </a:defRPr>
+            </a:pPr>
+            <a:r>
+              <a:t>O₂</a:t>
+            </a:r>
+          </a:p>
+        </p:txBody>
+      </p:sp>
+      <p:sp>
+        <p:nvSpPr>
+          <p:cNvPr id="21" name="TextBox 20"/>
+          <p:cNvSpPr txBox="1"/>
+          <p:nvPr/>
+        </p:nvSpPr>
+        <p:spPr>
+          <a:xfrm>
+            <a:off x="6812280" y="4160520"/>
+            <a:ext cx="1188720" cy="457200"/>
+          </a:xfrm>
+          <a:prstGeom prst="rect">
+            <a:avLst/>
+          </a:prstGeom>
+          <a:noFill/>
+        </p:spPr>
+        <p:txBody>
+          <a:bodyPr wrap="square">
+            <a:spAutoFit/>
+          </a:bodyPr>
+          <a:lstStyle/>
+          <a:p>
+            <a:pPr algn="ctr">
+              <a:lnSpc>
+                <a:spcPct val="115000"/>
+              </a:lnSpc>
+              <a:defRPr sz="1000" b="0">
+                <a:solidFill>
+                  <a:srgbClr val="1B4332"/>
+                </a:solidFill>
+                <a:latin typeface="Calibri Light"/>
+              </a:defRPr>
+            </a:pPr>
+            <a:r>
+              <a:t>Oxygen</a:t>
+            </a:r>
+            <a:br/>
+            <a:r>
+              <a:t>Released</a:t>
+            </a:r>
+          </a:p>
+        </p:txBody>
+      </p:sp>
+      <p:sp>
+        <p:nvSpPr>
+          <p:cNvPr id="22" name="Oval 21"/>
           <p:cNvSpPr/>
           <p:nvPr/>
         </p:nvSpPr>
         <p:spPr>
           <a:xfrm>
-            <a:off x="9144000" y="1325880"/>
-            <a:ext cx="2697480" cy="594360"/>
-          </a:xfrm>
-          <a:prstGeom prst="rect">
+            <a:off x="822960" y="4407408"/>
+            <a:ext cx="128016" cy="128016"/>
+          </a:xfrm>
+          <a:prstGeom prst="ellipse">
             <a:avLst/>
           </a:prstGeom>
           <a:solidFill>
-            <a:srgbClr val="4CAF50"/>
+            <a:srgbClr val="2D6A4F"/>
           </a:solidFill>
           <a:ln>
             <a:noFill/>
@@ -5215,14 +5461,14 @@
       </p:sp>
       <p:sp>
         <p:nvSpPr>
-          <p:cNvPr id="18" name="TextBox 17"/>
+          <p:cNvPr id="23" name="TextBox 22"/>
           <p:cNvSpPr txBox="1"/>
           <p:nvPr/>
         </p:nvSpPr>
         <p:spPr>
           <a:xfrm>
-            <a:off x="9235440" y="1417320"/>
-            <a:ext cx="2514600" cy="457200"/>
+            <a:off x="1097280" y="4370832"/>
+            <a:ext cx="7315200" cy="320040"/>
           </a:xfrm>
           <a:prstGeom prst="rect">
             <a:avLst/>
@@ -5230,85 +5476,44 @@
           <a:noFill/>
         </p:spPr>
         <p:txBody>
-          <a:bodyPr wrap="square"/>
-          <a:lstStyle/>
-          <a:p>
-            <a:pPr algn="ctr">
-              <a:defRPr sz="1500" b="1">
-                <a:solidFill>
-                  <a:srgbClr val="FFFFFF"/>
-                </a:solidFill>
-                <a:latin typeface="Calibri"/>
+          <a:bodyPr wrap="square">
+            <a:spAutoFit/>
+          </a:bodyPr>
+          <a:lstStyle/>
+          <a:p>
+            <a:pPr algn="l">
+              <a:lnSpc>
+                <a:spcPct val="115000"/>
+              </a:lnSpc>
+              <a:defRPr sz="1500" b="0">
+                <a:solidFill>
+                  <a:srgbClr val="1B4332"/>
+                </a:solidFill>
+                <a:latin typeface="Calibri Light"/>
               </a:defRPr>
             </a:pPr>
             <a:r>
-              <a:t>🌿  Chlorophyll</a:t>
-            </a:r>
-          </a:p>
-        </p:txBody>
-      </p:sp>
-      <p:sp>
-        <p:nvSpPr>
-          <p:cNvPr id="19" name="TextBox 18"/>
-          <p:cNvSpPr txBox="1"/>
-          <p:nvPr/>
-        </p:nvSpPr>
-        <p:spPr>
-          <a:xfrm>
-            <a:off x="9326880" y="2103120"/>
-            <a:ext cx="2331720" cy="2194560"/>
-          </a:xfrm>
-          <a:prstGeom prst="rect">
-            <a:avLst/>
-          </a:prstGeom>
-          <a:noFill/>
-        </p:spPr>
-        <p:txBody>
-          <a:bodyPr wrap="square"/>
-          <a:lstStyle/>
-          <a:p>
-            <a:pPr algn="l">
-              <a:defRPr sz="1200" b="0">
-                <a:solidFill>
-                  <a:srgbClr val="333333"/>
-                </a:solidFill>
-                <a:latin typeface="Calibri"/>
-              </a:defRPr>
-            </a:pPr>
-            <a:r>
-              <a:t>• Green pigment in chloroplasts</a:t>
-            </a:r>
-            <a:br/>
-            <a:r>
-              <a:t>• Located in thylakoid membranes</a:t>
-            </a:r>
-            <a:br/>
-            <a:r>
-              <a:t>• Absorbs red &amp; blue light best</a:t>
-            </a:r>
-            <a:br/>
-            <a:r>
-              <a:t>• Reflects green light</a:t>
-            </a:r>
-          </a:p>
-        </p:txBody>
-      </p:sp>
-      <p:sp>
-        <p:nvSpPr>
-          <p:cNvPr id="20" name="Rectangle 19"/>
+              <a:t>Chlorophyll captures sunlight and splits water</a:t>
+            </a:r>
+          </a:p>
+        </p:txBody>
+      </p:sp>
+      <p:sp>
+        <p:nvSpPr>
+          <p:cNvPr id="24" name="Oval 23"/>
           <p:cNvSpPr/>
           <p:nvPr/>
         </p:nvSpPr>
         <p:spPr>
           <a:xfrm>
-            <a:off x="365760" y="4754880"/>
-            <a:ext cx="11430000" cy="548640"/>
-          </a:xfrm>
-          <a:prstGeom prst="rect">
+            <a:off x="822960" y="4754880"/>
+            <a:ext cx="128016" cy="128016"/>
+          </a:xfrm>
+          <a:prstGeom prst="ellipse">
             <a:avLst/>
           </a:prstGeom>
           <a:solidFill>
-            <a:srgbClr val="1B5E20"/>
+            <a:srgbClr val="2D6A4F"/>
           </a:solidFill>
           <a:ln>
             <a:noFill/>
@@ -5338,14 +5543,14 @@
       </p:sp>
       <p:sp>
         <p:nvSpPr>
-          <p:cNvPr id="21" name="TextBox 20"/>
+          <p:cNvPr id="25" name="TextBox 24"/>
           <p:cNvSpPr txBox="1"/>
           <p:nvPr/>
         </p:nvSpPr>
         <p:spPr>
           <a:xfrm>
-            <a:off x="640080" y="4828032"/>
-            <a:ext cx="10972800" cy="411480"/>
+            <a:off x="1097280" y="4718304"/>
+            <a:ext cx="7315200" cy="320040"/>
           </a:xfrm>
           <a:prstGeom prst="rect">
             <a:avLst/>
@@ -5353,39 +5558,44 @@
           <a:noFill/>
         </p:spPr>
         <p:txBody>
-          <a:bodyPr wrap="square"/>
-          <a:lstStyle/>
-          <a:p>
-            <a:pPr algn="ctr">
-              <a:defRPr sz="1300" b="0">
-                <a:solidFill>
-                  <a:srgbClr val="FFFFFF"/>
-                </a:solidFill>
-                <a:latin typeface="Calibri"/>
+          <a:bodyPr wrap="square">
+            <a:spAutoFit/>
+          </a:bodyPr>
+          <a:lstStyle/>
+          <a:p>
+            <a:pPr algn="l">
+              <a:lnSpc>
+                <a:spcPct val="115000"/>
+              </a:lnSpc>
+              <a:defRPr sz="1500" b="0">
+                <a:solidFill>
+                  <a:srgbClr val="1B4332"/>
+                </a:solidFill>
+                <a:latin typeface="Calibri Light"/>
               </a:defRPr>
             </a:pPr>
             <a:r>
-              <a:t>🔑  All four ingredients must be present simultaneously for photosynthesis to proceed efficiently.</a:t>
-            </a:r>
-          </a:p>
-        </p:txBody>
-      </p:sp>
-      <p:sp>
-        <p:nvSpPr>
-          <p:cNvPr id="22" name="Rectangle 21"/>
+              <a:t>Produces ATP — the cell's energy currency</a:t>
+            </a:r>
+          </a:p>
+        </p:txBody>
+      </p:sp>
+      <p:sp>
+        <p:nvSpPr>
+          <p:cNvPr id="26" name="Oval 25"/>
           <p:cNvSpPr/>
           <p:nvPr/>
         </p:nvSpPr>
         <p:spPr>
           <a:xfrm>
-            <a:off x="365760" y="5532120"/>
-            <a:ext cx="11430000" cy="685800"/>
-          </a:xfrm>
-          <a:prstGeom prst="rect">
+            <a:off x="822960" y="5102352"/>
+            <a:ext cx="128016" cy="128016"/>
+          </a:xfrm>
+          <a:prstGeom prst="ellipse">
             <a:avLst/>
           </a:prstGeom>
           <a:solidFill>
-            <a:srgbClr val="E8F5E9"/>
+            <a:srgbClr val="2D6A4F"/>
           </a:solidFill>
           <a:ln>
             <a:noFill/>
@@ -5415,14 +5625,14 @@
       </p:sp>
       <p:sp>
         <p:nvSpPr>
-          <p:cNvPr id="23" name="TextBox 22"/>
+          <p:cNvPr id="27" name="TextBox 26"/>
           <p:cNvSpPr txBox="1"/>
           <p:nvPr/>
         </p:nvSpPr>
         <p:spPr>
           <a:xfrm>
-            <a:off x="640080" y="5596128"/>
-            <a:ext cx="10881360" cy="548640"/>
+            <a:off x="1097280" y="5065776"/>
+            <a:ext cx="7315200" cy="320040"/>
           </a:xfrm>
           <a:prstGeom prst="rect">
             <a:avLst/>
@@ -5430,39 +5640,44 @@
           <a:noFill/>
         </p:spPr>
         <p:txBody>
-          <a:bodyPr wrap="square"/>
+          <a:bodyPr wrap="square">
+            <a:spAutoFit/>
+          </a:bodyPr>
           <a:lstStyle/>
           <a:p>
             <a:pPr algn="l">
-              <a:defRPr sz="1100" b="0">
-                <a:solidFill>
-                  <a:srgbClr val="333333"/>
-                </a:solidFill>
-                <a:latin typeface="Calibri"/>
+              <a:lnSpc>
+                <a:spcPct val="115000"/>
+              </a:lnSpc>
+              <a:defRPr sz="1500" b="0">
+                <a:solidFill>
+                  <a:srgbClr val="1B4332"/>
+                </a:solidFill>
+                <a:latin typeface="Calibri Light"/>
               </a:defRPr>
             </a:pPr>
             <a:r>
-              <a:t>📊  Key Insight:  Chlorophyll a absorbs maximally at ~430 nm (blue) and ~662 nm (red). Accessory pigments (chlorophyll b, carotenoids) broaden the absorption spectrum, capturing energy that chlorophyll a alone would miss.</a:t>
-            </a:r>
-          </a:p>
-        </p:txBody>
-      </p:sp>
-      <p:sp>
-        <p:nvSpPr>
-          <p:cNvPr id="24" name="Rectangle 23"/>
+              <a:t>Produces NADPH — carries electrons to Phase 2</a:t>
+            </a:r>
+          </a:p>
+        </p:txBody>
+      </p:sp>
+      <p:sp>
+        <p:nvSpPr>
+          <p:cNvPr id="28" name="Oval 27"/>
           <p:cNvSpPr/>
           <p:nvPr/>
         </p:nvSpPr>
         <p:spPr>
           <a:xfrm>
-            <a:off x="0" y="6355080"/>
-            <a:ext cx="12191695" cy="502920"/>
-          </a:xfrm>
-          <a:prstGeom prst="rect">
+            <a:off x="822960" y="5449824"/>
+            <a:ext cx="128016" cy="128016"/>
+          </a:xfrm>
+          <a:prstGeom prst="ellipse">
             <a:avLst/>
           </a:prstGeom>
           <a:solidFill>
-            <a:srgbClr val="1B5E20"/>
+            <a:srgbClr val="2D6A4F"/>
           </a:solidFill>
           <a:ln>
             <a:noFill/>
@@ -5492,14 +5707,14 @@
       </p:sp>
       <p:sp>
         <p:nvSpPr>
-          <p:cNvPr id="25" name="TextBox 24"/>
+          <p:cNvPr id="29" name="TextBox 28"/>
           <p:cNvSpPr txBox="1"/>
           <p:nvPr/>
         </p:nvSpPr>
         <p:spPr>
           <a:xfrm>
-            <a:off x="457200" y="6419088"/>
-            <a:ext cx="4572000" cy="365760"/>
+            <a:off x="1097280" y="5413248"/>
+            <a:ext cx="7315200" cy="320040"/>
           </a:xfrm>
           <a:prstGeom prst="rect">
             <a:avLst/>
@@ -5507,33 +5722,122 @@
           <a:noFill/>
         </p:spPr>
         <p:txBody>
-          <a:bodyPr wrap="square"/>
+          <a:bodyPr wrap="square">
+            <a:spAutoFit/>
+          </a:bodyPr>
           <a:lstStyle/>
           <a:p>
             <a:pPr algn="l">
-              <a:defRPr sz="900" b="0">
-                <a:solidFill>
-                  <a:srgbClr val="FFFFFF"/>
+              <a:lnSpc>
+                <a:spcPct val="115000"/>
+              </a:lnSpc>
+              <a:defRPr sz="1500" b="0">
+                <a:solidFill>
+                  <a:srgbClr val="1B4332"/>
+                </a:solidFill>
+                <a:latin typeface="Calibri Light"/>
+              </a:defRPr>
+            </a:pPr>
+            <a:r>
+              <a:t>Byproduct: oxygen is released into the air</a:t>
+            </a:r>
+          </a:p>
+        </p:txBody>
+      </p:sp>
+      <p:sp>
+        <p:nvSpPr>
+          <p:cNvPr id="30" name="Rounded Rectangle 29"/>
+          <p:cNvSpPr/>
+          <p:nvPr/>
+        </p:nvSpPr>
+        <p:spPr>
+          <a:xfrm>
+            <a:off x="8503920" y="4297680"/>
+            <a:ext cx="2926080" cy="1188720"/>
+          </a:xfrm>
+          <a:prstGeom prst="roundRect">
+            <a:avLst/>
+          </a:prstGeom>
+          <a:solidFill>
+            <a:srgbClr val="E0EEE8"/>
+          </a:solidFill>
+          <a:ln w="12700">
+            <a:solidFill>
+              <a:srgbClr val="2D6A4F"/>
+            </a:solidFill>
+          </a:ln>
+        </p:spPr>
+        <p:style>
+          <a:lnRef idx="1">
+            <a:schemeClr val="accent1"/>
+          </a:lnRef>
+          <a:fillRef idx="3">
+            <a:schemeClr val="accent1"/>
+          </a:fillRef>
+          <a:effectRef idx="2">
+            <a:schemeClr val="accent1"/>
+          </a:effectRef>
+          <a:fontRef idx="minor">
+            <a:schemeClr val="lt1"/>
+          </a:fontRef>
+        </p:style>
+        <p:txBody>
+          <a:bodyPr rtlCol="0" anchor="ctr"/>
+          <a:lstStyle/>
+          <a:p>
+            <a:pPr algn="ctr"/>
+          </a:p>
+        </p:txBody>
+      </p:sp>
+      <p:sp>
+        <p:nvSpPr>
+          <p:cNvPr id="31" name="TextBox 30"/>
+          <p:cNvSpPr txBox="1"/>
+          <p:nvPr/>
+        </p:nvSpPr>
+        <p:spPr>
+          <a:xfrm>
+            <a:off x="8686800" y="4389120"/>
+            <a:ext cx="2560320" cy="320040"/>
+          </a:xfrm>
+          <a:prstGeom prst="rect">
+            <a:avLst/>
+          </a:prstGeom>
+          <a:noFill/>
+        </p:spPr>
+        <p:txBody>
+          <a:bodyPr wrap="square">
+            <a:spAutoFit/>
+          </a:bodyPr>
+          <a:lstStyle/>
+          <a:p>
+            <a:pPr algn="l">
+              <a:lnSpc>
+                <a:spcPct val="115000"/>
+              </a:lnSpc>
+              <a:defRPr sz="1300" b="1">
+                <a:solidFill>
+                  <a:srgbClr val="2D6A4F"/>
                 </a:solidFill>
                 <a:latin typeface="Calibri"/>
               </a:defRPr>
             </a:pPr>
             <a:r>
-              <a:t>Photosynthesis: How Plants Make Their Own Food  |  Prof. Marcus Williams</a:t>
-            </a:r>
-          </a:p>
-        </p:txBody>
-      </p:sp>
-      <p:sp>
-        <p:nvSpPr>
-          <p:cNvPr id="26" name="TextBox 25"/>
+              <a:t>🔋  Analogy</a:t>
+            </a:r>
+          </a:p>
+        </p:txBody>
+      </p:sp>
+      <p:sp>
+        <p:nvSpPr>
+          <p:cNvPr id="32" name="TextBox 31"/>
           <p:cNvSpPr txBox="1"/>
           <p:nvPr/>
         </p:nvSpPr>
         <p:spPr>
           <a:xfrm>
-            <a:off x="11155680" y="6419088"/>
-            <a:ext cx="731520" cy="365760"/>
+            <a:off x="8686800" y="4709160"/>
+            <a:ext cx="2560320" cy="640080"/>
           </a:xfrm>
           <a:prstGeom prst="rect">
             <a:avLst/>
@@ -5541,20 +5845,107 @@
           <a:noFill/>
         </p:spPr>
         <p:txBody>
-          <a:bodyPr wrap="square"/>
-          <a:lstStyle/>
-          <a:p>
-            <a:pPr algn="r">
-              <a:defRPr sz="900" b="1">
-                <a:solidFill>
-                  <a:srgbClr val="FFFFFF"/>
+          <a:bodyPr wrap="square">
+            <a:spAutoFit/>
+          </a:bodyPr>
+          <a:lstStyle/>
+          <a:p>
+            <a:pPr algn="l">
+              <a:lnSpc>
+                <a:spcPct val="115000"/>
+              </a:lnSpc>
+              <a:defRPr sz="1200" b="0">
+                <a:solidFill>
+                  <a:srgbClr val="1B4332"/>
+                </a:solidFill>
+                <a:latin typeface="Calibri Light"/>
+              </a:defRPr>
+            </a:pPr>
+            <a:r>
+              <a:t>This is the "charging the battery" phase — capturing and storing energy.</a:t>
+            </a:r>
+          </a:p>
+        </p:txBody>
+      </p:sp>
+      <p:sp>
+        <p:nvSpPr>
+          <p:cNvPr id="33" name="TextBox 32"/>
+          <p:cNvSpPr txBox="1"/>
+          <p:nvPr/>
+        </p:nvSpPr>
+        <p:spPr>
+          <a:xfrm>
+            <a:off x="731520" y="5852160"/>
+            <a:ext cx="10698480" cy="365760"/>
+          </a:xfrm>
+          <a:prstGeom prst="rect">
+            <a:avLst/>
+          </a:prstGeom>
+          <a:noFill/>
+        </p:spPr>
+        <p:txBody>
+          <a:bodyPr wrap="square">
+            <a:spAutoFit/>
+          </a:bodyPr>
+          <a:lstStyle/>
+          <a:p>
+            <a:pPr algn="l">
+              <a:lnSpc>
+                <a:spcPct val="115000"/>
+              </a:lnSpc>
+              <a:defRPr sz="1200" b="0">
+                <a:solidFill>
+                  <a:srgbClr val="6B9080"/>
                 </a:solidFill>
                 <a:latin typeface="Calibri"/>
               </a:defRPr>
             </a:pPr>
             <a:r>
-              <a:t>3</a:t>
-            </a:r>
+              <a:t>⚡  Light reactions require sunlight — they stop in the dark.</a:t>
+            </a:r>
+          </a:p>
+        </p:txBody>
+      </p:sp>
+      <p:sp>
+        <p:nvSpPr>
+          <p:cNvPr id="34" name="Rectangle 33"/>
+          <p:cNvSpPr/>
+          <p:nvPr/>
+        </p:nvSpPr>
+        <p:spPr>
+          <a:xfrm>
+            <a:off x="0" y="6803136"/>
+            <a:ext cx="12191695" cy="54864"/>
+          </a:xfrm>
+          <a:prstGeom prst="rect">
+            <a:avLst/>
+          </a:prstGeom>
+          <a:solidFill>
+            <a:srgbClr val="1B4332"/>
+          </a:solidFill>
+          <a:ln>
+            <a:noFill/>
+          </a:ln>
+        </p:spPr>
+        <p:style>
+          <a:lnRef idx="1">
+            <a:schemeClr val="accent1"/>
+          </a:lnRef>
+          <a:fillRef idx="3">
+            <a:schemeClr val="accent1"/>
+          </a:fillRef>
+          <a:effectRef idx="2">
+            <a:schemeClr val="accent1"/>
+          </a:effectRef>
+          <a:fontRef idx="minor">
+            <a:schemeClr val="lt1"/>
+          </a:fontRef>
+        </p:style>
+        <p:txBody>
+          <a:bodyPr rtlCol="0" anchor="ctr"/>
+          <a:lstStyle/>
+          <a:p>
+            <a:pPr algn="ctr"/>
           </a:p>
         </p:txBody>
       </p:sp>
@@ -5572,7 +5963,7 @@
     <p:bg>
       <p:bgPr>
         <a:solidFill>
-          <a:srgbClr val="FFFFFF"/>
+          <a:srgbClr val="F0F7F4"/>
         </a:solidFill>
         <a:effectLst/>
       </p:bgPr>
@@ -5593,13 +5984,13 @@
         <p:spPr>
           <a:xfrm>
             <a:off x="0" y="0"/>
-            <a:ext cx="12191695" cy="1051560"/>
+            <a:ext cx="12191695" cy="54864"/>
           </a:xfrm>
           <a:prstGeom prst="rect">
             <a:avLst/>
           </a:prstGeom>
           <a:solidFill>
-            <a:srgbClr val="1B5E20"/>
+            <a:srgbClr val="1B4332"/>
           </a:solidFill>
           <a:ln>
             <a:noFill/>
@@ -5635,8 +6026,8 @@
         </p:nvSpPr>
         <p:spPr>
           <a:xfrm>
-            <a:off x="731520" y="228600"/>
-            <a:ext cx="10515600" cy="640080"/>
+            <a:off x="731520" y="457200"/>
+            <a:ext cx="4572000" cy="457200"/>
           </a:xfrm>
           <a:prstGeom prst="rect">
             <a:avLst/>
@@ -5644,43 +6035,123 @@
           <a:noFill/>
         </p:spPr>
         <p:txBody>
-          <a:bodyPr wrap="square"/>
+          <a:bodyPr wrap="square">
+            <a:spAutoFit/>
+          </a:bodyPr>
           <a:lstStyle/>
           <a:p>
             <a:pPr algn="l">
-              <a:defRPr sz="3600" b="1">
-                <a:solidFill>
-                  <a:srgbClr val="FFFFFF"/>
+              <a:lnSpc>
+                <a:spcPct val="115000"/>
+              </a:lnSpc>
+              <a:defRPr sz="1300" b="1">
+                <a:solidFill>
+                  <a:srgbClr val="2D6A4F"/>
+                </a:solidFill>
+                <a:latin typeface="Calibri"/>
+              </a:defRPr>
+            </a:pPr>
+            <a:r>
+              <a:t>03  ·  THE CALVIN CYCLE</a:t>
+            </a:r>
+          </a:p>
+        </p:txBody>
+      </p:sp>
+      <p:sp>
+        <p:nvSpPr>
+          <p:cNvPr id="4" name="TextBox 3"/>
+          <p:cNvSpPr txBox="1"/>
+          <p:nvPr/>
+        </p:nvSpPr>
+        <p:spPr>
+          <a:xfrm>
+            <a:off x="731520" y="914400"/>
+            <a:ext cx="10698480" cy="640080"/>
+          </a:xfrm>
+          <a:prstGeom prst="rect">
+            <a:avLst/>
+          </a:prstGeom>
+          <a:noFill/>
+        </p:spPr>
+        <p:txBody>
+          <a:bodyPr wrap="square">
+            <a:spAutoFit/>
+          </a:bodyPr>
+          <a:lstStyle/>
+          <a:p>
+            <a:pPr algn="l">
+              <a:lnSpc>
+                <a:spcPct val="115000"/>
+              </a:lnSpc>
+              <a:defRPr sz="3600" b="0">
+                <a:solidFill>
+                  <a:srgbClr val="1B4332"/>
                 </a:solidFill>
                 <a:latin typeface="Calibri Light"/>
               </a:defRPr>
             </a:pPr>
             <a:r>
-              <a:t>The Two Stages of Photosynthesis</a:t>
-            </a:r>
-          </a:p>
-        </p:txBody>
-      </p:sp>
-      <p:sp>
-        <p:nvSpPr>
-          <p:cNvPr id="4" name="Rectangle 3"/>
+              <a:t>Building Sugar — Phase 2</a:t>
+            </a:r>
+          </a:p>
+        </p:txBody>
+      </p:sp>
+      <p:sp>
+        <p:nvSpPr>
+          <p:cNvPr id="5" name="TextBox 4"/>
+          <p:cNvSpPr txBox="1"/>
+          <p:nvPr/>
+        </p:nvSpPr>
+        <p:spPr>
+          <a:xfrm>
+            <a:off x="731520" y="1417320"/>
+            <a:ext cx="10698480" cy="457200"/>
+          </a:xfrm>
+          <a:prstGeom prst="rect">
+            <a:avLst/>
+          </a:prstGeom>
+          <a:noFill/>
+        </p:spPr>
+        <p:txBody>
+          <a:bodyPr wrap="square">
+            <a:spAutoFit/>
+          </a:bodyPr>
+          <a:lstStyle/>
+          <a:p>
+            <a:pPr algn="l">
+              <a:lnSpc>
+                <a:spcPct val="115000"/>
+              </a:lnSpc>
+              <a:defRPr sz="1600" b="0">
+                <a:solidFill>
+                  <a:srgbClr val="1B4332"/>
+                </a:solidFill>
+                <a:latin typeface="Calibri Light"/>
+              </a:defRPr>
+            </a:pPr>
+            <a:r>
+              <a:t>Happens in the stroma — the liquid-filled space inside the chloroplast</a:t>
+            </a:r>
+          </a:p>
+        </p:txBody>
+      </p:sp>
+      <p:sp>
+        <p:nvSpPr>
+          <p:cNvPr id="6" name="Oval 5"/>
           <p:cNvSpPr/>
           <p:nvPr/>
         </p:nvSpPr>
         <p:spPr>
           <a:xfrm>
-            <a:off x="365760" y="1325880"/>
-            <a:ext cx="5577840" cy="2560320"/>
-          </a:xfrm>
-          <a:prstGeom prst="rect">
-            <a:avLst/>
-          </a:prstGeom>
-          <a:solidFill>
-            <a:srgbClr val="E8F5E9"/>
-          </a:solidFill>
-          <a:ln w="12700">
+            <a:off x="2743200" y="2743200"/>
+            <a:ext cx="2194560" cy="2194560"/>
+          </a:xfrm>
+          <a:prstGeom prst="ellipse">
+            <a:avLst/>
+          </a:prstGeom>
+          <a:ln w="38100">
             <a:solidFill>
-              <a:srgbClr val="4CAF50"/>
+              <a:srgbClr val="2D6A4F"/>
             </a:solidFill>
           </a:ln>
         </p:spPr>
@@ -5708,23 +6179,68 @@
       </p:sp>
       <p:sp>
         <p:nvSpPr>
-          <p:cNvPr id="5" name="Rectangle 4"/>
+          <p:cNvPr id="7" name="TextBox 6"/>
+          <p:cNvSpPr txBox="1"/>
+          <p:nvPr/>
+        </p:nvSpPr>
+        <p:spPr>
+          <a:xfrm>
+            <a:off x="3154680" y="3611880"/>
+            <a:ext cx="1371600" cy="457200"/>
+          </a:xfrm>
+          <a:prstGeom prst="rect">
+            <a:avLst/>
+          </a:prstGeom>
+          <a:noFill/>
+        </p:spPr>
+        <p:txBody>
+          <a:bodyPr wrap="square">
+            <a:spAutoFit/>
+          </a:bodyPr>
+          <a:lstStyle/>
+          <a:p>
+            <a:pPr algn="ctr">
+              <a:lnSpc>
+                <a:spcPct val="115000"/>
+              </a:lnSpc>
+              <a:defRPr sz="1400" b="1">
+                <a:solidFill>
+                  <a:srgbClr val="1B4332"/>
+                </a:solidFill>
+                <a:latin typeface="Calibri"/>
+              </a:defRPr>
+            </a:pPr>
+            <a:r>
+              <a:t>CALVIN</a:t>
+            </a:r>
+            <a:br/>
+            <a:r>
+              <a:t>CYCLE</a:t>
+            </a:r>
+          </a:p>
+        </p:txBody>
+      </p:sp>
+      <p:sp>
+        <p:nvSpPr>
+          <p:cNvPr id="8" name="Rounded Rectangle 7"/>
           <p:cNvSpPr/>
           <p:nvPr/>
         </p:nvSpPr>
         <p:spPr>
           <a:xfrm>
-            <a:off x="365760" y="1325880"/>
-            <a:ext cx="5577840" cy="502920"/>
-          </a:xfrm>
-          <a:prstGeom prst="rect">
+            <a:off x="3246120" y="1463040"/>
+            <a:ext cx="1188720" cy="640080"/>
+          </a:xfrm>
+          <a:prstGeom prst="roundRect">
             <a:avLst/>
           </a:prstGeom>
           <a:solidFill>
-            <a:srgbClr val="2E7D32"/>
+            <a:srgbClr val="E0EEE8"/>
           </a:solidFill>
-          <a:ln>
-            <a:noFill/>
+          <a:ln w="12700">
+            <a:solidFill>
+              <a:srgbClr val="2D6A4F"/>
+            </a:solidFill>
           </a:ln>
         </p:spPr>
         <p:style>
@@ -5751,48 +6267,14 @@
       </p:sp>
       <p:sp>
         <p:nvSpPr>
-          <p:cNvPr id="6" name="TextBox 5"/>
+          <p:cNvPr id="9" name="TextBox 8"/>
           <p:cNvSpPr txBox="1"/>
           <p:nvPr/>
         </p:nvSpPr>
         <p:spPr>
           <a:xfrm>
-            <a:off x="502920" y="1389888"/>
-            <a:ext cx="5303520" cy="411480"/>
-          </a:xfrm>
-          <a:prstGeom prst="rect">
-            <a:avLst/>
-          </a:prstGeom>
-          <a:noFill/>
-        </p:spPr>
-        <p:txBody>
-          <a:bodyPr wrap="square"/>
-          <a:lstStyle/>
-          <a:p>
-            <a:pPr algn="l">
-              <a:defRPr sz="1700" b="1">
-                <a:solidFill>
-                  <a:srgbClr val="FFFFFF"/>
-                </a:solidFill>
-                <a:latin typeface="Calibri"/>
-              </a:defRPr>
-            </a:pPr>
-            <a:r>
-              <a:t>⚡  STAGE 1: Light-Dependent Reactions</a:t>
-            </a:r>
-          </a:p>
-        </p:txBody>
-      </p:sp>
-      <p:sp>
-        <p:nvSpPr>
-          <p:cNvPr id="7" name="TextBox 6"/>
-          <p:cNvSpPr txBox="1"/>
-          <p:nvPr/>
-        </p:nvSpPr>
-        <p:spPr>
-          <a:xfrm>
-            <a:off x="594360" y="2011680"/>
-            <a:ext cx="5120640" cy="1737360"/>
+            <a:off x="3246120" y="1463040"/>
+            <a:ext cx="1188720" cy="548640"/>
           </a:xfrm>
           <a:prstGeom prst="rect">
             <a:avLst/>
@@ -5805,165 +6287,43 @@
           </a:bodyPr>
           <a:lstStyle/>
           <a:p>
-            <a:pPr>
-              <a:spcAft>
-                <a:spcPts val="360"/>
-              </a:spcAft>
-              <a:defRPr sz="1200">
-                <a:solidFill>
-                  <a:srgbClr val="333333"/>
+            <a:pPr algn="ctr">
+              <a:lnSpc>
+                <a:spcPct val="115000"/>
+              </a:lnSpc>
+              <a:defRPr sz="1100" b="1">
+                <a:solidFill>
+                  <a:srgbClr val="1B4332"/>
                 </a:solidFill>
                 <a:latin typeface="Calibri"/>
               </a:defRPr>
             </a:pPr>
             <a:r>
-              <a:t>▸  Occurs in the thylakoid membranes of chloroplasts</a:t>
-            </a:r>
-          </a:p>
-          <a:p>
-            <a:pPr>
-              <a:spcAft>
-                <a:spcPts val="360"/>
-              </a:spcAft>
-              <a:defRPr sz="1200">
-                <a:solidFill>
-                  <a:srgbClr val="333333"/>
-                </a:solidFill>
-                <a:latin typeface="Calibri"/>
-              </a:defRPr>
-            </a:pPr>
-            <a:r>
-              <a:t>▸  Sunlight splits water molecules (photolysis): 2 H₂O → 4 H⁺ + 4 e⁻ + O₂</a:t>
-            </a:r>
-          </a:p>
-          <a:p>
-            <a:pPr>
-              <a:spcAft>
-                <a:spcPts val="360"/>
-              </a:spcAft>
-              <a:defRPr sz="1200">
-                <a:solidFill>
-                  <a:srgbClr val="333333"/>
-                </a:solidFill>
-                <a:latin typeface="Calibri"/>
-              </a:defRPr>
-            </a:pPr>
-            <a:r>
-              <a:t>▸  Electrons move through the electron transport chain (ETC)</a:t>
-            </a:r>
-          </a:p>
-          <a:p>
-            <a:pPr>
-              <a:spcAft>
-                <a:spcPts val="360"/>
-              </a:spcAft>
-              <a:defRPr sz="1200">
-                <a:solidFill>
-                  <a:srgbClr val="333333"/>
-                </a:solidFill>
-                <a:latin typeface="Calibri"/>
-              </a:defRPr>
-            </a:pPr>
-            <a:r>
-              <a:t>▸  ATP is produced via chemiosmosis (photophosphorylation)</a:t>
-            </a:r>
-          </a:p>
-          <a:p>
-            <a:pPr>
-              <a:spcAft>
-                <a:spcPts val="360"/>
-              </a:spcAft>
-              <a:defRPr sz="1200">
-                <a:solidFill>
-                  <a:srgbClr val="333333"/>
-                </a:solidFill>
-                <a:latin typeface="Calibri"/>
-              </a:defRPr>
-            </a:pPr>
-            <a:r>
-              <a:t>▸  NADP⁺ is reduced to NADPH</a:t>
-            </a:r>
-          </a:p>
-          <a:p>
-            <a:pPr>
-              <a:spcAft>
-                <a:spcPts val="360"/>
-              </a:spcAft>
-              <a:defRPr sz="1200">
-                <a:solidFill>
-                  <a:srgbClr val="333333"/>
-                </a:solidFill>
-                <a:latin typeface="Calibri"/>
-              </a:defRPr>
-            </a:pPr>
-            <a:r>
-              <a:t>▸  Oxygen is released as a by-product into the atmosphere</a:t>
-            </a:r>
-          </a:p>
-        </p:txBody>
-      </p:sp>
-      <p:sp>
-        <p:nvSpPr>
-          <p:cNvPr id="8" name="TextBox 7"/>
-          <p:cNvSpPr txBox="1"/>
-          <p:nvPr/>
-        </p:nvSpPr>
-        <p:spPr>
-          <a:xfrm>
-            <a:off x="5806440" y="2377440"/>
-            <a:ext cx="594360" cy="457200"/>
-          </a:xfrm>
-          <a:prstGeom prst="rect">
-            <a:avLst/>
-          </a:prstGeom>
-          <a:noFill/>
-        </p:spPr>
-        <p:txBody>
-          <a:bodyPr wrap="square"/>
-          <a:lstStyle/>
-          <a:p>
-            <a:pPr algn="ctr">
-              <a:defRPr sz="1000" b="1">
-                <a:solidFill>
-                  <a:srgbClr val="2E7D32"/>
-                </a:solidFill>
-                <a:latin typeface="Calibri"/>
-              </a:defRPr>
-            </a:pPr>
-            <a:r>
-              <a:t>ATP</a:t>
-            </a:r>
-            <a:br/>
-            <a:r>
-              <a:t>NADPH</a:t>
-            </a:r>
-            <a:br/>
-            <a:r>
-              <a:t>▼</a:t>
-            </a:r>
-          </a:p>
-        </p:txBody>
-      </p:sp>
-      <p:sp>
-        <p:nvSpPr>
-          <p:cNvPr id="9" name="Rectangle 8"/>
+              <a:t>CO₂ from air</a:t>
+            </a:r>
+          </a:p>
+        </p:txBody>
+      </p:sp>
+      <p:sp>
+        <p:nvSpPr>
+          <p:cNvPr id="10" name="Rounded Rectangle 9"/>
           <p:cNvSpPr/>
           <p:nvPr/>
         </p:nvSpPr>
         <p:spPr>
           <a:xfrm>
-            <a:off x="6217920" y="1325880"/>
-            <a:ext cx="5577840" cy="2560320"/>
-          </a:xfrm>
-          <a:prstGeom prst="rect">
+            <a:off x="5146664" y="4571999"/>
+            <a:ext cx="1188720" cy="640080"/>
+          </a:xfrm>
+          <a:prstGeom prst="roundRect">
             <a:avLst/>
           </a:prstGeom>
           <a:solidFill>
-            <a:srgbClr val="E8F5E9"/>
+            <a:srgbClr val="E0EEE8"/>
           </a:solidFill>
           <a:ln w="12700">
             <a:solidFill>
-              <a:srgbClr val="4CAF50"/>
+              <a:srgbClr val="2D6A4F"/>
             </a:solidFill>
           </a:ln>
         </p:spPr>
@@ -5991,23 +6351,68 @@
       </p:sp>
       <p:sp>
         <p:nvSpPr>
-          <p:cNvPr id="10" name="Rectangle 9"/>
+          <p:cNvPr id="11" name="TextBox 10"/>
+          <p:cNvSpPr txBox="1"/>
+          <p:nvPr/>
+        </p:nvSpPr>
+        <p:spPr>
+          <a:xfrm>
+            <a:off x="5146664" y="4571999"/>
+            <a:ext cx="1188720" cy="548640"/>
+          </a:xfrm>
+          <a:prstGeom prst="rect">
+            <a:avLst/>
+          </a:prstGeom>
+          <a:noFill/>
+        </p:spPr>
+        <p:txBody>
+          <a:bodyPr wrap="square">
+            <a:spAutoFit/>
+          </a:bodyPr>
+          <a:lstStyle/>
+          <a:p>
+            <a:pPr algn="ctr">
+              <a:lnSpc>
+                <a:spcPct val="115000"/>
+              </a:lnSpc>
+              <a:defRPr sz="1100" b="1">
+                <a:solidFill>
+                  <a:srgbClr val="1B4332"/>
+                </a:solidFill>
+                <a:latin typeface="Calibri"/>
+              </a:defRPr>
+            </a:pPr>
+            <a:r>
+              <a:t>ATP from</a:t>
+            </a:r>
+            <a:br/>
+            <a:r>
+              <a:t>Light Rxns</a:t>
+            </a:r>
+          </a:p>
+        </p:txBody>
+      </p:sp>
+      <p:sp>
+        <p:nvSpPr>
+          <p:cNvPr id="12" name="Rounded Rectangle 11"/>
           <p:cNvSpPr/>
           <p:nvPr/>
         </p:nvSpPr>
         <p:spPr>
           <a:xfrm>
-            <a:off x="6217920" y="1325880"/>
-            <a:ext cx="5577840" cy="502920"/>
-          </a:xfrm>
-          <a:prstGeom prst="rect">
+            <a:off x="1345576" y="4571999"/>
+            <a:ext cx="1188720" cy="640080"/>
+          </a:xfrm>
+          <a:prstGeom prst="roundRect">
             <a:avLst/>
           </a:prstGeom>
           <a:solidFill>
-            <a:srgbClr val="2E7D32"/>
+            <a:srgbClr val="E0EEE8"/>
           </a:solidFill>
-          <a:ln>
-            <a:noFill/>
+          <a:ln w="12700">
+            <a:solidFill>
+              <a:srgbClr val="2D6A4F"/>
+            </a:solidFill>
           </a:ln>
         </p:spPr>
         <p:style>
@@ -6034,48 +6439,14 @@
       </p:sp>
       <p:sp>
         <p:nvSpPr>
-          <p:cNvPr id="11" name="TextBox 10"/>
+          <p:cNvPr id="13" name="TextBox 12"/>
           <p:cNvSpPr txBox="1"/>
           <p:nvPr/>
         </p:nvSpPr>
         <p:spPr>
           <a:xfrm>
-            <a:off x="6355080" y="1389888"/>
-            <a:ext cx="5303520" cy="411480"/>
-          </a:xfrm>
-          <a:prstGeom prst="rect">
-            <a:avLst/>
-          </a:prstGeom>
-          <a:noFill/>
-        </p:spPr>
-        <p:txBody>
-          <a:bodyPr wrap="square"/>
-          <a:lstStyle/>
-          <a:p>
-            <a:pPr algn="l">
-              <a:defRPr sz="1700" b="1">
-                <a:solidFill>
-                  <a:srgbClr val="FFFFFF"/>
-                </a:solidFill>
-                <a:latin typeface="Calibri"/>
-              </a:defRPr>
-            </a:pPr>
-            <a:r>
-              <a:t>🔄  STAGE 2: Calvin Cycle (Light-Independent)</a:t>
-            </a:r>
-          </a:p>
-        </p:txBody>
-      </p:sp>
-      <p:sp>
-        <p:nvSpPr>
-          <p:cNvPr id="12" name="TextBox 11"/>
-          <p:cNvSpPr txBox="1"/>
-          <p:nvPr/>
-        </p:nvSpPr>
-        <p:spPr>
-          <a:xfrm>
-            <a:off x="6446520" y="2011680"/>
-            <a:ext cx="5120640" cy="1737360"/>
+            <a:off x="1345576" y="4571999"/>
+            <a:ext cx="1188720" cy="548640"/>
           </a:xfrm>
           <a:prstGeom prst="rect">
             <a:avLst/>
@@ -6088,153 +6459,43 @@
           </a:bodyPr>
           <a:lstStyle/>
           <a:p>
-            <a:pPr>
-              <a:spcAft>
-                <a:spcPts val="360"/>
-              </a:spcAft>
-              <a:defRPr sz="1200">
-                <a:solidFill>
-                  <a:srgbClr val="333333"/>
+            <a:pPr algn="ctr">
+              <a:lnSpc>
+                <a:spcPct val="115000"/>
+              </a:lnSpc>
+              <a:defRPr sz="1100" b="1">
+                <a:solidFill>
+                  <a:srgbClr val="1B4332"/>
                 </a:solidFill>
                 <a:latin typeface="Calibri"/>
               </a:defRPr>
             </a:pPr>
             <a:r>
-              <a:t>▸  Occurs in the stroma of chloroplasts</a:t>
-            </a:r>
-          </a:p>
-          <a:p>
-            <a:pPr>
-              <a:spcAft>
-                <a:spcPts val="360"/>
-              </a:spcAft>
-              <a:defRPr sz="1200">
-                <a:solidFill>
-                  <a:srgbClr val="333333"/>
-                </a:solidFill>
-                <a:latin typeface="Calibri"/>
-              </a:defRPr>
-            </a:pPr>
-            <a:r>
-              <a:t>▸  Uses ATP and NADPH from Stage 1</a:t>
-            </a:r>
-          </a:p>
-          <a:p>
-            <a:pPr>
-              <a:spcAft>
-                <a:spcPts val="360"/>
-              </a:spcAft>
-              <a:defRPr sz="1200">
-                <a:solidFill>
-                  <a:srgbClr val="333333"/>
-                </a:solidFill>
-                <a:latin typeface="Calibri"/>
-              </a:defRPr>
-            </a:pPr>
-            <a:r>
-              <a:t>▸  CO₂ is fixed by the enzyme RuBisCO</a:t>
-            </a:r>
-          </a:p>
-          <a:p>
-            <a:pPr>
-              <a:spcAft>
-                <a:spcPts val="360"/>
-              </a:spcAft>
-              <a:defRPr sz="1200">
-                <a:solidFill>
-                  <a:srgbClr val="333333"/>
-                </a:solidFill>
-                <a:latin typeface="Calibri"/>
-              </a:defRPr>
-            </a:pPr>
-            <a:r>
-              <a:t>▸  3-phosphoglycerate (3-PGA) is reduced to G3P</a:t>
-            </a:r>
-          </a:p>
-          <a:p>
-            <a:pPr>
-              <a:spcAft>
-                <a:spcPts val="360"/>
-              </a:spcAft>
-              <a:defRPr sz="1200">
-                <a:solidFill>
-                  <a:srgbClr val="333333"/>
-                </a:solidFill>
-                <a:latin typeface="Calibri"/>
-              </a:defRPr>
-            </a:pPr>
-            <a:r>
-              <a:t>▸  G3P is used to synthesize glucose (C₆H₁₂O₆)</a:t>
-            </a:r>
-          </a:p>
-          <a:p>
-            <a:pPr>
-              <a:spcAft>
-                <a:spcPts val="360"/>
-              </a:spcAft>
-              <a:defRPr sz="1200">
-                <a:solidFill>
-                  <a:srgbClr val="333333"/>
-                </a:solidFill>
-                <a:latin typeface="Calibri"/>
-              </a:defRPr>
-            </a:pPr>
-            <a:r>
-              <a:t>▸  RuBP is regenerated to continue the cycle</a:t>
-            </a:r>
-          </a:p>
-        </p:txBody>
-      </p:sp>
-      <p:sp>
-        <p:nvSpPr>
-          <p:cNvPr id="13" name="TextBox 12"/>
-          <p:cNvSpPr txBox="1"/>
-          <p:nvPr/>
-        </p:nvSpPr>
-        <p:spPr>
-          <a:xfrm>
-            <a:off x="365760" y="4114800"/>
-            <a:ext cx="11430000" cy="365760"/>
-          </a:xfrm>
-          <a:prstGeom prst="rect">
-            <a:avLst/>
-          </a:prstGeom>
-          <a:noFill/>
-        </p:spPr>
-        <p:txBody>
-          <a:bodyPr wrap="square"/>
-          <a:lstStyle/>
-          <a:p>
-            <a:pPr algn="ctr">
-              <a:defRPr sz="1200" b="1">
-                <a:solidFill>
-                  <a:srgbClr val="2E7D32"/>
-                </a:solidFill>
-                <a:latin typeface="Calibri"/>
-              </a:defRPr>
-            </a:pPr>
-            <a:r>
-              <a:t>PROCESS FLOW</a:t>
-            </a:r>
-          </a:p>
-        </p:txBody>
-      </p:sp>
-      <p:sp>
-        <p:nvSpPr>
-          <p:cNvPr id="14" name="Rectangle 13"/>
+              <a:t>NADPH from</a:t>
+            </a:r>
+            <a:br/>
+            <a:r>
+              <a:t>Light Rxns</a:t>
+            </a:r>
+          </a:p>
+        </p:txBody>
+      </p:sp>
+      <p:sp>
+        <p:nvSpPr>
+          <p:cNvPr id="14" name="Right Arrow 13"/>
           <p:cNvSpPr/>
           <p:nvPr/>
         </p:nvSpPr>
         <p:spPr>
           <a:xfrm>
-            <a:off x="518007" y="4526280"/>
-            <a:ext cx="2011680" cy="685800"/>
-          </a:xfrm>
-          <a:prstGeom prst="rect">
+            <a:off x="5303520" y="3611880"/>
+            <a:ext cx="457200" cy="320040"/>
+          </a:xfrm>
+          <a:prstGeom prst="rightArrow">
             <a:avLst/>
           </a:prstGeom>
           <a:solidFill>
-            <a:srgbClr val="2E7D32"/>
+            <a:srgbClr val="52B788"/>
           </a:solidFill>
           <a:ln>
             <a:noFill/>
@@ -6264,92 +6525,20 @@
       </p:sp>
       <p:sp>
         <p:nvSpPr>
-          <p:cNvPr id="15" name="TextBox 14"/>
-          <p:cNvSpPr txBox="1"/>
-          <p:nvPr/>
-        </p:nvSpPr>
-        <p:spPr>
-          <a:xfrm>
-            <a:off x="563727" y="4572000"/>
-            <a:ext cx="1920240" cy="594360"/>
-          </a:xfrm>
-          <a:prstGeom prst="rect">
-            <a:avLst/>
-          </a:prstGeom>
-          <a:noFill/>
-        </p:spPr>
-        <p:txBody>
-          <a:bodyPr wrap="square"/>
-          <a:lstStyle/>
-          <a:p>
-            <a:pPr algn="ctr">
-              <a:defRPr sz="1100" b="1">
-                <a:solidFill>
-                  <a:srgbClr val="FFFFFF"/>
-                </a:solidFill>
-                <a:latin typeface="Calibri"/>
-              </a:defRPr>
-            </a:pPr>
-            <a:r>
-              <a:t>Sunlight</a:t>
-            </a:r>
-            <a:br/>
-            <a:r>
-              <a:t>+ H₂O</a:t>
-            </a:r>
-          </a:p>
-        </p:txBody>
-      </p:sp>
-      <p:sp>
-        <p:nvSpPr>
-          <p:cNvPr id="16" name="TextBox 15"/>
-          <p:cNvSpPr txBox="1"/>
-          <p:nvPr/>
-        </p:nvSpPr>
-        <p:spPr>
-          <a:xfrm>
-            <a:off x="2547975" y="4663440"/>
-            <a:ext cx="274320" cy="365760"/>
-          </a:xfrm>
-          <a:prstGeom prst="rect">
-            <a:avLst/>
-          </a:prstGeom>
-          <a:noFill/>
-        </p:spPr>
-        <p:txBody>
-          <a:bodyPr wrap="square"/>
-          <a:lstStyle/>
-          <a:p>
-            <a:pPr algn="ctr">
-              <a:defRPr sz="1800" b="1">
-                <a:solidFill>
-                  <a:srgbClr val="2E7D32"/>
-                </a:solidFill>
-                <a:latin typeface="Calibri"/>
-              </a:defRPr>
-            </a:pPr>
-            <a:r>
-              <a:t>→</a:t>
-            </a:r>
-          </a:p>
-        </p:txBody>
-      </p:sp>
-      <p:sp>
-        <p:nvSpPr>
-          <p:cNvPr id="17" name="Rectangle 16"/>
+          <p:cNvPr id="15" name="Rounded Rectangle 14"/>
           <p:cNvSpPr/>
           <p:nvPr/>
         </p:nvSpPr>
         <p:spPr>
           <a:xfrm>
-            <a:off x="2804007" y="4526280"/>
-            <a:ext cx="2011680" cy="685800"/>
-          </a:xfrm>
-          <a:prstGeom prst="rect">
+            <a:off x="6035040" y="3200400"/>
+            <a:ext cx="1645920" cy="1005840"/>
+          </a:xfrm>
+          <a:prstGeom prst="roundRect">
             <a:avLst/>
           </a:prstGeom>
           <a:solidFill>
-            <a:srgbClr val="4CAF50"/>
+            <a:srgbClr val="1B4332"/>
           </a:solidFill>
           <a:ln>
             <a:noFill/>
@@ -6379,14 +6568,14 @@
       </p:sp>
       <p:sp>
         <p:nvSpPr>
-          <p:cNvPr id="18" name="TextBox 17"/>
+          <p:cNvPr id="16" name="TextBox 15"/>
           <p:cNvSpPr txBox="1"/>
           <p:nvPr/>
         </p:nvSpPr>
         <p:spPr>
           <a:xfrm>
-            <a:off x="2849727" y="4572000"/>
-            <a:ext cx="1920240" cy="594360"/>
+            <a:off x="6126480" y="3291840"/>
+            <a:ext cx="1463040" cy="365760"/>
           </a:xfrm>
           <a:prstGeom prst="rect">
             <a:avLst/>
@@ -6394,77 +6583,87 @@
           <a:noFill/>
         </p:spPr>
         <p:txBody>
-          <a:bodyPr wrap="square"/>
+          <a:bodyPr wrap="square">
+            <a:spAutoFit/>
+          </a:bodyPr>
           <a:lstStyle/>
           <a:p>
             <a:pPr algn="ctr">
-              <a:defRPr sz="1100" b="1">
+              <a:lnSpc>
+                <a:spcPct val="115000"/>
+              </a:lnSpc>
+              <a:defRPr sz="1500" b="1">
+                <a:solidFill>
+                  <a:srgbClr val="F0D060"/>
+                </a:solidFill>
+                <a:latin typeface="Calibri"/>
+              </a:defRPr>
+            </a:pPr>
+            <a:r>
+              <a:t>GLUCOSE</a:t>
+            </a:r>
+          </a:p>
+        </p:txBody>
+      </p:sp>
+      <p:sp>
+        <p:nvSpPr>
+          <p:cNvPr id="17" name="TextBox 16"/>
+          <p:cNvSpPr txBox="1"/>
+          <p:nvPr/>
+        </p:nvSpPr>
+        <p:spPr>
+          <a:xfrm>
+            <a:off x="6126480" y="3611880"/>
+            <a:ext cx="1463040" cy="457200"/>
+          </a:xfrm>
+          <a:prstGeom prst="rect">
+            <a:avLst/>
+          </a:prstGeom>
+          <a:noFill/>
+        </p:spPr>
+        <p:txBody>
+          <a:bodyPr wrap="square">
+            <a:spAutoFit/>
+          </a:bodyPr>
+          <a:lstStyle/>
+          <a:p>
+            <a:pPr algn="ctr">
+              <a:lnSpc>
+                <a:spcPct val="115000"/>
+              </a:lnSpc>
+              <a:defRPr sz="1200" b="0">
                 <a:solidFill>
                   <a:srgbClr val="FFFFFF"/>
                 </a:solidFill>
-                <a:latin typeface="Calibri"/>
+                <a:latin typeface="Calibri Light"/>
               </a:defRPr>
             </a:pPr>
             <a:r>
-              <a:t>Light</a:t>
+              <a:t>C₆H₁₂O₆</a:t>
             </a:r>
             <a:br/>
             <a:r>
-              <a:t>Reactions</a:t>
-            </a:r>
-          </a:p>
-        </p:txBody>
-      </p:sp>
-      <p:sp>
-        <p:nvSpPr>
-          <p:cNvPr id="19" name="TextBox 18"/>
-          <p:cNvSpPr txBox="1"/>
-          <p:nvPr/>
-        </p:nvSpPr>
-        <p:spPr>
-          <a:xfrm>
-            <a:off x="4833975" y="4663440"/>
-            <a:ext cx="274320" cy="365760"/>
-          </a:xfrm>
-          <a:prstGeom prst="rect">
-            <a:avLst/>
-          </a:prstGeom>
-          <a:noFill/>
-        </p:spPr>
-        <p:txBody>
-          <a:bodyPr wrap="square"/>
-          <a:lstStyle/>
-          <a:p>
-            <a:pPr algn="ctr">
-              <a:defRPr sz="1800" b="1">
-                <a:solidFill>
-                  <a:srgbClr val="2E7D32"/>
-                </a:solidFill>
-                <a:latin typeface="Calibri"/>
-              </a:defRPr>
-            </a:pPr>
-            <a:r>
-              <a:t>→</a:t>
-            </a:r>
-          </a:p>
-        </p:txBody>
-      </p:sp>
-      <p:sp>
-        <p:nvSpPr>
-          <p:cNvPr id="20" name="Rectangle 19"/>
+              <a:t>Plant Food!</a:t>
+            </a:r>
+          </a:p>
+        </p:txBody>
+      </p:sp>
+      <p:sp>
+        <p:nvSpPr>
+          <p:cNvPr id="18" name="Oval 17"/>
           <p:cNvSpPr/>
           <p:nvPr/>
         </p:nvSpPr>
         <p:spPr>
           <a:xfrm>
-            <a:off x="5090007" y="4526280"/>
-            <a:ext cx="2011680" cy="685800"/>
-          </a:xfrm>
-          <a:prstGeom prst="rect">
+            <a:off x="685800" y="5166360"/>
+            <a:ext cx="109728" cy="109728"/>
+          </a:xfrm>
+          <a:prstGeom prst="ellipse">
             <a:avLst/>
           </a:prstGeom>
           <a:solidFill>
-            <a:srgbClr val="2E7D32"/>
+            <a:srgbClr val="2D6A4F"/>
           </a:solidFill>
           <a:ln>
             <a:noFill/>
@@ -6494,14 +6693,14 @@
       </p:sp>
       <p:sp>
         <p:nvSpPr>
-          <p:cNvPr id="21" name="TextBox 20"/>
+          <p:cNvPr id="19" name="TextBox 18"/>
           <p:cNvSpPr txBox="1"/>
           <p:nvPr/>
         </p:nvSpPr>
         <p:spPr>
           <a:xfrm>
-            <a:off x="5135727" y="4572000"/>
-            <a:ext cx="1920240" cy="594360"/>
+            <a:off x="1005840" y="5047488"/>
+            <a:ext cx="6858000" cy="320040"/>
           </a:xfrm>
           <a:prstGeom prst="rect">
             <a:avLst/>
@@ -6509,77 +6708,44 @@
           <a:noFill/>
         </p:spPr>
         <p:txBody>
-          <a:bodyPr wrap="square"/>
-          <a:lstStyle/>
-          <a:p>
-            <a:pPr algn="ctr">
-              <a:defRPr sz="1100" b="1">
-                <a:solidFill>
-                  <a:srgbClr val="FFFFFF"/>
-                </a:solidFill>
-                <a:latin typeface="Calibri"/>
+          <a:bodyPr wrap="square">
+            <a:spAutoFit/>
+          </a:bodyPr>
+          <a:lstStyle/>
+          <a:p>
+            <a:pPr algn="l">
+              <a:lnSpc>
+                <a:spcPct val="115000"/>
+              </a:lnSpc>
+              <a:defRPr sz="1500" b="0">
+                <a:solidFill>
+                  <a:srgbClr val="1B4332"/>
+                </a:solidFill>
+                <a:latin typeface="Calibri Light"/>
               </a:defRPr>
             </a:pPr>
             <a:r>
-              <a:t>ATP +</a:t>
-            </a:r>
-            <a:br/>
-            <a:r>
-              <a:t>NADPH</a:t>
-            </a:r>
-          </a:p>
-        </p:txBody>
-      </p:sp>
-      <p:sp>
-        <p:nvSpPr>
-          <p:cNvPr id="22" name="TextBox 21"/>
-          <p:cNvSpPr txBox="1"/>
-          <p:nvPr/>
-        </p:nvSpPr>
-        <p:spPr>
-          <a:xfrm>
-            <a:off x="7119975" y="4663440"/>
-            <a:ext cx="274320" cy="365760"/>
-          </a:xfrm>
-          <a:prstGeom prst="rect">
-            <a:avLst/>
-          </a:prstGeom>
-          <a:noFill/>
-        </p:spPr>
-        <p:txBody>
-          <a:bodyPr wrap="square"/>
-          <a:lstStyle/>
-          <a:p>
-            <a:pPr algn="ctr">
-              <a:defRPr sz="1800" b="1">
-                <a:solidFill>
-                  <a:srgbClr val="2E7D32"/>
-                </a:solidFill>
-                <a:latin typeface="Calibri"/>
-              </a:defRPr>
-            </a:pPr>
-            <a:r>
-              <a:t>→</a:t>
-            </a:r>
-          </a:p>
-        </p:txBody>
-      </p:sp>
-      <p:sp>
-        <p:nvSpPr>
-          <p:cNvPr id="23" name="Rectangle 22"/>
+              <a:t>Uses CO₂ from the air + ATP &amp; NADPH from light reactions</a:t>
+            </a:r>
+          </a:p>
+        </p:txBody>
+      </p:sp>
+      <p:sp>
+        <p:nvSpPr>
+          <p:cNvPr id="20" name="Oval 19"/>
           <p:cNvSpPr/>
           <p:nvPr/>
         </p:nvSpPr>
         <p:spPr>
           <a:xfrm>
-            <a:off x="7376007" y="4526280"/>
-            <a:ext cx="2011680" cy="685800"/>
-          </a:xfrm>
-          <a:prstGeom prst="rect">
+            <a:off x="685800" y="5513832"/>
+            <a:ext cx="109728" cy="109728"/>
+          </a:xfrm>
+          <a:prstGeom prst="ellipse">
             <a:avLst/>
           </a:prstGeom>
           <a:solidFill>
-            <a:srgbClr val="4CAF50"/>
+            <a:srgbClr val="2D6A4F"/>
           </a:solidFill>
           <a:ln>
             <a:noFill/>
@@ -6609,14 +6775,14 @@
       </p:sp>
       <p:sp>
         <p:nvSpPr>
-          <p:cNvPr id="24" name="TextBox 23"/>
+          <p:cNvPr id="21" name="TextBox 20"/>
           <p:cNvSpPr txBox="1"/>
           <p:nvPr/>
         </p:nvSpPr>
         <p:spPr>
           <a:xfrm>
-            <a:off x="7421727" y="4572000"/>
-            <a:ext cx="1920240" cy="594360"/>
+            <a:off x="1005840" y="5394959"/>
+            <a:ext cx="6858000" cy="320040"/>
           </a:xfrm>
           <a:prstGeom prst="rect">
             <a:avLst/>
@@ -6624,77 +6790,44 @@
           <a:noFill/>
         </p:spPr>
         <p:txBody>
-          <a:bodyPr wrap="square"/>
-          <a:lstStyle/>
-          <a:p>
-            <a:pPr algn="ctr">
-              <a:defRPr sz="1100" b="1">
-                <a:solidFill>
-                  <a:srgbClr val="FFFFFF"/>
-                </a:solidFill>
-                <a:latin typeface="Calibri"/>
+          <a:bodyPr wrap="square">
+            <a:spAutoFit/>
+          </a:bodyPr>
+          <a:lstStyle/>
+          <a:p>
+            <a:pPr algn="l">
+              <a:lnSpc>
+                <a:spcPct val="115000"/>
+              </a:lnSpc>
+              <a:defRPr sz="1500" b="0">
+                <a:solidFill>
+                  <a:srgbClr val="1B4332"/>
+                </a:solidFill>
+                <a:latin typeface="Calibri Light"/>
               </a:defRPr>
             </a:pPr>
             <a:r>
-              <a:t>Calvin</a:t>
-            </a:r>
-            <a:br/>
-            <a:r>
-              <a:t>Cycle</a:t>
-            </a:r>
-          </a:p>
-        </p:txBody>
-      </p:sp>
-      <p:sp>
-        <p:nvSpPr>
-          <p:cNvPr id="25" name="TextBox 24"/>
-          <p:cNvSpPr txBox="1"/>
-          <p:nvPr/>
-        </p:nvSpPr>
-        <p:spPr>
-          <a:xfrm>
-            <a:off x="9405974" y="4663440"/>
-            <a:ext cx="274320" cy="365760"/>
-          </a:xfrm>
-          <a:prstGeom prst="rect">
-            <a:avLst/>
-          </a:prstGeom>
-          <a:noFill/>
-        </p:spPr>
-        <p:txBody>
-          <a:bodyPr wrap="square"/>
-          <a:lstStyle/>
-          <a:p>
-            <a:pPr algn="ctr">
-              <a:defRPr sz="1800" b="1">
-                <a:solidFill>
-                  <a:srgbClr val="2E7D32"/>
-                </a:solidFill>
-                <a:latin typeface="Calibri"/>
-              </a:defRPr>
-            </a:pPr>
-            <a:r>
-              <a:t>→</a:t>
-            </a:r>
-          </a:p>
-        </p:txBody>
-      </p:sp>
-      <p:sp>
-        <p:nvSpPr>
-          <p:cNvPr id="26" name="Rectangle 25"/>
+              <a:t>Builds glucose through a cycle of enzyme reactions</a:t>
+            </a:r>
+          </a:p>
+        </p:txBody>
+      </p:sp>
+      <p:sp>
+        <p:nvSpPr>
+          <p:cNvPr id="22" name="Oval 21"/>
           <p:cNvSpPr/>
           <p:nvPr/>
         </p:nvSpPr>
         <p:spPr>
           <a:xfrm>
-            <a:off x="9662007" y="4526280"/>
-            <a:ext cx="2011680" cy="685800"/>
-          </a:xfrm>
-          <a:prstGeom prst="rect">
+            <a:off x="685800" y="5861304"/>
+            <a:ext cx="109728" cy="109728"/>
+          </a:xfrm>
+          <a:prstGeom prst="ellipse">
             <a:avLst/>
           </a:prstGeom>
           <a:solidFill>
-            <a:srgbClr val="2E7D32"/>
+            <a:srgbClr val="2D6A4F"/>
           </a:solidFill>
           <a:ln>
             <a:noFill/>
@@ -6724,14 +6857,14 @@
       </p:sp>
       <p:sp>
         <p:nvSpPr>
-          <p:cNvPr id="27" name="TextBox 26"/>
+          <p:cNvPr id="23" name="TextBox 22"/>
           <p:cNvSpPr txBox="1"/>
           <p:nvPr/>
         </p:nvSpPr>
         <p:spPr>
           <a:xfrm>
-            <a:off x="9707727" y="4572000"/>
-            <a:ext cx="1920240" cy="594360"/>
+            <a:off x="1005840" y="5742431"/>
+            <a:ext cx="6858000" cy="320040"/>
           </a:xfrm>
           <a:prstGeom prst="rect">
             <a:avLst/>
@@ -6739,43 +6872,44 @@
           <a:noFill/>
         </p:spPr>
         <p:txBody>
-          <a:bodyPr wrap="square"/>
-          <a:lstStyle/>
-          <a:p>
-            <a:pPr algn="ctr">
-              <a:defRPr sz="1100" b="1">
-                <a:solidFill>
-                  <a:srgbClr val="FFFFFF"/>
-                </a:solidFill>
-                <a:latin typeface="Calibri"/>
+          <a:bodyPr wrap="square">
+            <a:spAutoFit/>
+          </a:bodyPr>
+          <a:lstStyle/>
+          <a:p>
+            <a:pPr algn="l">
+              <a:lnSpc>
+                <a:spcPct val="115000"/>
+              </a:lnSpc>
+              <a:defRPr sz="1500" b="0">
+                <a:solidFill>
+                  <a:srgbClr val="1B4332"/>
+                </a:solidFill>
+                <a:latin typeface="Calibri Light"/>
               </a:defRPr>
             </a:pPr>
             <a:r>
-              <a:t>Glucose</a:t>
-            </a:r>
-            <a:br/>
-            <a:r>
-              <a:t>C₆H₁₂O₆</a:t>
-            </a:r>
-          </a:p>
-        </p:txBody>
-      </p:sp>
-      <p:sp>
-        <p:nvSpPr>
-          <p:cNvPr id="28" name="Rectangle 27"/>
+              <a:t>Named after Melvin Calvin — discovered in the 1950s</a:t>
+            </a:r>
+          </a:p>
+        </p:txBody>
+      </p:sp>
+      <p:sp>
+        <p:nvSpPr>
+          <p:cNvPr id="24" name="Right Arrow 23"/>
           <p:cNvSpPr/>
           <p:nvPr/>
         </p:nvSpPr>
         <p:spPr>
           <a:xfrm>
-            <a:off x="365760" y="5532120"/>
-            <a:ext cx="11430000" cy="685800"/>
-          </a:xfrm>
-          <a:prstGeom prst="rect">
+            <a:off x="640080" y="6163056"/>
+            <a:ext cx="228600" cy="182880"/>
+          </a:xfrm>
+          <a:prstGeom prst="rightArrow">
             <a:avLst/>
           </a:prstGeom>
           <a:solidFill>
-            <a:srgbClr val="1B5E20"/>
+            <a:srgbClr val="D4A337"/>
           </a:solidFill>
           <a:ln>
             <a:noFill/>
@@ -6805,14 +6939,14 @@
       </p:sp>
       <p:sp>
         <p:nvSpPr>
-          <p:cNvPr id="29" name="TextBox 28"/>
+          <p:cNvPr id="25" name="TextBox 24"/>
           <p:cNvSpPr txBox="1"/>
           <p:nvPr/>
         </p:nvSpPr>
         <p:spPr>
           <a:xfrm>
-            <a:off x="640080" y="5596128"/>
-            <a:ext cx="10881360" cy="548640"/>
+            <a:off x="1005840" y="6089904"/>
+            <a:ext cx="6858000" cy="320040"/>
           </a:xfrm>
           <a:prstGeom prst="rect">
             <a:avLst/>
@@ -6820,42 +6954,49 @@
           <a:noFill/>
         </p:spPr>
         <p:txBody>
-          <a:bodyPr wrap="square"/>
+          <a:bodyPr wrap="square">
+            <a:spAutoFit/>
+          </a:bodyPr>
           <a:lstStyle/>
           <a:p>
             <a:pPr algn="l">
-              <a:defRPr sz="1100" b="0">
-                <a:solidFill>
-                  <a:srgbClr val="FFFFFF"/>
-                </a:solidFill>
-                <a:latin typeface="Calibri"/>
+              <a:lnSpc>
+                <a:spcPct val="115000"/>
+              </a:lnSpc>
+              <a:defRPr sz="1500" b="1">
+                <a:solidFill>
+                  <a:srgbClr val="1B4332"/>
+                </a:solidFill>
+                <a:latin typeface="Calibri Light"/>
               </a:defRPr>
             </a:pPr>
             <a:r>
-              <a:t>🧬  Key Enzyme: RuBisCO (Ribulose-1,5-bisphosphate carboxylase/oxygenase) is the most abundant protein on Earth and catalyzes the first step of carbon fixation.</a:t>
-            </a:r>
-          </a:p>
-        </p:txBody>
-      </p:sp>
-      <p:sp>
-        <p:nvSpPr>
-          <p:cNvPr id="30" name="Rectangle 29"/>
+              <a:t>This phase doesn't need light directly!</a:t>
+            </a:r>
+          </a:p>
+        </p:txBody>
+      </p:sp>
+      <p:sp>
+        <p:nvSpPr>
+          <p:cNvPr id="26" name="Rounded Rectangle 25"/>
           <p:cNvSpPr/>
           <p:nvPr/>
         </p:nvSpPr>
         <p:spPr>
           <a:xfrm>
-            <a:off x="0" y="6355080"/>
-            <a:ext cx="12191695" cy="502920"/>
-          </a:xfrm>
-          <a:prstGeom prst="rect">
+            <a:off x="8229600" y="5029200"/>
+            <a:ext cx="3200400" cy="1188720"/>
+          </a:xfrm>
+          <a:prstGeom prst="roundRect">
             <a:avLst/>
           </a:prstGeom>
           <a:solidFill>
-            <a:srgbClr val="1B5E20"/>
+            <a:srgbClr val="E0EEE8"/>
           </a:solidFill>
-          <a:ln>
-            <a:noFill/>
+          <a:ln w="12700">
+            <a:solidFill>
+              <a:srgbClr val="2D6A4F"/>
+            </a:solidFill>
           </a:ln>
         </p:spPr>
         <p:style>
@@ -6882,14 +7023,14 @@
       </p:sp>
       <p:sp>
         <p:nvSpPr>
-          <p:cNvPr id="31" name="TextBox 30"/>
+          <p:cNvPr id="27" name="TextBox 26"/>
           <p:cNvSpPr txBox="1"/>
           <p:nvPr/>
         </p:nvSpPr>
         <p:spPr>
           <a:xfrm>
-            <a:off x="457200" y="6419088"/>
-            <a:ext cx="4572000" cy="365760"/>
+            <a:off x="8412480" y="5120640"/>
+            <a:ext cx="2834640" cy="320040"/>
           </a:xfrm>
           <a:prstGeom prst="rect">
             <a:avLst/>
@@ -6897,33 +7038,38 @@
           <a:noFill/>
         </p:spPr>
         <p:txBody>
-          <a:bodyPr wrap="square"/>
+          <a:bodyPr wrap="square">
+            <a:spAutoFit/>
+          </a:bodyPr>
           <a:lstStyle/>
           <a:p>
             <a:pPr algn="l">
-              <a:defRPr sz="900" b="0">
-                <a:solidFill>
-                  <a:srgbClr val="FFFFFF"/>
+              <a:lnSpc>
+                <a:spcPct val="115000"/>
+              </a:lnSpc>
+              <a:defRPr sz="1300" b="1">
+                <a:solidFill>
+                  <a:srgbClr val="2D6A4F"/>
                 </a:solidFill>
                 <a:latin typeface="Calibri"/>
               </a:defRPr>
             </a:pPr>
             <a:r>
-              <a:t>Photosynthesis: How Plants Make Their Own Food  |  Dr. Aisha Patel</a:t>
-            </a:r>
-          </a:p>
-        </p:txBody>
-      </p:sp>
-      <p:sp>
-        <p:nvSpPr>
-          <p:cNvPr id="32" name="TextBox 31"/>
+              <a:t>🏗️  Analogy</a:t>
+            </a:r>
+          </a:p>
+        </p:txBody>
+      </p:sp>
+      <p:sp>
+        <p:nvSpPr>
+          <p:cNvPr id="28" name="TextBox 27"/>
           <p:cNvSpPr txBox="1"/>
           <p:nvPr/>
         </p:nvSpPr>
         <p:spPr>
           <a:xfrm>
-            <a:off x="11155680" y="6419088"/>
-            <a:ext cx="731520" cy="365760"/>
+            <a:off x="8412480" y="5394960"/>
+            <a:ext cx="2834640" cy="731520"/>
           </a:xfrm>
           <a:prstGeom prst="rect">
             <a:avLst/>
@@ -6931,20 +7077,68 @@
           <a:noFill/>
         </p:spPr>
         <p:txBody>
-          <a:bodyPr wrap="square"/>
-          <a:lstStyle/>
-          <a:p>
-            <a:pPr algn="r">
-              <a:defRPr sz="900" b="1">
-                <a:solidFill>
-                  <a:srgbClr val="FFFFFF"/>
-                </a:solidFill>
-                <a:latin typeface="Calibri"/>
+          <a:bodyPr wrap="square">
+            <a:spAutoFit/>
+          </a:bodyPr>
+          <a:lstStyle/>
+          <a:p>
+            <a:pPr algn="l">
+              <a:lnSpc>
+                <a:spcPct val="115000"/>
+              </a:lnSpc>
+              <a:defRPr sz="1200" b="0">
+                <a:solidFill>
+                  <a:srgbClr val="1B4332"/>
+                </a:solidFill>
+                <a:latin typeface="Calibri Light"/>
               </a:defRPr>
             </a:pPr>
             <a:r>
-              <a:t>4</a:t>
-            </a:r>
+              <a:t>The "spending the battery to build stuff" phase — using stored energy to make sugar.</a:t>
+            </a:r>
+          </a:p>
+        </p:txBody>
+      </p:sp>
+      <p:sp>
+        <p:nvSpPr>
+          <p:cNvPr id="29" name="Rectangle 28"/>
+          <p:cNvSpPr/>
+          <p:nvPr/>
+        </p:nvSpPr>
+        <p:spPr>
+          <a:xfrm>
+            <a:off x="0" y="6803136"/>
+            <a:ext cx="12191695" cy="54864"/>
+          </a:xfrm>
+          <a:prstGeom prst="rect">
+            <a:avLst/>
+          </a:prstGeom>
+          <a:solidFill>
+            <a:srgbClr val="1B4332"/>
+          </a:solidFill>
+          <a:ln>
+            <a:noFill/>
+          </a:ln>
+        </p:spPr>
+        <p:style>
+          <a:lnRef idx="1">
+            <a:schemeClr val="accent1"/>
+          </a:lnRef>
+          <a:fillRef idx="3">
+            <a:schemeClr val="accent1"/>
+          </a:fillRef>
+          <a:effectRef idx="2">
+            <a:schemeClr val="accent1"/>
+          </a:effectRef>
+          <a:fontRef idx="minor">
+            <a:schemeClr val="lt1"/>
+          </a:fontRef>
+        </p:style>
+        <p:txBody>
+          <a:bodyPr rtlCol="0" anchor="ctr"/>
+          <a:lstStyle/>
+          <a:p>
+            <a:pPr algn="ctr"/>
           </a:p>
         </p:txBody>
       </p:sp>
@@ -6962,7 +7156,7 @@
     <p:bg>
       <p:bgPr>
         <a:solidFill>
-          <a:srgbClr val="FFFFFF"/>
+          <a:srgbClr val="F0F7F4"/>
         </a:solidFill>
         <a:effectLst/>
       </p:bgPr>
@@ -6983,13 +7177,13 @@
         <p:spPr>
           <a:xfrm>
             <a:off x="0" y="0"/>
-            <a:ext cx="12191695" cy="1051560"/>
+            <a:ext cx="12191695" cy="54864"/>
           </a:xfrm>
           <a:prstGeom prst="rect">
             <a:avLst/>
           </a:prstGeom>
           <a:solidFill>
-            <a:srgbClr val="1B5E20"/>
+            <a:srgbClr val="1B4332"/>
           </a:solidFill>
           <a:ln>
             <a:noFill/>
@@ -7025,8 +7219,8 @@
         </p:nvSpPr>
         <p:spPr>
           <a:xfrm>
-            <a:off x="731520" y="228600"/>
-            <a:ext cx="10515600" cy="640080"/>
+            <a:off x="731520" y="457200"/>
+            <a:ext cx="4572000" cy="457200"/>
           </a:xfrm>
           <a:prstGeom prst="rect">
             <a:avLst/>
@@ -7034,43 +7228,87 @@
           <a:noFill/>
         </p:spPr>
         <p:txBody>
-          <a:bodyPr wrap="square"/>
+          <a:bodyPr wrap="square">
+            <a:spAutoFit/>
+          </a:bodyPr>
           <a:lstStyle/>
           <a:p>
             <a:pPr algn="l">
-              <a:defRPr sz="3600" b="1">
-                <a:solidFill>
-                  <a:srgbClr val="FFFFFF"/>
+              <a:lnSpc>
+                <a:spcPct val="115000"/>
+              </a:lnSpc>
+              <a:defRPr sz="1300" b="1">
+                <a:solidFill>
+                  <a:srgbClr val="2D6A4F"/>
+                </a:solidFill>
+                <a:latin typeface="Calibri"/>
+              </a:defRPr>
+            </a:pPr>
+            <a:r>
+              <a:t>04  ·  WHY THIS MATTERS</a:t>
+            </a:r>
+          </a:p>
+        </p:txBody>
+      </p:sp>
+      <p:sp>
+        <p:nvSpPr>
+          <p:cNvPr id="4" name="TextBox 3"/>
+          <p:cNvSpPr txBox="1"/>
+          <p:nvPr/>
+        </p:nvSpPr>
+        <p:spPr>
+          <a:xfrm>
+            <a:off x="731520" y="914400"/>
+            <a:ext cx="10698480" cy="640080"/>
+          </a:xfrm>
+          <a:prstGeom prst="rect">
+            <a:avLst/>
+          </a:prstGeom>
+          <a:noFill/>
+        </p:spPr>
+        <p:txBody>
+          <a:bodyPr wrap="square">
+            <a:spAutoFit/>
+          </a:bodyPr>
+          <a:lstStyle/>
+          <a:p>
+            <a:pPr algn="l">
+              <a:lnSpc>
+                <a:spcPct val="115000"/>
+              </a:lnSpc>
+              <a:defRPr sz="3600" b="0">
+                <a:solidFill>
+                  <a:srgbClr val="1B4332"/>
                 </a:solidFill>
                 <a:latin typeface="Calibri Light"/>
               </a:defRPr>
             </a:pPr>
             <a:r>
-              <a:t>Why Photosynthesis Matters</a:t>
-            </a:r>
-          </a:p>
-        </p:txBody>
-      </p:sp>
-      <p:sp>
-        <p:nvSpPr>
-          <p:cNvPr id="4" name="Rectangle 3"/>
+              <a:t>Photosynthesis = Life Support for Planet Earth</a:t>
+            </a:r>
+          </a:p>
+        </p:txBody>
+      </p:sp>
+      <p:sp>
+        <p:nvSpPr>
+          <p:cNvPr id="5" name="Rounded Rectangle 4"/>
           <p:cNvSpPr/>
           <p:nvPr/>
         </p:nvSpPr>
         <p:spPr>
           <a:xfrm>
-            <a:off x="365760" y="1325880"/>
-            <a:ext cx="11430000" cy="1097280"/>
-          </a:xfrm>
-          <a:prstGeom prst="rect">
+            <a:off x="731520" y="1783080"/>
+            <a:ext cx="5120640" cy="1234440"/>
+          </a:xfrm>
+          <a:prstGeom prst="roundRect">
             <a:avLst/>
           </a:prstGeom>
           <a:solidFill>
-            <a:srgbClr val="E8F5E9"/>
+            <a:srgbClr val="FFFFFF"/>
           </a:solidFill>
           <a:ln w="12700">
             <a:solidFill>
-              <a:srgbClr val="4CAF50"/>
+              <a:srgbClr val="D0E4D8"/>
             </a:solidFill>
           </a:ln>
         </p:spPr>
@@ -7098,20 +7336,20 @@
       </p:sp>
       <p:sp>
         <p:nvSpPr>
-          <p:cNvPr id="5" name="Rectangle 4"/>
+          <p:cNvPr id="6" name="Rectangle 5"/>
           <p:cNvSpPr/>
           <p:nvPr/>
         </p:nvSpPr>
         <p:spPr>
           <a:xfrm>
-            <a:off x="365760" y="1325880"/>
-            <a:ext cx="2743200" cy="1097280"/>
+            <a:off x="731520" y="1783080"/>
+            <a:ext cx="73152" cy="1234440"/>
           </a:xfrm>
           <a:prstGeom prst="rect">
             <a:avLst/>
           </a:prstGeom>
           <a:solidFill>
-            <a:srgbClr val="4CAF50"/>
+            <a:srgbClr val="2D6A4F"/>
           </a:solidFill>
           <a:ln>
             <a:noFill/>
@@ -7141,48 +7379,14 @@
       </p:sp>
       <p:sp>
         <p:nvSpPr>
-          <p:cNvPr id="6" name="TextBox 5"/>
-          <p:cNvSpPr txBox="1"/>
-          <p:nvPr/>
-        </p:nvSpPr>
-        <p:spPr>
-          <a:xfrm>
-            <a:off x="548640" y="1600200"/>
-            <a:ext cx="2377440" cy="548640"/>
-          </a:xfrm>
-          <a:prstGeom prst="rect">
-            <a:avLst/>
-          </a:prstGeom>
-          <a:noFill/>
-        </p:spPr>
-        <p:txBody>
-          <a:bodyPr wrap="square"/>
-          <a:lstStyle/>
-          <a:p>
-            <a:pPr algn="l">
-              <a:defRPr sz="1600" b="1">
-                <a:solidFill>
-                  <a:srgbClr val="FFFFFF"/>
-                </a:solidFill>
-                <a:latin typeface="Calibri"/>
-              </a:defRPr>
-            </a:pPr>
-            <a:r>
-              <a:t>🌍  Oxygen Production</a:t>
-            </a:r>
-          </a:p>
-        </p:txBody>
-      </p:sp>
-      <p:sp>
-        <p:nvSpPr>
           <p:cNvPr id="7" name="TextBox 6"/>
           <p:cNvSpPr txBox="1"/>
           <p:nvPr/>
         </p:nvSpPr>
         <p:spPr>
           <a:xfrm>
-            <a:off x="3383280" y="1463039"/>
-            <a:ext cx="8229600" cy="822960"/>
+            <a:off x="1005840" y="1892808"/>
+            <a:ext cx="4389120" cy="320040"/>
           </a:xfrm>
           <a:prstGeom prst="rect">
             <a:avLst/>
@@ -7190,43 +7394,87 @@
           <a:noFill/>
         </p:spPr>
         <p:txBody>
-          <a:bodyPr wrap="square"/>
+          <a:bodyPr wrap="square">
+            <a:spAutoFit/>
+          </a:bodyPr>
           <a:lstStyle/>
           <a:p>
             <a:pPr algn="l">
-              <a:defRPr sz="1200" b="0">
-                <a:solidFill>
-                  <a:srgbClr val="333333"/>
+              <a:lnSpc>
+                <a:spcPct val="115000"/>
+              </a:lnSpc>
+              <a:defRPr sz="1600" b="1">
+                <a:solidFill>
+                  <a:srgbClr val="2D6A4F"/>
                 </a:solidFill>
                 <a:latin typeface="Calibri"/>
               </a:defRPr>
             </a:pPr>
             <a:r>
-              <a:t>Photosynthesis generates the oxygen that sustains aerobic life. Approximately 50-80% of Earth's oxygen comes from marine phytoplankton and terrestrial plants combined.</a:t>
-            </a:r>
-          </a:p>
-        </p:txBody>
-      </p:sp>
-      <p:sp>
-        <p:nvSpPr>
-          <p:cNvPr id="8" name="Rectangle 7"/>
+              <a:t>OXYGEN</a:t>
+            </a:r>
+          </a:p>
+        </p:txBody>
+      </p:sp>
+      <p:sp>
+        <p:nvSpPr>
+          <p:cNvPr id="8" name="TextBox 7"/>
+          <p:cNvSpPr txBox="1"/>
+          <p:nvPr/>
+        </p:nvSpPr>
+        <p:spPr>
+          <a:xfrm>
+            <a:off x="1005840" y="2286000"/>
+            <a:ext cx="4389120" cy="640080"/>
+          </a:xfrm>
+          <a:prstGeom prst="rect">
+            <a:avLst/>
+          </a:prstGeom>
+          <a:noFill/>
+        </p:spPr>
+        <p:txBody>
+          <a:bodyPr wrap="square">
+            <a:spAutoFit/>
+          </a:bodyPr>
+          <a:lstStyle/>
+          <a:p>
+            <a:pPr algn="l">
+              <a:lnSpc>
+                <a:spcPct val="115000"/>
+              </a:lnSpc>
+              <a:defRPr sz="1400" b="0">
+                <a:solidFill>
+                  <a:srgbClr val="1B4332"/>
+                </a:solidFill>
+                <a:latin typeface="Calibri Light"/>
+              </a:defRPr>
+            </a:pPr>
+            <a:r>
+              <a:t>Every second breath you take comes from ocean phytoplankton — not just trees.</a:t>
+            </a:r>
+          </a:p>
+        </p:txBody>
+      </p:sp>
+      <p:sp>
+        <p:nvSpPr>
+          <p:cNvPr id="9" name="Rounded Rectangle 8"/>
           <p:cNvSpPr/>
           <p:nvPr/>
         </p:nvSpPr>
         <p:spPr>
           <a:xfrm>
-            <a:off x="365760" y="2560320"/>
-            <a:ext cx="11430000" cy="1097280"/>
-          </a:xfrm>
-          <a:prstGeom prst="rect">
+            <a:off x="6126480" y="1783080"/>
+            <a:ext cx="5120640" cy="1234440"/>
+          </a:xfrm>
+          <a:prstGeom prst="roundRect">
             <a:avLst/>
           </a:prstGeom>
           <a:solidFill>
-            <a:srgbClr val="E8F5E9"/>
+            <a:srgbClr val="FFFFFF"/>
           </a:solidFill>
           <a:ln w="12700">
             <a:solidFill>
-              <a:srgbClr val="4CAF50"/>
+              <a:srgbClr val="D0E4D8"/>
             </a:solidFill>
           </a:ln>
         </p:spPr>
@@ -7254,20 +7502,20 @@
       </p:sp>
       <p:sp>
         <p:nvSpPr>
-          <p:cNvPr id="9" name="Rectangle 8"/>
+          <p:cNvPr id="10" name="Rectangle 9"/>
           <p:cNvSpPr/>
           <p:nvPr/>
         </p:nvSpPr>
         <p:spPr>
           <a:xfrm>
-            <a:off x="365760" y="2560320"/>
-            <a:ext cx="2743200" cy="1097280"/>
+            <a:off x="6126480" y="1783080"/>
+            <a:ext cx="73152" cy="1234440"/>
           </a:xfrm>
           <a:prstGeom prst="rect">
             <a:avLst/>
           </a:prstGeom>
           <a:solidFill>
-            <a:srgbClr val="4CAF50"/>
+            <a:srgbClr val="2D6A4F"/>
           </a:solidFill>
           <a:ln>
             <a:noFill/>
@@ -7297,48 +7545,14 @@
       </p:sp>
       <p:sp>
         <p:nvSpPr>
-          <p:cNvPr id="10" name="TextBox 9"/>
-          <p:cNvSpPr txBox="1"/>
-          <p:nvPr/>
-        </p:nvSpPr>
-        <p:spPr>
-          <a:xfrm>
-            <a:off x="548640" y="2834639"/>
-            <a:ext cx="2377440" cy="548640"/>
-          </a:xfrm>
-          <a:prstGeom prst="rect">
-            <a:avLst/>
-          </a:prstGeom>
-          <a:noFill/>
-        </p:spPr>
-        <p:txBody>
-          <a:bodyPr wrap="square"/>
-          <a:lstStyle/>
-          <a:p>
-            <a:pPr algn="l">
-              <a:defRPr sz="1600" b="1">
-                <a:solidFill>
-                  <a:srgbClr val="FFFFFF"/>
-                </a:solidFill>
-                <a:latin typeface="Calibri"/>
-              </a:defRPr>
-            </a:pPr>
-            <a:r>
-              <a:t>🍽️  Food Chain Foundation</a:t>
-            </a:r>
-          </a:p>
-        </p:txBody>
-      </p:sp>
-      <p:sp>
-        <p:nvSpPr>
           <p:cNvPr id="11" name="TextBox 10"/>
           <p:cNvSpPr txBox="1"/>
           <p:nvPr/>
         </p:nvSpPr>
         <p:spPr>
           <a:xfrm>
-            <a:off x="3383280" y="2697479"/>
-            <a:ext cx="8229600" cy="822960"/>
+            <a:off x="6400800" y="1892808"/>
+            <a:ext cx="4389120" cy="320040"/>
           </a:xfrm>
           <a:prstGeom prst="rect">
             <a:avLst/>
@@ -7346,43 +7560,87 @@
           <a:noFill/>
         </p:spPr>
         <p:txBody>
-          <a:bodyPr wrap="square"/>
+          <a:bodyPr wrap="square">
+            <a:spAutoFit/>
+          </a:bodyPr>
           <a:lstStyle/>
           <a:p>
             <a:pPr algn="l">
-              <a:defRPr sz="1200" b="0">
-                <a:solidFill>
-                  <a:srgbClr val="333333"/>
+              <a:lnSpc>
+                <a:spcPct val="115000"/>
+              </a:lnSpc>
+              <a:defRPr sz="1600" b="1">
+                <a:solidFill>
+                  <a:srgbClr val="2D6A4F"/>
                 </a:solidFill>
                 <a:latin typeface="Calibri"/>
               </a:defRPr>
             </a:pPr>
             <a:r>
-              <a:t>As primary producers, plants convert inorganic carbon into organic compounds. Every food chain on Earth — from herbivores to apex predators — depends on this process.</a:t>
-            </a:r>
-          </a:p>
-        </p:txBody>
-      </p:sp>
-      <p:sp>
-        <p:nvSpPr>
-          <p:cNvPr id="12" name="Rectangle 11"/>
+              <a:t>FOOD CHAIN</a:t>
+            </a:r>
+          </a:p>
+        </p:txBody>
+      </p:sp>
+      <p:sp>
+        <p:nvSpPr>
+          <p:cNvPr id="12" name="TextBox 11"/>
+          <p:cNvSpPr txBox="1"/>
+          <p:nvPr/>
+        </p:nvSpPr>
+        <p:spPr>
+          <a:xfrm>
+            <a:off x="6400800" y="2286000"/>
+            <a:ext cx="4389120" cy="640080"/>
+          </a:xfrm>
+          <a:prstGeom prst="rect">
+            <a:avLst/>
+          </a:prstGeom>
+          <a:noFill/>
+        </p:spPr>
+        <p:txBody>
+          <a:bodyPr wrap="square">
+            <a:spAutoFit/>
+          </a:bodyPr>
+          <a:lstStyle/>
+          <a:p>
+            <a:pPr algn="l">
+              <a:lnSpc>
+                <a:spcPct val="115000"/>
+              </a:lnSpc>
+              <a:defRPr sz="1400" b="0">
+                <a:solidFill>
+                  <a:srgbClr val="1B4332"/>
+                </a:solidFill>
+                <a:latin typeface="Calibri Light"/>
+              </a:defRPr>
+            </a:pPr>
+            <a:r>
+              <a:t>No photosynthesis = no plants = no animals = no humans. It's the base of everything.</a:t>
+            </a:r>
+          </a:p>
+        </p:txBody>
+      </p:sp>
+      <p:sp>
+        <p:nvSpPr>
+          <p:cNvPr id="13" name="Rounded Rectangle 12"/>
           <p:cNvSpPr/>
           <p:nvPr/>
         </p:nvSpPr>
         <p:spPr>
           <a:xfrm>
-            <a:off x="365760" y="3794760"/>
-            <a:ext cx="11430000" cy="1097280"/>
-          </a:xfrm>
-          <a:prstGeom prst="rect">
+            <a:off x="731520" y="3246120"/>
+            <a:ext cx="5120640" cy="1234440"/>
+          </a:xfrm>
+          <a:prstGeom prst="roundRect">
             <a:avLst/>
           </a:prstGeom>
           <a:solidFill>
-            <a:srgbClr val="E8F5E9"/>
+            <a:srgbClr val="FFFFFF"/>
           </a:solidFill>
           <a:ln w="12700">
             <a:solidFill>
-              <a:srgbClr val="4CAF50"/>
+              <a:srgbClr val="D0E4D8"/>
             </a:solidFill>
           </a:ln>
         </p:spPr>
@@ -7410,20 +7668,20 @@
       </p:sp>
       <p:sp>
         <p:nvSpPr>
-          <p:cNvPr id="13" name="Rectangle 12"/>
+          <p:cNvPr id="14" name="Rectangle 13"/>
           <p:cNvSpPr/>
           <p:nvPr/>
         </p:nvSpPr>
         <p:spPr>
           <a:xfrm>
-            <a:off x="365760" y="3794760"/>
-            <a:ext cx="2743200" cy="1097280"/>
+            <a:off x="731520" y="3246120"/>
+            <a:ext cx="73152" cy="1234440"/>
           </a:xfrm>
           <a:prstGeom prst="rect">
             <a:avLst/>
           </a:prstGeom>
           <a:solidFill>
-            <a:srgbClr val="4CAF50"/>
+            <a:srgbClr val="2D6A4F"/>
           </a:solidFill>
           <a:ln>
             <a:noFill/>
@@ -7453,48 +7711,14 @@
       </p:sp>
       <p:sp>
         <p:nvSpPr>
-          <p:cNvPr id="14" name="TextBox 13"/>
-          <p:cNvSpPr txBox="1"/>
-          <p:nvPr/>
-        </p:nvSpPr>
-        <p:spPr>
-          <a:xfrm>
-            <a:off x="548640" y="4069080"/>
-            <a:ext cx="2377440" cy="548640"/>
-          </a:xfrm>
-          <a:prstGeom prst="rect">
-            <a:avLst/>
-          </a:prstGeom>
-          <a:noFill/>
-        </p:spPr>
-        <p:txBody>
-          <a:bodyPr wrap="square"/>
-          <a:lstStyle/>
-          <a:p>
-            <a:pPr algn="l">
-              <a:defRPr sz="1600" b="1">
-                <a:solidFill>
-                  <a:srgbClr val="FFFFFF"/>
-                </a:solidFill>
-                <a:latin typeface="Calibri"/>
-              </a:defRPr>
-            </a:pPr>
-            <a:r>
-              <a:t>🌡️  Climate Regulation</a:t>
-            </a:r>
-          </a:p>
-        </p:txBody>
-      </p:sp>
-      <p:sp>
-        <p:nvSpPr>
           <p:cNvPr id="15" name="TextBox 14"/>
           <p:cNvSpPr txBox="1"/>
           <p:nvPr/>
         </p:nvSpPr>
         <p:spPr>
           <a:xfrm>
-            <a:off x="3383280" y="3931920"/>
-            <a:ext cx="8229600" cy="822960"/>
+            <a:off x="1005840" y="3355848"/>
+            <a:ext cx="4389120" cy="320040"/>
           </a:xfrm>
           <a:prstGeom prst="rect">
             <a:avLst/>
@@ -7502,43 +7726,87 @@
           <a:noFill/>
         </p:spPr>
         <p:txBody>
-          <a:bodyPr wrap="square"/>
+          <a:bodyPr wrap="square">
+            <a:spAutoFit/>
+          </a:bodyPr>
           <a:lstStyle/>
           <a:p>
             <a:pPr algn="l">
-              <a:defRPr sz="1200" b="0">
-                <a:solidFill>
-                  <a:srgbClr val="333333"/>
+              <a:lnSpc>
+                <a:spcPct val="115000"/>
+              </a:lnSpc>
+              <a:defRPr sz="1600" b="1">
+                <a:solidFill>
+                  <a:srgbClr val="2D6A4F"/>
                 </a:solidFill>
                 <a:latin typeface="Calibri"/>
               </a:defRPr>
             </a:pPr>
             <a:r>
-              <a:t>Photosynthesis removes ~120 Gt of CO₂ from the atmosphere annually. Forests and oceans act as carbon sinks, mitigating the greenhouse effect and regulating global temperatures.</a:t>
-            </a:r>
-          </a:p>
-        </p:txBody>
-      </p:sp>
-      <p:sp>
-        <p:nvSpPr>
-          <p:cNvPr id="16" name="Rectangle 15"/>
+              <a:t>CLIMATE</a:t>
+            </a:r>
+          </a:p>
+        </p:txBody>
+      </p:sp>
+      <p:sp>
+        <p:nvSpPr>
+          <p:cNvPr id="16" name="TextBox 15"/>
+          <p:cNvSpPr txBox="1"/>
+          <p:nvPr/>
+        </p:nvSpPr>
+        <p:spPr>
+          <a:xfrm>
+            <a:off x="1005840" y="3749040"/>
+            <a:ext cx="4389120" cy="640080"/>
+          </a:xfrm>
+          <a:prstGeom prst="rect">
+            <a:avLst/>
+          </a:prstGeom>
+          <a:noFill/>
+        </p:spPr>
+        <p:txBody>
+          <a:bodyPr wrap="square">
+            <a:spAutoFit/>
+          </a:bodyPr>
+          <a:lstStyle/>
+          <a:p>
+            <a:pPr algn="l">
+              <a:lnSpc>
+                <a:spcPct val="115000"/>
+              </a:lnSpc>
+              <a:defRPr sz="1400" b="0">
+                <a:solidFill>
+                  <a:srgbClr val="1B4332"/>
+                </a:solidFill>
+                <a:latin typeface="Calibri Light"/>
+              </a:defRPr>
+            </a:pPr>
+            <a:r>
+              <a:t>Plants absorb CO₂, the main greenhouse gas. They're Earth's natural thermostat.</a:t>
+            </a:r>
+          </a:p>
+        </p:txBody>
+      </p:sp>
+      <p:sp>
+        <p:nvSpPr>
+          <p:cNvPr id="17" name="Rounded Rectangle 16"/>
           <p:cNvSpPr/>
           <p:nvPr/>
         </p:nvSpPr>
         <p:spPr>
           <a:xfrm>
-            <a:off x="365760" y="5029200"/>
-            <a:ext cx="11430000" cy="1097280"/>
-          </a:xfrm>
-          <a:prstGeom prst="rect">
+            <a:off x="6126480" y="3246120"/>
+            <a:ext cx="5120640" cy="1234440"/>
+          </a:xfrm>
+          <a:prstGeom prst="roundRect">
             <a:avLst/>
           </a:prstGeom>
           <a:solidFill>
-            <a:srgbClr val="E8F5E9"/>
+            <a:srgbClr val="FFFFFF"/>
           </a:solidFill>
           <a:ln w="12700">
             <a:solidFill>
-              <a:srgbClr val="4CAF50"/>
+              <a:srgbClr val="D0E4D8"/>
             </a:solidFill>
           </a:ln>
         </p:spPr>
@@ -7566,20 +7834,20 @@
       </p:sp>
       <p:sp>
         <p:nvSpPr>
-          <p:cNvPr id="17" name="Rectangle 16"/>
+          <p:cNvPr id="18" name="Rectangle 17"/>
           <p:cNvSpPr/>
           <p:nvPr/>
         </p:nvSpPr>
         <p:spPr>
           <a:xfrm>
-            <a:off x="365760" y="5029200"/>
-            <a:ext cx="2743200" cy="1097280"/>
+            <a:off x="6126480" y="3246120"/>
+            <a:ext cx="73152" cy="1234440"/>
           </a:xfrm>
           <a:prstGeom prst="rect">
             <a:avLst/>
           </a:prstGeom>
           <a:solidFill>
-            <a:srgbClr val="4CAF50"/>
+            <a:srgbClr val="D4A337"/>
           </a:solidFill>
           <a:ln>
             <a:noFill/>
@@ -7609,48 +7877,14 @@
       </p:sp>
       <p:sp>
         <p:nvSpPr>
-          <p:cNvPr id="18" name="TextBox 17"/>
-          <p:cNvSpPr txBox="1"/>
-          <p:nvPr/>
-        </p:nvSpPr>
-        <p:spPr>
-          <a:xfrm>
-            <a:off x="548640" y="5303520"/>
-            <a:ext cx="2377440" cy="548640"/>
-          </a:xfrm>
-          <a:prstGeom prst="rect">
-            <a:avLst/>
-          </a:prstGeom>
-          <a:noFill/>
-        </p:spPr>
-        <p:txBody>
-          <a:bodyPr wrap="square"/>
-          <a:lstStyle/>
-          <a:p>
-            <a:pPr algn="l">
-              <a:defRPr sz="1600" b="1">
-                <a:solidFill>
-                  <a:srgbClr val="FFFFFF"/>
-                </a:solidFill>
-                <a:latin typeface="Calibri"/>
-              </a:defRPr>
-            </a:pPr>
-            <a:r>
-              <a:t>⚡  Renewable Energy</a:t>
-            </a:r>
-          </a:p>
-        </p:txBody>
-      </p:sp>
-      <p:sp>
-        <p:nvSpPr>
           <p:cNvPr id="19" name="TextBox 18"/>
           <p:cNvSpPr txBox="1"/>
           <p:nvPr/>
         </p:nvSpPr>
         <p:spPr>
           <a:xfrm>
-            <a:off x="3383280" y="5166360"/>
-            <a:ext cx="8229600" cy="822960"/>
+            <a:off x="6400800" y="3355848"/>
+            <a:ext cx="4389120" cy="320040"/>
           </a:xfrm>
           <a:prstGeom prst="rect">
             <a:avLst/>
@@ -7658,39 +7892,83 @@
           <a:noFill/>
         </p:spPr>
         <p:txBody>
-          <a:bodyPr wrap="square"/>
+          <a:bodyPr wrap="square">
+            <a:spAutoFit/>
+          </a:bodyPr>
           <a:lstStyle/>
           <a:p>
             <a:pPr algn="l">
-              <a:defRPr sz="1200" b="0">
-                <a:solidFill>
-                  <a:srgbClr val="333333"/>
+              <a:lnSpc>
+                <a:spcPct val="115000"/>
+              </a:lnSpc>
+              <a:defRPr sz="1600" b="1">
+                <a:solidFill>
+                  <a:srgbClr val="D4A337"/>
                 </a:solidFill>
                 <a:latin typeface="Calibri"/>
               </a:defRPr>
             </a:pPr>
             <a:r>
-              <a:t>Biofuels, biomass energy, and even fossil fuels (ancient photosynthetic matter) trace back to photosynthesis. Understanding it inspires artificial photosynthesis research.</a:t>
-            </a:r>
-          </a:p>
-        </p:txBody>
-      </p:sp>
-      <p:sp>
-        <p:nvSpPr>
-          <p:cNvPr id="20" name="Rectangle 19"/>
+              <a:t>DEFORESTATION</a:t>
+            </a:r>
+          </a:p>
+        </p:txBody>
+      </p:sp>
+      <p:sp>
+        <p:nvSpPr>
+          <p:cNvPr id="20" name="TextBox 19"/>
+          <p:cNvSpPr txBox="1"/>
+          <p:nvPr/>
+        </p:nvSpPr>
+        <p:spPr>
+          <a:xfrm>
+            <a:off x="6400800" y="3749040"/>
+            <a:ext cx="4389120" cy="640080"/>
+          </a:xfrm>
+          <a:prstGeom prst="rect">
+            <a:avLst/>
+          </a:prstGeom>
+          <a:noFill/>
+        </p:spPr>
+        <p:txBody>
+          <a:bodyPr wrap="square">
+            <a:spAutoFit/>
+          </a:bodyPr>
+          <a:lstStyle/>
+          <a:p>
+            <a:pPr algn="l">
+              <a:lnSpc>
+                <a:spcPct val="115000"/>
+              </a:lnSpc>
+              <a:defRPr sz="1400" b="0">
+                <a:solidFill>
+                  <a:srgbClr val="1B4332"/>
+                </a:solidFill>
+                <a:latin typeface="Calibri Light"/>
+              </a:defRPr>
+            </a:pPr>
+            <a:r>
+              <a:t>Cutting down forests is literally turning off Earth's oxygen factories.</a:t>
+            </a:r>
+          </a:p>
+        </p:txBody>
+      </p:sp>
+      <p:sp>
+        <p:nvSpPr>
+          <p:cNvPr id="21" name="Rounded Rectangle 20"/>
           <p:cNvSpPr/>
           <p:nvPr/>
         </p:nvSpPr>
         <p:spPr>
           <a:xfrm>
-            <a:off x="365760" y="6309360"/>
-            <a:ext cx="11430000" cy="411480"/>
-          </a:xfrm>
-          <a:prstGeom prst="rect">
+            <a:off x="731520" y="4663440"/>
+            <a:ext cx="10698480" cy="914400"/>
+          </a:xfrm>
+          <a:prstGeom prst="roundRect">
             <a:avLst/>
           </a:prstGeom>
           <a:solidFill>
-            <a:srgbClr val="1B5E20"/>
+            <a:srgbClr val="1B4332"/>
           </a:solidFill>
           <a:ln>
             <a:noFill/>
@@ -7720,48 +7998,14 @@
       </p:sp>
       <p:sp>
         <p:nvSpPr>
-          <p:cNvPr id="21" name="TextBox 20"/>
-          <p:cNvSpPr txBox="1"/>
-          <p:nvPr/>
-        </p:nvSpPr>
-        <p:spPr>
-          <a:xfrm>
-            <a:off x="640080" y="6336792"/>
-            <a:ext cx="10881360" cy="347472"/>
-          </a:xfrm>
-          <a:prstGeom prst="rect">
-            <a:avLst/>
-          </a:prstGeom>
-          <a:noFill/>
-        </p:spPr>
-        <p:txBody>
-          <a:bodyPr wrap="square"/>
-          <a:lstStyle/>
-          <a:p>
-            <a:pPr algn="ctr">
-              <a:defRPr sz="1100" b="0">
-                <a:solidFill>
-                  <a:srgbClr val="FFFFFF"/>
-                </a:solidFill>
-                <a:latin typeface="Calibri"/>
-              </a:defRPr>
-            </a:pPr>
-            <a:r>
-              <a:t>🌱  "In every walk with nature, one receives far more than he seeks." — John Muir</a:t>
-            </a:r>
-          </a:p>
-        </p:txBody>
-      </p:sp>
-      <p:sp>
-        <p:nvSpPr>
           <p:cNvPr id="22" name="TextBox 21"/>
           <p:cNvSpPr txBox="1"/>
           <p:nvPr/>
         </p:nvSpPr>
         <p:spPr>
           <a:xfrm>
-            <a:off x="457200" y="6336792"/>
-            <a:ext cx="4572000" cy="365760"/>
+            <a:off x="1097280" y="4800600"/>
+            <a:ext cx="10058400" cy="640080"/>
           </a:xfrm>
           <a:prstGeom prst="rect">
             <a:avLst/>
@@ -7769,19 +8013,24 @@
           <a:noFill/>
         </p:spPr>
         <p:txBody>
-          <a:bodyPr wrap="square"/>
-          <a:lstStyle/>
-          <a:p>
-            <a:pPr algn="l">
-              <a:defRPr sz="900" b="0">
-                <a:solidFill>
-                  <a:srgbClr val="FFFFFF"/>
-                </a:solidFill>
-                <a:latin typeface="Calibri"/>
+          <a:bodyPr wrap="square">
+            <a:spAutoFit/>
+          </a:bodyPr>
+          <a:lstStyle/>
+          <a:p>
+            <a:pPr algn="ctr">
+              <a:lnSpc>
+                <a:spcPct val="115000"/>
+              </a:lnSpc>
+              <a:defRPr sz="2000" b="0">
+                <a:solidFill>
+                  <a:srgbClr val="F0D060"/>
+                </a:solidFill>
+                <a:latin typeface="Calibri Light"/>
               </a:defRPr>
             </a:pPr>
             <a:r>
-              <a:t>Photosynthesis: How Plants Make Their Own Food  |  Dr. James Rodriguez</a:t>
+              <a:t>🌳  A single large tree produces enough oxygen for 2–4 humans per year.</a:t>
             </a:r>
           </a:p>
         </p:txBody>
@@ -7794,8 +8043,8 @@
         </p:nvSpPr>
         <p:spPr>
           <a:xfrm>
-            <a:off x="11155680" y="6336792"/>
-            <a:ext cx="731520" cy="365760"/>
+            <a:off x="731520" y="5852160"/>
+            <a:ext cx="10698480" cy="365760"/>
           </a:xfrm>
           <a:prstGeom prst="rect">
             <a:avLst/>
@@ -7803,20 +8052,68 @@
           <a:noFill/>
         </p:spPr>
         <p:txBody>
-          <a:bodyPr wrap="square"/>
-          <a:lstStyle/>
-          <a:p>
-            <a:pPr algn="r">
-              <a:defRPr sz="900" b="1">
-                <a:solidFill>
-                  <a:srgbClr val="FFFFFF"/>
+          <a:bodyPr wrap="square">
+            <a:spAutoFit/>
+          </a:bodyPr>
+          <a:lstStyle/>
+          <a:p>
+            <a:pPr algn="ctr">
+              <a:lnSpc>
+                <a:spcPct val="115000"/>
+              </a:lnSpc>
+              <a:defRPr sz="1200" b="0">
+                <a:solidFill>
+                  <a:srgbClr val="6B9080"/>
                 </a:solidFill>
                 <a:latin typeface="Calibri"/>
               </a:defRPr>
             </a:pPr>
             <a:r>
-              <a:t>5</a:t>
-            </a:r>
+              <a:t>The ocean's phytoplankton produce 50–80% of Earth's oxygen. Every other breath = ocean.</a:t>
+            </a:r>
+          </a:p>
+        </p:txBody>
+      </p:sp>
+      <p:sp>
+        <p:nvSpPr>
+          <p:cNvPr id="24" name="Rectangle 23"/>
+          <p:cNvSpPr/>
+          <p:nvPr/>
+        </p:nvSpPr>
+        <p:spPr>
+          <a:xfrm>
+            <a:off x="0" y="6803136"/>
+            <a:ext cx="12191695" cy="54864"/>
+          </a:xfrm>
+          <a:prstGeom prst="rect">
+            <a:avLst/>
+          </a:prstGeom>
+          <a:solidFill>
+            <a:srgbClr val="1B4332"/>
+          </a:solidFill>
+          <a:ln>
+            <a:noFill/>
+          </a:ln>
+        </p:spPr>
+        <p:style>
+          <a:lnRef idx="1">
+            <a:schemeClr val="accent1"/>
+          </a:lnRef>
+          <a:fillRef idx="3">
+            <a:schemeClr val="accent1"/>
+          </a:fillRef>
+          <a:effectRef idx="2">
+            <a:schemeClr val="accent1"/>
+          </a:effectRef>
+          <a:fontRef idx="minor">
+            <a:schemeClr val="lt1"/>
+          </a:fontRef>
+        </p:style>
+        <p:txBody>
+          <a:bodyPr rtlCol="0" anchor="ctr"/>
+          <a:lstStyle/>
+          <a:p>
+            <a:pPr algn="ctr"/>
           </a:p>
         </p:txBody>
       </p:sp>
@@ -7834,7 +8131,7 @@
     <p:bg>
       <p:bgPr>
         <a:solidFill>
-          <a:srgbClr val="1B5E20"/>
+          <a:srgbClr val="1B4332"/>
         </a:solidFill>
         <a:effectLst/>
       </p:bgPr>
@@ -7854,14 +8151,14 @@
         </p:nvSpPr>
         <p:spPr>
           <a:xfrm>
-            <a:off x="0" y="2377440"/>
-            <a:ext cx="12191695" cy="2560320"/>
+            <a:off x="0" y="0"/>
+            <a:ext cx="12191695" cy="73152"/>
           </a:xfrm>
           <a:prstGeom prst="rect">
             <a:avLst/>
           </a:prstGeom>
           <a:solidFill>
-            <a:srgbClr val="2E7D32"/>
+            <a:srgbClr val="52B788"/>
           </a:solidFill>
           <a:ln>
             <a:noFill/>
@@ -7897,8 +8194,8 @@
         </p:nvSpPr>
         <p:spPr>
           <a:xfrm>
-            <a:off x="914400" y="548640"/>
-            <a:ext cx="10332720" cy="914400"/>
+            <a:off x="1097280" y="822960"/>
+            <a:ext cx="9966960" cy="640080"/>
           </a:xfrm>
           <a:prstGeom prst="rect">
             <a:avLst/>
@@ -7906,11 +8203,16 @@
           <a:noFill/>
         </p:spPr>
         <p:txBody>
-          <a:bodyPr wrap="square"/>
+          <a:bodyPr wrap="square">
+            <a:spAutoFit/>
+          </a:bodyPr>
           <a:lstStyle/>
           <a:p>
             <a:pPr algn="ctr">
-              <a:defRPr sz="4400" b="1">
+              <a:lnSpc>
+                <a:spcPct val="115000"/>
+              </a:lnSpc>
+              <a:defRPr sz="4400" b="0">
                 <a:solidFill>
                   <a:srgbClr val="FFFFFF"/>
                 </a:solidFill>
@@ -7918,76 +8220,94 @@
               </a:defRPr>
             </a:pPr>
             <a:r>
-              <a:t>Summary &amp; Key Takeaways</a:t>
-            </a:r>
-          </a:p>
-        </p:txBody>
-      </p:sp>
-      <p:sp>
-        <p:nvSpPr>
-          <p:cNvPr id="4" name="TextBox 3"/>
-          <p:cNvSpPr txBox="1"/>
-          <p:nvPr/>
-        </p:nvSpPr>
-        <p:spPr>
-          <a:xfrm>
-            <a:off x="1371600" y="2651760"/>
-            <a:ext cx="9418320" cy="365760"/>
-          </a:xfrm>
-          <a:prstGeom prst="rect">
-            <a:avLst/>
-          </a:prstGeom>
-          <a:noFill/>
-        </p:spPr>
-        <p:txBody>
-          <a:bodyPr wrap="square"/>
-          <a:lstStyle/>
-          <a:p>
-            <a:pPr algn="l">
-              <a:defRPr sz="1600" b="0">
-                <a:solidFill>
-                  <a:srgbClr val="FFFFFF"/>
-                </a:solidFill>
-                <a:latin typeface="Calibri"/>
-              </a:defRPr>
-            </a:pPr>
-            <a:r>
-              <a:t>✦  Photosynthesis converts light energy → chemical energy (glucose)</a:t>
-            </a:r>
-          </a:p>
-        </p:txBody>
-      </p:sp>
-      <p:sp>
-        <p:nvSpPr>
-          <p:cNvPr id="5" name="TextBox 4"/>
-          <p:cNvSpPr txBox="1"/>
-          <p:nvPr/>
-        </p:nvSpPr>
-        <p:spPr>
-          <a:xfrm>
-            <a:off x="1371600" y="3035808"/>
-            <a:ext cx="9418320" cy="365760"/>
-          </a:xfrm>
-          <a:prstGeom prst="rect">
-            <a:avLst/>
-          </a:prstGeom>
-          <a:noFill/>
-        </p:spPr>
-        <p:txBody>
-          <a:bodyPr wrap="square"/>
-          <a:lstStyle/>
-          <a:p>
-            <a:pPr algn="l">
-              <a:defRPr sz="1600" b="0">
-                <a:solidFill>
-                  <a:srgbClr val="FFFFFF"/>
-                </a:solidFill>
-                <a:latin typeface="Calibri"/>
-              </a:defRPr>
-            </a:pPr>
-            <a:r>
-              <a:t>✦  Requires four key ingredients: Sunlight, Water, CO₂, and Chlorophyll</a:t>
-            </a:r>
+              <a:t>Key Takeaways</a:t>
+            </a:r>
+          </a:p>
+        </p:txBody>
+      </p:sp>
+      <p:sp>
+        <p:nvSpPr>
+          <p:cNvPr id="4" name="Rectangle 3"/>
+          <p:cNvSpPr/>
+          <p:nvPr/>
+        </p:nvSpPr>
+        <p:spPr>
+          <a:xfrm>
+            <a:off x="4572000" y="1417320"/>
+            <a:ext cx="3017520" cy="27432"/>
+          </a:xfrm>
+          <a:prstGeom prst="rect">
+            <a:avLst/>
+          </a:prstGeom>
+          <a:solidFill>
+            <a:srgbClr val="52B788"/>
+          </a:solidFill>
+          <a:ln>
+            <a:noFill/>
+          </a:ln>
+        </p:spPr>
+        <p:style>
+          <a:lnRef idx="1">
+            <a:schemeClr val="accent1"/>
+          </a:lnRef>
+          <a:fillRef idx="3">
+            <a:schemeClr val="accent1"/>
+          </a:fillRef>
+          <a:effectRef idx="2">
+            <a:schemeClr val="accent1"/>
+          </a:effectRef>
+          <a:fontRef idx="minor">
+            <a:schemeClr val="lt1"/>
+          </a:fontRef>
+        </p:style>
+        <p:txBody>
+          <a:bodyPr rtlCol="0" anchor="ctr"/>
+          <a:lstStyle/>
+          <a:p>
+            <a:pPr algn="ctr"/>
+          </a:p>
+        </p:txBody>
+      </p:sp>
+      <p:sp>
+        <p:nvSpPr>
+          <p:cNvPr id="5" name="Oval 4"/>
+          <p:cNvSpPr/>
+          <p:nvPr/>
+        </p:nvSpPr>
+        <p:spPr>
+          <a:xfrm>
+            <a:off x="1280160" y="1965960"/>
+            <a:ext cx="502920" cy="502920"/>
+          </a:xfrm>
+          <a:prstGeom prst="ellipse">
+            <a:avLst/>
+          </a:prstGeom>
+          <a:solidFill>
+            <a:srgbClr val="52B788"/>
+          </a:solidFill>
+          <a:ln>
+            <a:noFill/>
+          </a:ln>
+        </p:spPr>
+        <p:style>
+          <a:lnRef idx="1">
+            <a:schemeClr val="accent1"/>
+          </a:lnRef>
+          <a:fillRef idx="3">
+            <a:schemeClr val="accent1"/>
+          </a:fillRef>
+          <a:effectRef idx="2">
+            <a:schemeClr val="accent1"/>
+          </a:effectRef>
+          <a:fontRef idx="minor">
+            <a:schemeClr val="lt1"/>
+          </a:fontRef>
+        </p:style>
+        <p:txBody>
+          <a:bodyPr rtlCol="0" anchor="ctr"/>
+          <a:lstStyle/>
+          <a:p>
+            <a:pPr algn="ctr"/>
           </a:p>
         </p:txBody>
       </p:sp>
@@ -7999,8 +8319,8 @@
         </p:nvSpPr>
         <p:spPr>
           <a:xfrm>
-            <a:off x="1371600" y="3419856"/>
-            <a:ext cx="9418320" cy="365760"/>
+            <a:off x="1280160" y="2057400"/>
+            <a:ext cx="502920" cy="502920"/>
           </a:xfrm>
           <a:prstGeom prst="rect">
             <a:avLst/>
@@ -8008,19 +8328,24 @@
           <a:noFill/>
         </p:spPr>
         <p:txBody>
-          <a:bodyPr wrap="square"/>
-          <a:lstStyle/>
-          <a:p>
-            <a:pPr algn="l">
-              <a:defRPr sz="1600" b="0">
-                <a:solidFill>
-                  <a:srgbClr val="FFFFFF"/>
+          <a:bodyPr wrap="square">
+            <a:spAutoFit/>
+          </a:bodyPr>
+          <a:lstStyle/>
+          <a:p>
+            <a:pPr algn="ctr">
+              <a:lnSpc>
+                <a:spcPct val="115000"/>
+              </a:lnSpc>
+              <a:defRPr sz="2000" b="1">
+                <a:solidFill>
+                  <a:srgbClr val="1B4332"/>
                 </a:solidFill>
                 <a:latin typeface="Calibri"/>
               </a:defRPr>
             </a:pPr>
             <a:r>
-              <a:t>✦  Two stages: Light-Dependent Reactions + Calvin Cycle</a:t>
+              <a:t>1</a:t>
             </a:r>
           </a:p>
         </p:txBody>
@@ -8033,8 +8358,8 @@
         </p:nvSpPr>
         <p:spPr>
           <a:xfrm>
-            <a:off x="1371600" y="3803904"/>
-            <a:ext cx="9418320" cy="365760"/>
+            <a:off x="2103120" y="1965960"/>
+            <a:ext cx="8686800" cy="914400"/>
           </a:xfrm>
           <a:prstGeom prst="rect">
             <a:avLst/>
@@ -8042,54 +8367,72 @@
           <a:noFill/>
         </p:spPr>
         <p:txBody>
-          <a:bodyPr wrap="square"/>
+          <a:bodyPr wrap="square">
+            <a:spAutoFit/>
+          </a:bodyPr>
           <a:lstStyle/>
           <a:p>
             <a:pPr algn="l">
-              <a:defRPr sz="1600" b="0">
+              <a:lnSpc>
+                <a:spcPct val="115000"/>
+              </a:lnSpc>
+              <a:defRPr sz="1800" b="0">
                 <a:solidFill>
                   <a:srgbClr val="FFFFFF"/>
                 </a:solidFill>
-                <a:latin typeface="Calibri"/>
+                <a:latin typeface="Calibri Light"/>
               </a:defRPr>
             </a:pPr>
             <a:r>
-              <a:t>✦  Produces oxygen essential for aerobic life on Earth</a:t>
-            </a:r>
-          </a:p>
-        </p:txBody>
-      </p:sp>
-      <p:sp>
-        <p:nvSpPr>
-          <p:cNvPr id="8" name="TextBox 7"/>
-          <p:cNvSpPr txBox="1"/>
-          <p:nvPr/>
-        </p:nvSpPr>
-        <p:spPr>
-          <a:xfrm>
-            <a:off x="1371600" y="4187952"/>
-            <a:ext cx="9418320" cy="365760"/>
-          </a:xfrm>
-          <a:prstGeom prst="rect">
-            <a:avLst/>
-          </a:prstGeom>
-          <a:noFill/>
-        </p:spPr>
-        <p:txBody>
-          <a:bodyPr wrap="square"/>
-          <a:lstStyle/>
-          <a:p>
-            <a:pPr algn="l">
-              <a:defRPr sz="1600" b="0">
-                <a:solidFill>
-                  <a:srgbClr val="FFFFFF"/>
-                </a:solidFill>
-                <a:latin typeface="Calibri"/>
-              </a:defRPr>
-            </a:pPr>
-            <a:r>
-              <a:t>✦  Foundation of global food chains and carbon cycle regulation</a:t>
-            </a:r>
+              <a:t>Photosynthesis turns sunlight into chemical energy —</a:t>
+            </a:r>
+            <a:br/>
+            <a:r>
+              <a:t>the most important chemical reaction on Earth.</a:t>
+            </a:r>
+          </a:p>
+        </p:txBody>
+      </p:sp>
+      <p:sp>
+        <p:nvSpPr>
+          <p:cNvPr id="8" name="Oval 7"/>
+          <p:cNvSpPr/>
+          <p:nvPr/>
+        </p:nvSpPr>
+        <p:spPr>
+          <a:xfrm>
+            <a:off x="1280160" y="2926080"/>
+            <a:ext cx="502920" cy="502920"/>
+          </a:xfrm>
+          <a:prstGeom prst="ellipse">
+            <a:avLst/>
+          </a:prstGeom>
+          <a:solidFill>
+            <a:srgbClr val="52B788"/>
+          </a:solidFill>
+          <a:ln>
+            <a:noFill/>
+          </a:ln>
+        </p:spPr>
+        <p:style>
+          <a:lnRef idx="1">
+            <a:schemeClr val="accent1"/>
+          </a:lnRef>
+          <a:fillRef idx="3">
+            <a:schemeClr val="accent1"/>
+          </a:fillRef>
+          <a:effectRef idx="2">
+            <a:schemeClr val="accent1"/>
+          </a:effectRef>
+          <a:fontRef idx="minor">
+            <a:schemeClr val="lt1"/>
+          </a:fontRef>
+        </p:style>
+        <p:txBody>
+          <a:bodyPr rtlCol="0" anchor="ctr"/>
+          <a:lstStyle/>
+          <a:p>
+            <a:pPr algn="ctr"/>
           </a:p>
         </p:txBody>
       </p:sp>
@@ -8101,8 +8444,8 @@
         </p:nvSpPr>
         <p:spPr>
           <a:xfrm>
-            <a:off x="914400" y="5120640"/>
-            <a:ext cx="10332720" cy="640080"/>
+            <a:off x="1280160" y="3017520"/>
+            <a:ext cx="502920" cy="502920"/>
           </a:xfrm>
           <a:prstGeom prst="rect">
             <a:avLst/>
@@ -8110,19 +8453,24 @@
           <a:noFill/>
         </p:spPr>
         <p:txBody>
-          <a:bodyPr wrap="square"/>
+          <a:bodyPr wrap="square">
+            <a:spAutoFit/>
+          </a:bodyPr>
           <a:lstStyle/>
           <a:p>
             <a:pPr algn="ctr">
-              <a:defRPr sz="3200" b="1">
-                <a:solidFill>
-                  <a:srgbClr val="CDDC39"/>
-                </a:solidFill>
-                <a:latin typeface="Calibri Light"/>
+              <a:lnSpc>
+                <a:spcPct val="115000"/>
+              </a:lnSpc>
+              <a:defRPr sz="2000" b="1">
+                <a:solidFill>
+                  <a:srgbClr val="1B4332"/>
+                </a:solidFill>
+                <a:latin typeface="Calibri"/>
               </a:defRPr>
             </a:pPr>
             <a:r>
-              <a:t>Questions &amp; Discussion</a:t>
+              <a:t>2</a:t>
             </a:r>
           </a:p>
         </p:txBody>
@@ -8135,8 +8483,8 @@
         </p:nvSpPr>
         <p:spPr>
           <a:xfrm>
-            <a:off x="914400" y="5669280"/>
-            <a:ext cx="10332720" cy="457200"/>
+            <a:off x="2103120" y="2926080"/>
+            <a:ext cx="8686800" cy="914400"/>
           </a:xfrm>
           <a:prstGeom prst="rect">
             <a:avLst/>
@@ -8144,54 +8492,72 @@
           <a:noFill/>
         </p:spPr>
         <p:txBody>
-          <a:bodyPr wrap="square"/>
-          <a:lstStyle/>
-          <a:p>
-            <a:pPr algn="ctr">
-              <a:defRPr sz="1600" b="0">
+          <a:bodyPr wrap="square">
+            <a:spAutoFit/>
+          </a:bodyPr>
+          <a:lstStyle/>
+          <a:p>
+            <a:pPr algn="l">
+              <a:lnSpc>
+                <a:spcPct val="115000"/>
+              </a:lnSpc>
+              <a:defRPr sz="1800" b="0">
                 <a:solidFill>
                   <a:srgbClr val="FFFFFF"/>
                 </a:solidFill>
-                <a:latin typeface="Calibri"/>
+                <a:latin typeface="Calibri Light"/>
               </a:defRPr>
             </a:pPr>
             <a:r>
-              <a:t>Thank you for your attention!  We welcome your questions.</a:t>
-            </a:r>
-          </a:p>
-        </p:txBody>
-      </p:sp>
-      <p:sp>
-        <p:nvSpPr>
-          <p:cNvPr id="11" name="TextBox 10"/>
-          <p:cNvSpPr txBox="1"/>
-          <p:nvPr/>
-        </p:nvSpPr>
-        <p:spPr>
-          <a:xfrm>
-            <a:off x="457200" y="6336792"/>
-            <a:ext cx="4572000" cy="365760"/>
-          </a:xfrm>
-          <a:prstGeom prst="rect">
-            <a:avLst/>
-          </a:prstGeom>
-          <a:noFill/>
-        </p:spPr>
-        <p:txBody>
-          <a:bodyPr wrap="square"/>
-          <a:lstStyle/>
-          <a:p>
-            <a:pPr algn="l">
-              <a:defRPr sz="900" b="0">
-                <a:solidFill>
-                  <a:srgbClr val="FFFFFF"/>
-                </a:solidFill>
-                <a:latin typeface="Calibri"/>
-              </a:defRPr>
-            </a:pPr>
-            <a:r>
-              <a:t>Photosynthesis: How Plants Make Their Own Food  |  Prof. Emily Nakamura</a:t>
-            </a:r>
+              <a:t>Two phases: Light Reactions (capture energy)</a:t>
+            </a:r>
+            <a:br/>
+            <a:r>
+              <a:t>→  Calvin Cycle (build sugar).</a:t>
+            </a:r>
+          </a:p>
+        </p:txBody>
+      </p:sp>
+      <p:sp>
+        <p:nvSpPr>
+          <p:cNvPr id="11" name="Oval 10"/>
+          <p:cNvSpPr/>
+          <p:nvPr/>
+        </p:nvSpPr>
+        <p:spPr>
+          <a:xfrm>
+            <a:off x="1280160" y="3886200"/>
+            <a:ext cx="502920" cy="502920"/>
+          </a:xfrm>
+          <a:prstGeom prst="ellipse">
+            <a:avLst/>
+          </a:prstGeom>
+          <a:solidFill>
+            <a:srgbClr val="52B788"/>
+          </a:solidFill>
+          <a:ln>
+            <a:noFill/>
+          </a:ln>
+        </p:spPr>
+        <p:style>
+          <a:lnRef idx="1">
+            <a:schemeClr val="accent1"/>
+          </a:lnRef>
+          <a:fillRef idx="3">
+            <a:schemeClr val="accent1"/>
+          </a:fillRef>
+          <a:effectRef idx="2">
+            <a:schemeClr val="accent1"/>
+          </a:effectRef>
+          <a:fontRef idx="minor">
+            <a:schemeClr val="lt1"/>
+          </a:fontRef>
+        </p:style>
+        <p:txBody>
+          <a:bodyPr rtlCol="0" anchor="ctr"/>
+          <a:lstStyle/>
+          <a:p>
+            <a:pPr algn="ctr"/>
           </a:p>
         </p:txBody>
       </p:sp>
@@ -8203,8 +8569,8 @@
         </p:nvSpPr>
         <p:spPr>
           <a:xfrm>
-            <a:off x="11155680" y="6336792"/>
-            <a:ext cx="731520" cy="365760"/>
+            <a:off x="1280160" y="3977639"/>
+            <a:ext cx="502920" cy="502920"/>
           </a:xfrm>
           <a:prstGeom prst="rect">
             <a:avLst/>
@@ -8212,20 +8578,351 @@
           <a:noFill/>
         </p:spPr>
         <p:txBody>
-          <a:bodyPr wrap="square"/>
-          <a:lstStyle/>
-          <a:p>
-            <a:pPr algn="r">
-              <a:defRPr sz="900" b="1">
+          <a:bodyPr wrap="square">
+            <a:spAutoFit/>
+          </a:bodyPr>
+          <a:lstStyle/>
+          <a:p>
+            <a:pPr algn="ctr">
+              <a:lnSpc>
+                <a:spcPct val="115000"/>
+              </a:lnSpc>
+              <a:defRPr sz="2000" b="1">
+                <a:solidFill>
+                  <a:srgbClr val="1B4332"/>
+                </a:solidFill>
+                <a:latin typeface="Calibri"/>
+              </a:defRPr>
+            </a:pPr>
+            <a:r>
+              <a:t>3</a:t>
+            </a:r>
+          </a:p>
+        </p:txBody>
+      </p:sp>
+      <p:sp>
+        <p:nvSpPr>
+          <p:cNvPr id="13" name="TextBox 12"/>
+          <p:cNvSpPr txBox="1"/>
+          <p:nvPr/>
+        </p:nvSpPr>
+        <p:spPr>
+          <a:xfrm>
+            <a:off x="2103120" y="3886200"/>
+            <a:ext cx="8686800" cy="914400"/>
+          </a:xfrm>
+          <a:prstGeom prst="rect">
+            <a:avLst/>
+          </a:prstGeom>
+          <a:noFill/>
+        </p:spPr>
+        <p:txBody>
+          <a:bodyPr wrap="square">
+            <a:spAutoFit/>
+          </a:bodyPr>
+          <a:lstStyle/>
+          <a:p>
+            <a:pPr algn="l">
+              <a:lnSpc>
+                <a:spcPct val="115000"/>
+              </a:lnSpc>
+              <a:defRPr sz="1800" b="0">
                 <a:solidFill>
                   <a:srgbClr val="FFFFFF"/>
                 </a:solidFill>
+                <a:latin typeface="Calibri Light"/>
+              </a:defRPr>
+            </a:pPr>
+            <a:r>
+              <a:t>Every food chain on Earth starts with photosynthesis.</a:t>
+            </a:r>
+          </a:p>
+        </p:txBody>
+      </p:sp>
+      <p:sp>
+        <p:nvSpPr>
+          <p:cNvPr id="14" name="Oval 13"/>
+          <p:cNvSpPr/>
+          <p:nvPr/>
+        </p:nvSpPr>
+        <p:spPr>
+          <a:xfrm>
+            <a:off x="1280160" y="4846320"/>
+            <a:ext cx="502920" cy="502920"/>
+          </a:xfrm>
+          <a:prstGeom prst="ellipse">
+            <a:avLst/>
+          </a:prstGeom>
+          <a:solidFill>
+            <a:srgbClr val="52B788"/>
+          </a:solidFill>
+          <a:ln>
+            <a:noFill/>
+          </a:ln>
+        </p:spPr>
+        <p:style>
+          <a:lnRef idx="1">
+            <a:schemeClr val="accent1"/>
+          </a:lnRef>
+          <a:fillRef idx="3">
+            <a:schemeClr val="accent1"/>
+          </a:fillRef>
+          <a:effectRef idx="2">
+            <a:schemeClr val="accent1"/>
+          </a:effectRef>
+          <a:fontRef idx="minor">
+            <a:schemeClr val="lt1"/>
+          </a:fontRef>
+        </p:style>
+        <p:txBody>
+          <a:bodyPr rtlCol="0" anchor="ctr"/>
+          <a:lstStyle/>
+          <a:p>
+            <a:pPr algn="ctr"/>
+          </a:p>
+        </p:txBody>
+      </p:sp>
+      <p:sp>
+        <p:nvSpPr>
+          <p:cNvPr id="15" name="TextBox 14"/>
+          <p:cNvSpPr txBox="1"/>
+          <p:nvPr/>
+        </p:nvSpPr>
+        <p:spPr>
+          <a:xfrm>
+            <a:off x="1280160" y="4937759"/>
+            <a:ext cx="502920" cy="502920"/>
+          </a:xfrm>
+          <a:prstGeom prst="rect">
+            <a:avLst/>
+          </a:prstGeom>
+          <a:noFill/>
+        </p:spPr>
+        <p:txBody>
+          <a:bodyPr wrap="square">
+            <a:spAutoFit/>
+          </a:bodyPr>
+          <a:lstStyle/>
+          <a:p>
+            <a:pPr algn="ctr">
+              <a:lnSpc>
+                <a:spcPct val="115000"/>
+              </a:lnSpc>
+              <a:defRPr sz="2000" b="1">
+                <a:solidFill>
+                  <a:srgbClr val="1B4332"/>
+                </a:solidFill>
                 <a:latin typeface="Calibri"/>
               </a:defRPr>
             </a:pPr>
             <a:r>
-              <a:t>6</a:t>
-            </a:r>
+              <a:t>4</a:t>
+            </a:r>
+          </a:p>
+        </p:txBody>
+      </p:sp>
+      <p:sp>
+        <p:nvSpPr>
+          <p:cNvPr id="16" name="TextBox 15"/>
+          <p:cNvSpPr txBox="1"/>
+          <p:nvPr/>
+        </p:nvSpPr>
+        <p:spPr>
+          <a:xfrm>
+            <a:off x="2103120" y="4846320"/>
+            <a:ext cx="8686800" cy="914400"/>
+          </a:xfrm>
+          <a:prstGeom prst="rect">
+            <a:avLst/>
+          </a:prstGeom>
+          <a:noFill/>
+        </p:spPr>
+        <p:txBody>
+          <a:bodyPr wrap="square">
+            <a:spAutoFit/>
+          </a:bodyPr>
+          <a:lstStyle/>
+          <a:p>
+            <a:pPr algn="l">
+              <a:lnSpc>
+                <a:spcPct val="115000"/>
+              </a:lnSpc>
+              <a:defRPr sz="1800" b="0">
+                <a:solidFill>
+                  <a:srgbClr val="FFFFFF"/>
+                </a:solidFill>
+                <a:latin typeface="Calibri Light"/>
+              </a:defRPr>
+            </a:pPr>
+            <a:r>
+              <a:t>Protecting forests = protecting the planet's life support system.</a:t>
+            </a:r>
+          </a:p>
+        </p:txBody>
+      </p:sp>
+      <p:sp>
+        <p:nvSpPr>
+          <p:cNvPr id="17" name="Rounded Rectangle 16"/>
+          <p:cNvSpPr/>
+          <p:nvPr/>
+        </p:nvSpPr>
+        <p:spPr>
+          <a:xfrm>
+            <a:off x="1280160" y="5806440"/>
+            <a:ext cx="9601200" cy="731520"/>
+          </a:xfrm>
+          <a:prstGeom prst="roundRect">
+            <a:avLst/>
+          </a:prstGeom>
+          <a:solidFill>
+            <a:srgbClr val="24523F"/>
+          </a:solidFill>
+          <a:ln w="12700">
+            <a:solidFill>
+              <a:srgbClr val="52B788"/>
+            </a:solidFill>
+          </a:ln>
+        </p:spPr>
+        <p:style>
+          <a:lnRef idx="1">
+            <a:schemeClr val="accent1"/>
+          </a:lnRef>
+          <a:fillRef idx="3">
+            <a:schemeClr val="accent1"/>
+          </a:fillRef>
+          <a:effectRef idx="2">
+            <a:schemeClr val="accent1"/>
+          </a:effectRef>
+          <a:fontRef idx="minor">
+            <a:schemeClr val="lt1"/>
+          </a:fontRef>
+        </p:style>
+        <p:txBody>
+          <a:bodyPr rtlCol="0" anchor="ctr"/>
+          <a:lstStyle/>
+          <a:p>
+            <a:pPr algn="ctr"/>
+          </a:p>
+        </p:txBody>
+      </p:sp>
+      <p:sp>
+        <p:nvSpPr>
+          <p:cNvPr id="18" name="TextBox 17"/>
+          <p:cNvSpPr txBox="1"/>
+          <p:nvPr/>
+        </p:nvSpPr>
+        <p:spPr>
+          <a:xfrm>
+            <a:off x="1645920" y="5897880"/>
+            <a:ext cx="8869680" cy="548640"/>
+          </a:xfrm>
+          <a:prstGeom prst="rect">
+            <a:avLst/>
+          </a:prstGeom>
+          <a:noFill/>
+        </p:spPr>
+        <p:txBody>
+          <a:bodyPr wrap="square">
+            <a:spAutoFit/>
+          </a:bodyPr>
+          <a:lstStyle/>
+          <a:p>
+            <a:pPr algn="ctr">
+              <a:lnSpc>
+                <a:spcPct val="115000"/>
+              </a:lnSpc>
+              <a:defRPr sz="2000" b="0">
+                <a:solidFill>
+                  <a:srgbClr val="F0D060"/>
+                </a:solidFill>
+                <a:latin typeface="Calibri Light"/>
+              </a:defRPr>
+            </a:pPr>
+            <a:r>
+              <a:t>"Next time you see a leaf — that's a solar-powered food factory. Respect it."</a:t>
+            </a:r>
+          </a:p>
+        </p:txBody>
+      </p:sp>
+      <p:sp>
+        <p:nvSpPr>
+          <p:cNvPr id="19" name="TextBox 18"/>
+          <p:cNvSpPr txBox="1"/>
+          <p:nvPr/>
+        </p:nvSpPr>
+        <p:spPr>
+          <a:xfrm>
+            <a:off x="1097280" y="6537960"/>
+            <a:ext cx="9966960" cy="274320"/>
+          </a:xfrm>
+          <a:prstGeom prst="rect">
+            <a:avLst/>
+          </a:prstGeom>
+          <a:noFill/>
+        </p:spPr>
+        <p:txBody>
+          <a:bodyPr wrap="square">
+            <a:spAutoFit/>
+          </a:bodyPr>
+          <a:lstStyle/>
+          <a:p>
+            <a:pPr algn="ctr">
+              <a:lnSpc>
+                <a:spcPct val="115000"/>
+              </a:lnSpc>
+              <a:defRPr sz="1400" b="1">
+                <a:solidFill>
+                  <a:srgbClr val="6B9080"/>
+                </a:solidFill>
+                <a:latin typeface="Calibri"/>
+              </a:defRPr>
+            </a:pPr>
+            <a:r>
+              <a:t>Questions &amp; Answers</a:t>
+            </a:r>
+          </a:p>
+        </p:txBody>
+      </p:sp>
+      <p:sp>
+        <p:nvSpPr>
+          <p:cNvPr id="20" name="Rectangle 19"/>
+          <p:cNvSpPr/>
+          <p:nvPr/>
+        </p:nvSpPr>
+        <p:spPr>
+          <a:xfrm>
+            <a:off x="0" y="6784848"/>
+            <a:ext cx="12191695" cy="73152"/>
+          </a:xfrm>
+          <a:prstGeom prst="rect">
+            <a:avLst/>
+          </a:prstGeom>
+          <a:solidFill>
+            <a:srgbClr val="52B788"/>
+          </a:solidFill>
+          <a:ln>
+            <a:noFill/>
+          </a:ln>
+        </p:spPr>
+        <p:style>
+          <a:lnRef idx="1">
+            <a:schemeClr val="accent1"/>
+          </a:lnRef>
+          <a:fillRef idx="3">
+            <a:schemeClr val="accent1"/>
+          </a:fillRef>
+          <a:effectRef idx="2">
+            <a:schemeClr val="accent1"/>
+          </a:effectRef>
+          <a:fontRef idx="minor">
+            <a:schemeClr val="lt1"/>
+          </a:fontRef>
+        </p:style>
+        <p:txBody>
+          <a:bodyPr rtlCol="0" anchor="ctr"/>
+          <a:lstStyle/>
+          <a:p>
+            <a:pPr algn="ctr"/>
           </a:p>
         </p:txBody>
       </p:sp>
